--- a/Materi_IPH_2026.pptx
+++ b/Materi_IPH_2026.pptx
@@ -119,6 +119,2307 @@
 </p:presentation>
 </file>
 
+<file path=ppt/charts/chart1.xml><?xml version="1.0" encoding="utf-8"?>
+<c:chartSpace xmlns:c="http://schemas.openxmlformats.org/drawingml/2006/chart" xmlns:a="http://schemas.openxmlformats.org/drawingml/2006/main" xmlns:r="http://schemas.openxmlformats.org/officeDocument/2006/relationships" xmlns:c16r2="http://schemas.microsoft.com/office/drawing/2015/06/chart">
+  <c:date1904 val="0"/>
+  <c:lang val="en-US"/>
+  <c:roundedCorners val="1"/>
+  <c:style val="2"/>
+  <c:chart>
+    <c:title>
+      <c:tx>
+        <c:rich>
+          <a:bodyPr/>
+          <a:lstStyle/>
+          <a:p>
+            <a:pPr>
+              <a:defRPr sz="1300" b="0" i="0" u="none" strike="noStrike">
+                <a:solidFill>
+                  <a:srgbClr val="0F172A"/>
+                </a:solidFill>
+                <a:latin typeface="Arial"/>
+              </a:defRPr>
+            </a:pPr>
+            <a:r>
+              <a:rPr sz="1300" b="0" i="0" u="none" strike="noStrike">
+                <a:solidFill>
+                  <a:srgbClr val="0F172A"/>
+                </a:solidFill>
+                <a:latin typeface="Arial"/>
+              </a:rPr>
+              <a:t>Rata-rata IPH Bulanan Kab. Kepulauan Selayar 2026</a:t>
+            </a:r>
+          </a:p>
+        </c:rich>
+      </c:tx>
+      <c:overlay val="0"/>
+    </c:title>
+    <c:autoTitleDeleted val="0"/>
+    <c:plotArea>
+      <c:layout/>
+      <c:lineChart>
+        <c:grouping val="standard"/>
+        <c:varyColors val="0"/>
+        <c:ser>
+          <c:idx val="0"/>
+          <c:order val="0"/>
+          <c:tx>
+            <c:strRef>
+              <c:f>Sheet1!$B$1</c:f>
+              <c:strCache>
+                <c:ptCount val="1"/>
+                <c:pt idx="0">
+                  <c:v>IPH (%)</c:v>
+                </c:pt>
+              </c:strCache>
+            </c:strRef>
+          </c:tx>
+          <c:spPr>
+            <a:ln w="38100" cap="flat">
+              <a:solidFill>
+                <a:srgbClr val="0284C7"/>
+              </a:solidFill>
+              <a:prstDash val="solid"/>
+              <a:round/>
+            </a:ln>
+            <a:effectLst/>
+          </c:spPr>
+          <c:marker>
+            <c:symbol val="circle"/>
+            <c:size val="8"/>
+            <c:spPr>
+              <a:solidFill>
+                <a:srgbClr val="0284C7"/>
+              </a:solidFill>
+              <a:ln w="9525" cap="flat">
+                <a:solidFill>
+                  <a:srgbClr val="0284C7"/>
+                </a:solidFill>
+                <a:prstDash val="solid"/>
+                <a:round/>
+              </a:ln>
+              <a:effectLst/>
+            </c:spPr>
+          </c:marker>
+          <c:dLbls>
+            <c:numFmt formatCode="\+0.00%;\-0.00%" sourceLinked="0"/>
+            <c:spPr>
+              <a:noFill/>
+              <a:ln>
+                <a:noFill/>
+              </a:ln>
+              <a:effectLst/>
+            </c:spPr>
+            <c:txPr>
+              <a:bodyPr/>
+              <a:lstStyle/>
+              <a:p>
+                <a:pPr>
+                  <a:defRPr sz="1100" b="0" i="0" u="none" strike="noStrike">
+                    <a:solidFill>
+                      <a:srgbClr val="0F172A"/>
+                    </a:solidFill>
+                    <a:latin typeface="Arial"/>
+                  </a:defRPr>
+                </a:pPr>
+                <a:endParaRPr lang="en-US"/>
+              </a:p>
+            </c:txPr>
+            <c:showLegendKey val="0"/>
+            <c:showVal val="1"/>
+            <c:showCatName val="0"/>
+            <c:showSerName val="0"/>
+            <c:showPercent val="0"/>
+            <c:showBubbleSize val="0"/>
+            <c:showLeaderLines val="0"/>
+            <c:extLst>
+              <c:ext xmlns:c15="http://schemas.microsoft.com/office/drawing/2012/chart" uri="{CE6537A1-D6FC-4f65-9D91-7224C49458BB}">
+                <c15:showLeaderLines val="0"/>
+              </c:ext>
+            </c:extLst>
+          </c:dLbls>
+          <c:cat>
+            <c:strRef>
+              <c:f>Sheet1!$A$2:$A$11</c:f>
+              <c:strCache>
+                <c:ptCount val="10"/>
+                <c:pt idx="0">
+                  <c:v>Jan</c:v>
+                </c:pt>
+                <c:pt idx="1">
+                  <c:v>Feb</c:v>
+                </c:pt>
+                <c:pt idx="2">
+                  <c:v>Mar</c:v>
+                </c:pt>
+                <c:pt idx="3">
+                  <c:v>Apr</c:v>
+                </c:pt>
+                <c:pt idx="4">
+                  <c:v>Mei</c:v>
+                </c:pt>
+                <c:pt idx="5">
+                  <c:v>Jun</c:v>
+                </c:pt>
+                <c:pt idx="6">
+                  <c:v>Jul</c:v>
+                </c:pt>
+                <c:pt idx="7">
+                  <c:v>Agu</c:v>
+                </c:pt>
+                <c:pt idx="8">
+                  <c:v>Sep</c:v>
+                </c:pt>
+                <c:pt idx="9">
+                  <c:v>Okt</c:v>
+                </c:pt>
+              </c:strCache>
+            </c:strRef>
+          </c:cat>
+          <c:val>
+            <c:numRef>
+              <c:f>Sheet1!$B$2:$B$11</c:f>
+              <c:numCache>
+                <c:formatCode>General</c:formatCode>
+                <c:ptCount val="10"/>
+                <c:pt idx="0">
+                  <c:v>-0.22</c:v>
+                </c:pt>
+                <c:pt idx="1">
+                  <c:v>-1.48</c:v>
+                </c:pt>
+                <c:pt idx="2">
+                  <c:v>0.82</c:v>
+                </c:pt>
+                <c:pt idx="3">
+                  <c:v>1.62</c:v>
+                </c:pt>
+                <c:pt idx="4">
+                  <c:v>-0.5</c:v>
+                </c:pt>
+                <c:pt idx="5">
+                  <c:v>-0.57999999999999996</c:v>
+                </c:pt>
+                <c:pt idx="6">
+                  <c:v>-1.75</c:v>
+                </c:pt>
+                <c:pt idx="7">
+                  <c:v>-0.51</c:v>
+                </c:pt>
+                <c:pt idx="8">
+                  <c:v>1.05</c:v>
+                </c:pt>
+                <c:pt idx="9">
+                  <c:v>0.84</c:v>
+                </c:pt>
+              </c:numCache>
+            </c:numRef>
+          </c:val>
+          <c:smooth val="0"/>
+          <c:extLst>
+            <c:ext xmlns:c16="http://schemas.microsoft.com/office/drawing/2014/chart" uri="{C3380CC4-5D6E-409C-BE32-E72D297353CC}">
+              <c16:uniqueId val="{00000000-6D34-F642-8C89-8D538989CFD7}"/>
+            </c:ext>
+          </c:extLst>
+        </c:ser>
+        <c:dLbls>
+          <c:showLegendKey val="0"/>
+          <c:showVal val="1"/>
+          <c:showCatName val="0"/>
+          <c:showSerName val="0"/>
+          <c:showPercent val="0"/>
+          <c:showBubbleSize val="0"/>
+        </c:dLbls>
+        <c:marker val="1"/>
+        <c:smooth val="0"/>
+        <c:axId val="2094734554"/>
+        <c:axId val="2094734552"/>
+      </c:lineChart>
+      <c:catAx>
+        <c:axId val="2094734554"/>
+        <c:scaling>
+          <c:orientation val="minMax"/>
+        </c:scaling>
+        <c:delete val="0"/>
+        <c:axPos val="b"/>
+        <c:numFmt formatCode="General" sourceLinked="1"/>
+        <c:majorTickMark val="out"/>
+        <c:minorTickMark val="none"/>
+        <c:tickLblPos val="low"/>
+        <c:spPr>
+          <a:ln w="12700" cap="flat">
+            <a:solidFill>
+              <a:srgbClr val="888888"/>
+            </a:solidFill>
+            <a:prstDash val="solid"/>
+            <a:round/>
+          </a:ln>
+        </c:spPr>
+        <c:txPr>
+          <a:bodyPr/>
+          <a:lstStyle/>
+          <a:p>
+            <a:pPr>
+              <a:defRPr sz="1200" b="0" i="0" u="none" strike="noStrike">
+                <a:solidFill>
+                  <a:srgbClr val="000000"/>
+                </a:solidFill>
+                <a:latin typeface="Arial"/>
+              </a:defRPr>
+            </a:pPr>
+            <a:endParaRPr lang="en-US"/>
+          </a:p>
+        </c:txPr>
+        <c:crossAx val="2094734552"/>
+        <c:crosses val="autoZero"/>
+        <c:auto val="1"/>
+        <c:lblAlgn val="ctr"/>
+        <c:lblOffset val="100"/>
+        <c:noMultiLvlLbl val="1"/>
+      </c:catAx>
+      <c:valAx>
+        <c:axId val="2094734552"/>
+        <c:scaling>
+          <c:orientation val="minMax"/>
+          <c:max val="2.5"/>
+          <c:min val="-2.5"/>
+        </c:scaling>
+        <c:delete val="0"/>
+        <c:axPos val="l"/>
+        <c:majorGridlines>
+          <c:spPr>
+            <a:ln w="12700" cap="flat">
+              <a:solidFill>
+                <a:srgbClr val="CBD5E1"/>
+              </a:solidFill>
+              <a:prstDash val="dash"/>
+              <a:round/>
+            </a:ln>
+          </c:spPr>
+        </c:majorGridlines>
+        <c:numFmt formatCode="General" sourceLinked="0"/>
+        <c:majorTickMark val="out"/>
+        <c:minorTickMark val="none"/>
+        <c:tickLblPos val="nextTo"/>
+        <c:spPr>
+          <a:ln w="12700" cap="flat">
+            <a:solidFill>
+              <a:srgbClr val="888888"/>
+            </a:solidFill>
+            <a:prstDash val="solid"/>
+            <a:round/>
+          </a:ln>
+        </c:spPr>
+        <c:txPr>
+          <a:bodyPr/>
+          <a:lstStyle/>
+          <a:p>
+            <a:pPr>
+              <a:defRPr sz="1200" b="0" i="0" u="none" strike="noStrike">
+                <a:solidFill>
+                  <a:srgbClr val="000000"/>
+                </a:solidFill>
+                <a:latin typeface="Arial"/>
+              </a:defRPr>
+            </a:pPr>
+            <a:endParaRPr lang="en-US"/>
+          </a:p>
+        </c:txPr>
+        <c:crossAx val="2094734554"/>
+        <c:crosses val="autoZero"/>
+        <c:crossBetween val="between"/>
+      </c:valAx>
+      <c:spPr>
+        <a:noFill/>
+        <a:ln>
+          <a:noFill/>
+        </a:ln>
+        <a:effectLst/>
+      </c:spPr>
+    </c:plotArea>
+    <c:plotVisOnly val="1"/>
+    <c:dispBlanksAs val="span"/>
+    <c:showDLblsOverMax val="1"/>
+  </c:chart>
+  <c:spPr>
+    <a:noFill/>
+    <a:ln>
+      <a:noFill/>
+    </a:ln>
+    <a:effectLst/>
+  </c:spPr>
+  <c:externalData r:id="rId1">
+    <c:autoUpdate val="0"/>
+  </c:externalData>
+</c:chartSpace>
+</file>
+
+<file path=ppt/charts/chart2.xml><?xml version="1.0" encoding="utf-8"?>
+<c:chartSpace xmlns:c="http://schemas.openxmlformats.org/drawingml/2006/chart" xmlns:a="http://schemas.openxmlformats.org/drawingml/2006/main" xmlns:r="http://schemas.openxmlformats.org/officeDocument/2006/relationships" xmlns:c16r2="http://schemas.microsoft.com/office/drawing/2015/06/chart">
+  <c:date1904 val="0"/>
+  <c:lang val="en-US"/>
+  <c:roundedCorners val="1"/>
+  <c:style val="2"/>
+  <c:chart>
+    <c:title>
+      <c:tx>
+        <c:rich>
+          <a:bodyPr/>
+          <a:lstStyle/>
+          <a:p>
+            <a:pPr>
+              <a:defRPr sz="1100" b="0" i="0" u="none" strike="noStrike">
+                <a:solidFill>
+                  <a:srgbClr val="0F172A"/>
+                </a:solidFill>
+                <a:latin typeface="Arial"/>
+              </a:defRPr>
+            </a:pPr>
+            <a:r>
+              <a:rPr sz="1100" b="0" i="0" u="none" strike="noStrike">
+                <a:solidFill>
+                  <a:srgbClr val="0F172A"/>
+                </a:solidFill>
+                <a:latin typeface="Arial"/>
+              </a:rPr>
+              <a:t>Fluktuasi Mingguan Fase Ramadan &amp; Idul Fitri</a:t>
+            </a:r>
+          </a:p>
+        </c:rich>
+      </c:tx>
+      <c:overlay val="0"/>
+    </c:title>
+    <c:autoTitleDeleted val="0"/>
+    <c:plotArea>
+      <c:layout/>
+      <c:barChart>
+        <c:barDir val="col"/>
+        <c:grouping val="clustered"/>
+        <c:varyColors val="0"/>
+        <c:ser>
+          <c:idx val="0"/>
+          <c:order val="0"/>
+          <c:tx>
+            <c:strRef>
+              <c:f>Sheet1!$B$1</c:f>
+              <c:strCache>
+                <c:ptCount val="1"/>
+                <c:pt idx="0">
+                  <c:v>IPH Mingguan</c:v>
+                </c:pt>
+              </c:strCache>
+            </c:strRef>
+          </c:tx>
+          <c:spPr>
+            <a:solidFill>
+              <a:srgbClr val="DC2626"/>
+            </a:solidFill>
+            <a:effectLst/>
+          </c:spPr>
+          <c:invertIfNegative val="0"/>
+          <c:dLbls>
+            <c:numFmt formatCode="#,##0" sourceLinked="0"/>
+            <c:spPr>
+              <a:noFill/>
+              <a:ln>
+                <a:noFill/>
+              </a:ln>
+              <a:effectLst/>
+            </c:spPr>
+            <c:txPr>
+              <a:bodyPr/>
+              <a:lstStyle/>
+              <a:p>
+                <a:pPr>
+                  <a:defRPr sz="1000" b="0" i="0" u="none" strike="noStrike">
+                    <a:solidFill>
+                      <a:srgbClr val="0F172A"/>
+                    </a:solidFill>
+                    <a:latin typeface="Arial"/>
+                  </a:defRPr>
+                </a:pPr>
+                <a:endParaRPr lang="en-US"/>
+              </a:p>
+            </c:txPr>
+            <c:showLegendKey val="0"/>
+            <c:showVal val="1"/>
+            <c:showCatName val="0"/>
+            <c:showSerName val="0"/>
+            <c:showPercent val="0"/>
+            <c:showBubbleSize val="0"/>
+            <c:showLeaderLines val="0"/>
+            <c:extLst>
+              <c:ext xmlns:c15="http://schemas.microsoft.com/office/drawing/2012/chart" uri="{CE6537A1-D6FC-4f65-9D91-7224C49458BB}">
+                <c15:showLeaderLines val="0"/>
+              </c:ext>
+            </c:extLst>
+          </c:dLbls>
+          <c:cat>
+            <c:strRef>
+              <c:f>Sheet1!$A$2:$A$7</c:f>
+              <c:strCache>
+                <c:ptCount val="6"/>
+                <c:pt idx="0">
+                  <c:v>Mar W1</c:v>
+                </c:pt>
+                <c:pt idx="1">
+                  <c:v>Mar W2</c:v>
+                </c:pt>
+                <c:pt idx="2">
+                  <c:v>Apr W1</c:v>
+                </c:pt>
+                <c:pt idx="3">
+                  <c:v>Apr W2</c:v>
+                </c:pt>
+                <c:pt idx="4">
+                  <c:v>Apr W4</c:v>
+                </c:pt>
+                <c:pt idx="5">
+                  <c:v>Apr W5</c:v>
+                </c:pt>
+              </c:strCache>
+            </c:strRef>
+          </c:cat>
+          <c:val>
+            <c:numRef>
+              <c:f>Sheet1!$B$2:$B$7</c:f>
+              <c:numCache>
+                <c:formatCode>General</c:formatCode>
+                <c:ptCount val="6"/>
+                <c:pt idx="0">
+                  <c:v>0.37</c:v>
+                </c:pt>
+                <c:pt idx="1">
+                  <c:v>1.28</c:v>
+                </c:pt>
+                <c:pt idx="2">
+                  <c:v>3.26</c:v>
+                </c:pt>
+                <c:pt idx="3">
+                  <c:v>-3.29</c:v>
+                </c:pt>
+                <c:pt idx="4">
+                  <c:v>3.29</c:v>
+                </c:pt>
+                <c:pt idx="5">
+                  <c:v>3.23</c:v>
+                </c:pt>
+              </c:numCache>
+            </c:numRef>
+          </c:val>
+          <c:extLst>
+            <c:ext xmlns:c16="http://schemas.microsoft.com/office/drawing/2014/chart" uri="{C3380CC4-5D6E-409C-BE32-E72D297353CC}">
+              <c16:uniqueId val="{00000000-A41C-4249-8776-8A462D3D0E9D}"/>
+            </c:ext>
+          </c:extLst>
+        </c:ser>
+        <c:dLbls>
+          <c:showLegendKey val="0"/>
+          <c:showVal val="1"/>
+          <c:showCatName val="0"/>
+          <c:showSerName val="0"/>
+          <c:showPercent val="0"/>
+          <c:showBubbleSize val="0"/>
+        </c:dLbls>
+        <c:gapWidth val="150"/>
+        <c:axId val="2094734554"/>
+        <c:axId val="2094734552"/>
+      </c:barChart>
+      <c:catAx>
+        <c:axId val="2094734554"/>
+        <c:scaling>
+          <c:orientation val="minMax"/>
+        </c:scaling>
+        <c:delete val="0"/>
+        <c:axPos val="b"/>
+        <c:numFmt formatCode="General" sourceLinked="1"/>
+        <c:majorTickMark val="out"/>
+        <c:minorTickMark val="none"/>
+        <c:tickLblPos val="low"/>
+        <c:spPr>
+          <a:ln w="12700" cap="flat">
+            <a:solidFill>
+              <a:srgbClr val="888888"/>
+            </a:solidFill>
+            <a:prstDash val="solid"/>
+            <a:round/>
+          </a:ln>
+        </c:spPr>
+        <c:txPr>
+          <a:bodyPr/>
+          <a:lstStyle/>
+          <a:p>
+            <a:pPr>
+              <a:defRPr sz="1200" b="0" i="0" u="none" strike="noStrike">
+                <a:solidFill>
+                  <a:srgbClr val="000000"/>
+                </a:solidFill>
+                <a:latin typeface="Arial"/>
+              </a:defRPr>
+            </a:pPr>
+            <a:endParaRPr lang="en-US"/>
+          </a:p>
+        </c:txPr>
+        <c:crossAx val="2094734552"/>
+        <c:crosses val="autoZero"/>
+        <c:auto val="1"/>
+        <c:lblAlgn val="ctr"/>
+        <c:lblOffset val="100"/>
+        <c:noMultiLvlLbl val="1"/>
+      </c:catAx>
+      <c:valAx>
+        <c:axId val="2094734552"/>
+        <c:scaling>
+          <c:orientation val="minMax"/>
+        </c:scaling>
+        <c:delete val="0"/>
+        <c:axPos val="l"/>
+        <c:majorGridlines>
+          <c:spPr>
+            <a:ln w="12700" cap="flat">
+              <a:solidFill>
+                <a:srgbClr val="CBD5E1"/>
+              </a:solidFill>
+              <a:prstDash val="dash"/>
+              <a:round/>
+            </a:ln>
+          </c:spPr>
+        </c:majorGridlines>
+        <c:numFmt formatCode="General" sourceLinked="0"/>
+        <c:majorTickMark val="out"/>
+        <c:minorTickMark val="none"/>
+        <c:tickLblPos val="nextTo"/>
+        <c:spPr>
+          <a:ln w="12700" cap="flat">
+            <a:solidFill>
+              <a:srgbClr val="888888"/>
+            </a:solidFill>
+            <a:prstDash val="solid"/>
+            <a:round/>
+          </a:ln>
+        </c:spPr>
+        <c:txPr>
+          <a:bodyPr/>
+          <a:lstStyle/>
+          <a:p>
+            <a:pPr>
+              <a:defRPr sz="1200" b="0" i="0" u="none" strike="noStrike">
+                <a:solidFill>
+                  <a:srgbClr val="000000"/>
+                </a:solidFill>
+                <a:latin typeface="Arial"/>
+              </a:defRPr>
+            </a:pPr>
+            <a:endParaRPr lang="en-US"/>
+          </a:p>
+        </c:txPr>
+        <c:crossAx val="2094734554"/>
+        <c:crosses val="autoZero"/>
+        <c:crossBetween val="between"/>
+      </c:valAx>
+      <c:spPr>
+        <a:noFill/>
+        <a:ln>
+          <a:noFill/>
+        </a:ln>
+        <a:effectLst/>
+      </c:spPr>
+    </c:plotArea>
+    <c:plotVisOnly val="1"/>
+    <c:dispBlanksAs val="span"/>
+    <c:showDLblsOverMax val="1"/>
+  </c:chart>
+  <c:spPr>
+    <a:noFill/>
+    <a:ln>
+      <a:noFill/>
+    </a:ln>
+    <a:effectLst/>
+  </c:spPr>
+  <c:externalData r:id="rId1">
+    <c:autoUpdate val="0"/>
+  </c:externalData>
+</c:chartSpace>
+</file>
+
+<file path=ppt/charts/chart3.xml><?xml version="1.0" encoding="utf-8"?>
+<c:chartSpace xmlns:c="http://schemas.openxmlformats.org/drawingml/2006/chart" xmlns:a="http://schemas.openxmlformats.org/drawingml/2006/main" xmlns:r="http://schemas.openxmlformats.org/officeDocument/2006/relationships" xmlns:c16r2="http://schemas.microsoft.com/office/drawing/2015/06/chart">
+  <c:date1904 val="0"/>
+  <c:lang val="en-US"/>
+  <c:roundedCorners val="1"/>
+  <c:style val="2"/>
+  <c:chart>
+    <c:title>
+      <c:tx>
+        <c:rich>
+          <a:bodyPr/>
+          <a:lstStyle/>
+          <a:p>
+            <a:pPr>
+              <a:defRPr sz="1100" b="0" i="0" u="none" strike="noStrike">
+                <a:solidFill>
+                  <a:srgbClr val="0F172A"/>
+                </a:solidFill>
+                <a:latin typeface="Arial"/>
+              </a:defRPr>
+            </a:pPr>
+            <a:r>
+              <a:rPr sz="1100" b="0" i="0" u="none" strike="noStrike">
+                <a:solidFill>
+                  <a:srgbClr val="0F172A"/>
+                </a:solidFill>
+                <a:latin typeface="Arial"/>
+              </a:rPr>
+              <a:t>Andil Maksimal Komoditas Pemicu HBKN (% Max)</a:t>
+            </a:r>
+          </a:p>
+        </c:rich>
+      </c:tx>
+      <c:overlay val="0"/>
+    </c:title>
+    <c:autoTitleDeleted val="0"/>
+    <c:plotArea>
+      <c:layout/>
+      <c:barChart>
+        <c:barDir val="bar"/>
+        <c:grouping val="clustered"/>
+        <c:varyColors val="0"/>
+        <c:ser>
+          <c:idx val="0"/>
+          <c:order val="0"/>
+          <c:tx>
+            <c:strRef>
+              <c:f>Sheet1!$B$1</c:f>
+              <c:strCache>
+                <c:ptCount val="1"/>
+                <c:pt idx="0">
+                  <c:v>Andil Inflasi</c:v>
+                </c:pt>
+              </c:strCache>
+            </c:strRef>
+          </c:tx>
+          <c:spPr>
+            <a:solidFill>
+              <a:srgbClr val="DC2626"/>
+            </a:solidFill>
+            <a:effectLst/>
+          </c:spPr>
+          <c:invertIfNegative val="0"/>
+          <c:dLbls>
+            <c:numFmt formatCode="#,##0" sourceLinked="0"/>
+            <c:spPr>
+              <a:noFill/>
+              <a:ln>
+                <a:noFill/>
+              </a:ln>
+              <a:effectLst/>
+            </c:spPr>
+            <c:txPr>
+              <a:bodyPr/>
+              <a:lstStyle/>
+              <a:p>
+                <a:pPr>
+                  <a:defRPr sz="1000" b="0" i="0" u="none" strike="noStrike">
+                    <a:solidFill>
+                      <a:srgbClr val="991B1B"/>
+                    </a:solidFill>
+                    <a:latin typeface="Arial"/>
+                  </a:defRPr>
+                </a:pPr>
+                <a:endParaRPr lang="en-US"/>
+              </a:p>
+            </c:txPr>
+            <c:showLegendKey val="0"/>
+            <c:showVal val="1"/>
+            <c:showCatName val="0"/>
+            <c:showSerName val="0"/>
+            <c:showPercent val="0"/>
+            <c:showBubbleSize val="0"/>
+            <c:showLeaderLines val="0"/>
+            <c:extLst>
+              <c:ext xmlns:c15="http://schemas.microsoft.com/office/drawing/2012/chart" uri="{CE6537A1-D6FC-4f65-9D91-7224C49458BB}">
+                <c15:showLeaderLines val="0"/>
+              </c:ext>
+            </c:extLst>
+          </c:dLbls>
+          <c:cat>
+            <c:strRef>
+              <c:f>Sheet1!$A$2:$A$4</c:f>
+              <c:strCache>
+                <c:ptCount val="3"/>
+                <c:pt idx="0">
+                  <c:v>Daging Ayam</c:v>
+                </c:pt>
+                <c:pt idx="1">
+                  <c:v>Telur Ayam</c:v>
+                </c:pt>
+                <c:pt idx="2">
+                  <c:v>Daging Sapi</c:v>
+                </c:pt>
+              </c:strCache>
+            </c:strRef>
+          </c:cat>
+          <c:val>
+            <c:numRef>
+              <c:f>Sheet1!$B$2:$B$4</c:f>
+              <c:numCache>
+                <c:formatCode>General</c:formatCode>
+                <c:ptCount val="3"/>
+                <c:pt idx="0">
+                  <c:v>0.92</c:v>
+                </c:pt>
+                <c:pt idx="1">
+                  <c:v>1.35</c:v>
+                </c:pt>
+                <c:pt idx="2">
+                  <c:v>2.17</c:v>
+                </c:pt>
+              </c:numCache>
+            </c:numRef>
+          </c:val>
+          <c:extLst>
+            <c:ext xmlns:c16="http://schemas.microsoft.com/office/drawing/2014/chart" uri="{C3380CC4-5D6E-409C-BE32-E72D297353CC}">
+              <c16:uniqueId val="{00000000-67DD-6541-9ACF-1E1D8C90328C}"/>
+            </c:ext>
+          </c:extLst>
+        </c:ser>
+        <c:dLbls>
+          <c:showLegendKey val="0"/>
+          <c:showVal val="1"/>
+          <c:showCatName val="0"/>
+          <c:showSerName val="0"/>
+          <c:showPercent val="0"/>
+          <c:showBubbleSize val="0"/>
+        </c:dLbls>
+        <c:gapWidth val="150"/>
+        <c:axId val="2094734554"/>
+        <c:axId val="2094734552"/>
+      </c:barChart>
+      <c:catAx>
+        <c:axId val="2094734554"/>
+        <c:scaling>
+          <c:orientation val="minMax"/>
+        </c:scaling>
+        <c:delete val="0"/>
+        <c:axPos val="l"/>
+        <c:numFmt formatCode="General" sourceLinked="1"/>
+        <c:majorTickMark val="out"/>
+        <c:minorTickMark val="none"/>
+        <c:tickLblPos val="nextTo"/>
+        <c:spPr>
+          <a:ln w="12700" cap="flat">
+            <a:solidFill>
+              <a:srgbClr val="888888"/>
+            </a:solidFill>
+            <a:prstDash val="solid"/>
+            <a:round/>
+          </a:ln>
+        </c:spPr>
+        <c:txPr>
+          <a:bodyPr/>
+          <a:lstStyle/>
+          <a:p>
+            <a:pPr>
+              <a:defRPr sz="1200" b="0" i="0" u="none" strike="noStrike">
+                <a:solidFill>
+                  <a:srgbClr val="000000"/>
+                </a:solidFill>
+                <a:latin typeface="Arial"/>
+              </a:defRPr>
+            </a:pPr>
+            <a:endParaRPr lang="en-US"/>
+          </a:p>
+        </c:txPr>
+        <c:crossAx val="2094734552"/>
+        <c:crosses val="autoZero"/>
+        <c:auto val="1"/>
+        <c:lblAlgn val="ctr"/>
+        <c:lblOffset val="100"/>
+        <c:noMultiLvlLbl val="1"/>
+      </c:catAx>
+      <c:valAx>
+        <c:axId val="2094734552"/>
+        <c:scaling>
+          <c:orientation val="minMax"/>
+        </c:scaling>
+        <c:delete val="0"/>
+        <c:axPos val="b"/>
+        <c:majorGridlines>
+          <c:spPr>
+            <a:ln w="12700" cap="flat">
+              <a:solidFill>
+                <a:srgbClr val="CBD5E1"/>
+              </a:solidFill>
+              <a:prstDash val="dash"/>
+              <a:round/>
+            </a:ln>
+          </c:spPr>
+        </c:majorGridlines>
+        <c:numFmt formatCode="General" sourceLinked="0"/>
+        <c:majorTickMark val="out"/>
+        <c:minorTickMark val="none"/>
+        <c:tickLblPos val="low"/>
+        <c:spPr>
+          <a:ln w="12700" cap="flat">
+            <a:solidFill>
+              <a:srgbClr val="888888"/>
+            </a:solidFill>
+            <a:prstDash val="solid"/>
+            <a:round/>
+          </a:ln>
+        </c:spPr>
+        <c:txPr>
+          <a:bodyPr/>
+          <a:lstStyle/>
+          <a:p>
+            <a:pPr>
+              <a:defRPr sz="1200" b="0" i="0" u="none" strike="noStrike">
+                <a:solidFill>
+                  <a:srgbClr val="000000"/>
+                </a:solidFill>
+                <a:latin typeface="Arial"/>
+              </a:defRPr>
+            </a:pPr>
+            <a:endParaRPr lang="en-US"/>
+          </a:p>
+        </c:txPr>
+        <c:crossAx val="2094734554"/>
+        <c:crosses val="autoZero"/>
+        <c:crossBetween val="between"/>
+      </c:valAx>
+      <c:spPr>
+        <a:noFill/>
+        <a:ln>
+          <a:noFill/>
+        </a:ln>
+        <a:effectLst/>
+      </c:spPr>
+    </c:plotArea>
+    <c:plotVisOnly val="1"/>
+    <c:dispBlanksAs val="span"/>
+    <c:showDLblsOverMax val="1"/>
+  </c:chart>
+  <c:spPr>
+    <a:noFill/>
+    <a:ln>
+      <a:noFill/>
+    </a:ln>
+    <a:effectLst/>
+  </c:spPr>
+  <c:externalData r:id="rId1">
+    <c:autoUpdate val="0"/>
+  </c:externalData>
+</c:chartSpace>
+</file>
+
+<file path=ppt/charts/chart4.xml><?xml version="1.0" encoding="utf-8"?>
+<c:chartSpace xmlns:c="http://schemas.openxmlformats.org/drawingml/2006/chart" xmlns:a="http://schemas.openxmlformats.org/drawingml/2006/main" xmlns:r="http://schemas.openxmlformats.org/officeDocument/2006/relationships" xmlns:c16r2="http://schemas.microsoft.com/office/drawing/2015/06/chart">
+  <c:date1904 val="0"/>
+  <c:lang val="en-US"/>
+  <c:roundedCorners val="1"/>
+  <c:style val="2"/>
+  <c:chart>
+    <c:title>
+      <c:tx>
+        <c:rich>
+          <a:bodyPr/>
+          <a:lstStyle/>
+          <a:p>
+            <a:pPr>
+              <a:defRPr sz="1100" b="0" i="0" u="none" strike="noStrike">
+                <a:solidFill>
+                  <a:srgbClr val="0F172A"/>
+                </a:solidFill>
+                <a:latin typeface="Arial"/>
+              </a:defRPr>
+            </a:pPr>
+            <a:r>
+              <a:rPr sz="1100" b="0" i="0" u="none" strike="noStrike">
+                <a:solidFill>
+                  <a:srgbClr val="0F172A"/>
+                </a:solidFill>
+                <a:latin typeface="Arial"/>
+              </a:rPr>
+              <a:t>Trajektori Deflasi Mingguan Juli 2026</a:t>
+            </a:r>
+          </a:p>
+        </c:rich>
+      </c:tx>
+      <c:overlay val="0"/>
+    </c:title>
+    <c:autoTitleDeleted val="0"/>
+    <c:plotArea>
+      <c:layout/>
+      <c:barChart>
+        <c:barDir val="col"/>
+        <c:grouping val="clustered"/>
+        <c:varyColors val="0"/>
+        <c:ser>
+          <c:idx val="0"/>
+          <c:order val="0"/>
+          <c:tx>
+            <c:strRef>
+              <c:f>Sheet1!$B$1</c:f>
+              <c:strCache>
+                <c:ptCount val="1"/>
+                <c:pt idx="0">
+                  <c:v>IPH Mingguan</c:v>
+                </c:pt>
+              </c:strCache>
+            </c:strRef>
+          </c:tx>
+          <c:spPr>
+            <a:solidFill>
+              <a:srgbClr val="16A34A"/>
+            </a:solidFill>
+            <a:effectLst/>
+          </c:spPr>
+          <c:invertIfNegative val="0"/>
+          <c:dLbls>
+            <c:numFmt formatCode="#,##0" sourceLinked="0"/>
+            <c:spPr>
+              <a:noFill/>
+              <a:ln>
+                <a:noFill/>
+              </a:ln>
+              <a:effectLst/>
+            </c:spPr>
+            <c:txPr>
+              <a:bodyPr/>
+              <a:lstStyle/>
+              <a:p>
+                <a:pPr>
+                  <a:defRPr sz="1000" b="0" i="0" u="none" strike="noStrike">
+                    <a:solidFill>
+                      <a:srgbClr val="14532D"/>
+                    </a:solidFill>
+                    <a:latin typeface="Arial"/>
+                  </a:defRPr>
+                </a:pPr>
+                <a:endParaRPr lang="en-US"/>
+              </a:p>
+            </c:txPr>
+            <c:showLegendKey val="0"/>
+            <c:showVal val="1"/>
+            <c:showCatName val="0"/>
+            <c:showSerName val="0"/>
+            <c:showPercent val="0"/>
+            <c:showBubbleSize val="0"/>
+            <c:showLeaderLines val="0"/>
+            <c:extLst>
+              <c:ext xmlns:c15="http://schemas.microsoft.com/office/drawing/2012/chart" uri="{CE6537A1-D6FC-4f65-9D91-7224C49458BB}">
+                <c15:showLeaderLines val="0"/>
+              </c:ext>
+            </c:extLst>
+          </c:dLbls>
+          <c:cat>
+            <c:strRef>
+              <c:f>Sheet1!$A$2:$A$6</c:f>
+              <c:strCache>
+                <c:ptCount val="5"/>
+                <c:pt idx="0">
+                  <c:v>Jul W1</c:v>
+                </c:pt>
+                <c:pt idx="1">
+                  <c:v>Jul W2</c:v>
+                </c:pt>
+                <c:pt idx="2">
+                  <c:v>Jul W3</c:v>
+                </c:pt>
+                <c:pt idx="3">
+                  <c:v>Jul W4</c:v>
+                </c:pt>
+                <c:pt idx="4">
+                  <c:v>Jul W5</c:v>
+                </c:pt>
+              </c:strCache>
+            </c:strRef>
+          </c:cat>
+          <c:val>
+            <c:numRef>
+              <c:f>Sheet1!$B$2:$B$6</c:f>
+              <c:numCache>
+                <c:formatCode>General</c:formatCode>
+                <c:ptCount val="5"/>
+                <c:pt idx="0">
+                  <c:v>-1.31</c:v>
+                </c:pt>
+                <c:pt idx="1">
+                  <c:v>-1.62</c:v>
+                </c:pt>
+                <c:pt idx="2">
+                  <c:v>-1.82</c:v>
+                </c:pt>
+                <c:pt idx="3">
+                  <c:v>-1.97</c:v>
+                </c:pt>
+                <c:pt idx="4">
+                  <c:v>-2.02</c:v>
+                </c:pt>
+              </c:numCache>
+            </c:numRef>
+          </c:val>
+          <c:extLst>
+            <c:ext xmlns:c16="http://schemas.microsoft.com/office/drawing/2014/chart" uri="{C3380CC4-5D6E-409C-BE32-E72D297353CC}">
+              <c16:uniqueId val="{00000000-6D08-2E4C-A76C-06FE05E81BB7}"/>
+            </c:ext>
+          </c:extLst>
+        </c:ser>
+        <c:dLbls>
+          <c:showLegendKey val="0"/>
+          <c:showVal val="1"/>
+          <c:showCatName val="0"/>
+          <c:showSerName val="0"/>
+          <c:showPercent val="0"/>
+          <c:showBubbleSize val="0"/>
+        </c:dLbls>
+        <c:gapWidth val="150"/>
+        <c:axId val="2094734554"/>
+        <c:axId val="2094734552"/>
+      </c:barChart>
+      <c:catAx>
+        <c:axId val="2094734554"/>
+        <c:scaling>
+          <c:orientation val="minMax"/>
+        </c:scaling>
+        <c:delete val="0"/>
+        <c:axPos val="b"/>
+        <c:numFmt formatCode="General" sourceLinked="1"/>
+        <c:majorTickMark val="out"/>
+        <c:minorTickMark val="none"/>
+        <c:tickLblPos val="low"/>
+        <c:spPr>
+          <a:ln w="12700" cap="flat">
+            <a:solidFill>
+              <a:srgbClr val="888888"/>
+            </a:solidFill>
+            <a:prstDash val="solid"/>
+            <a:round/>
+          </a:ln>
+        </c:spPr>
+        <c:txPr>
+          <a:bodyPr/>
+          <a:lstStyle/>
+          <a:p>
+            <a:pPr>
+              <a:defRPr sz="1200" b="0" i="0" u="none" strike="noStrike">
+                <a:solidFill>
+                  <a:srgbClr val="000000"/>
+                </a:solidFill>
+                <a:latin typeface="Arial"/>
+              </a:defRPr>
+            </a:pPr>
+            <a:endParaRPr lang="en-US"/>
+          </a:p>
+        </c:txPr>
+        <c:crossAx val="2094734552"/>
+        <c:crosses val="autoZero"/>
+        <c:auto val="1"/>
+        <c:lblAlgn val="ctr"/>
+        <c:lblOffset val="100"/>
+        <c:noMultiLvlLbl val="1"/>
+      </c:catAx>
+      <c:valAx>
+        <c:axId val="2094734552"/>
+        <c:scaling>
+          <c:orientation val="minMax"/>
+        </c:scaling>
+        <c:delete val="0"/>
+        <c:axPos val="l"/>
+        <c:majorGridlines>
+          <c:spPr>
+            <a:ln w="12700" cap="flat">
+              <a:solidFill>
+                <a:srgbClr val="CBD5E1"/>
+              </a:solidFill>
+              <a:prstDash val="dash"/>
+              <a:round/>
+            </a:ln>
+          </c:spPr>
+        </c:majorGridlines>
+        <c:numFmt formatCode="General" sourceLinked="0"/>
+        <c:majorTickMark val="out"/>
+        <c:minorTickMark val="none"/>
+        <c:tickLblPos val="nextTo"/>
+        <c:spPr>
+          <a:ln w="12700" cap="flat">
+            <a:solidFill>
+              <a:srgbClr val="888888"/>
+            </a:solidFill>
+            <a:prstDash val="solid"/>
+            <a:round/>
+          </a:ln>
+        </c:spPr>
+        <c:txPr>
+          <a:bodyPr/>
+          <a:lstStyle/>
+          <a:p>
+            <a:pPr>
+              <a:defRPr sz="1200" b="0" i="0" u="none" strike="noStrike">
+                <a:solidFill>
+                  <a:srgbClr val="000000"/>
+                </a:solidFill>
+                <a:latin typeface="Arial"/>
+              </a:defRPr>
+            </a:pPr>
+            <a:endParaRPr lang="en-US"/>
+          </a:p>
+        </c:txPr>
+        <c:crossAx val="2094734554"/>
+        <c:crosses val="autoZero"/>
+        <c:crossBetween val="between"/>
+      </c:valAx>
+      <c:spPr>
+        <a:noFill/>
+        <a:ln>
+          <a:noFill/>
+        </a:ln>
+        <a:effectLst/>
+      </c:spPr>
+    </c:plotArea>
+    <c:plotVisOnly val="1"/>
+    <c:dispBlanksAs val="span"/>
+    <c:showDLblsOverMax val="1"/>
+  </c:chart>
+  <c:spPr>
+    <a:noFill/>
+    <a:ln>
+      <a:noFill/>
+    </a:ln>
+    <a:effectLst/>
+  </c:spPr>
+  <c:externalData r:id="rId1">
+    <c:autoUpdate val="0"/>
+  </c:externalData>
+</c:chartSpace>
+</file>
+
+<file path=ppt/charts/chart5.xml><?xml version="1.0" encoding="utf-8"?>
+<c:chartSpace xmlns:c="http://schemas.openxmlformats.org/drawingml/2006/chart" xmlns:a="http://schemas.openxmlformats.org/drawingml/2006/main" xmlns:r="http://schemas.openxmlformats.org/officeDocument/2006/relationships" xmlns:c16r2="http://schemas.microsoft.com/office/drawing/2015/06/chart">
+  <c:date1904 val="0"/>
+  <c:lang val="en-US"/>
+  <c:roundedCorners val="1"/>
+  <c:style val="2"/>
+  <c:chart>
+    <c:title>
+      <c:tx>
+        <c:rich>
+          <a:bodyPr/>
+          <a:lstStyle/>
+          <a:p>
+            <a:pPr>
+              <a:defRPr sz="1100" b="0" i="0" u="none" strike="noStrike">
+                <a:solidFill>
+                  <a:srgbClr val="0F172A"/>
+                </a:solidFill>
+                <a:latin typeface="Arial"/>
+              </a:defRPr>
+            </a:pPr>
+            <a:r>
+              <a:rPr sz="1100" b="0" i="0" u="none" strike="noStrike">
+                <a:solidFill>
+                  <a:srgbClr val="0F172A"/>
+                </a:solidFill>
+                <a:latin typeface="Arial"/>
+              </a:rPr>
+              <a:t>Komoditas Pendorong Deflasi Terbesar (%)</a:t>
+            </a:r>
+          </a:p>
+        </c:rich>
+      </c:tx>
+      <c:overlay val="0"/>
+    </c:title>
+    <c:autoTitleDeleted val="0"/>
+    <c:plotArea>
+      <c:layout/>
+      <c:barChart>
+        <c:barDir val="bar"/>
+        <c:grouping val="clustered"/>
+        <c:varyColors val="0"/>
+        <c:ser>
+          <c:idx val="0"/>
+          <c:order val="0"/>
+          <c:tx>
+            <c:strRef>
+              <c:f>Sheet1!$B$1</c:f>
+              <c:strCache>
+                <c:ptCount val="1"/>
+                <c:pt idx="0">
+                  <c:v>Andil Deflasi</c:v>
+                </c:pt>
+              </c:strCache>
+            </c:strRef>
+          </c:tx>
+          <c:spPr>
+            <a:solidFill>
+              <a:srgbClr val="15803D"/>
+            </a:solidFill>
+            <a:effectLst/>
+          </c:spPr>
+          <c:invertIfNegative val="0"/>
+          <c:dLbls>
+            <c:numFmt formatCode="#,##0" sourceLinked="0"/>
+            <c:spPr>
+              <a:noFill/>
+              <a:ln>
+                <a:noFill/>
+              </a:ln>
+              <a:effectLst/>
+            </c:spPr>
+            <c:txPr>
+              <a:bodyPr/>
+              <a:lstStyle/>
+              <a:p>
+                <a:pPr>
+                  <a:defRPr sz="1000" b="0" i="0" u="none" strike="noStrike">
+                    <a:solidFill>
+                      <a:srgbClr val="14532D"/>
+                    </a:solidFill>
+                    <a:latin typeface="Arial"/>
+                  </a:defRPr>
+                </a:pPr>
+                <a:endParaRPr lang="en-US"/>
+              </a:p>
+            </c:txPr>
+            <c:showLegendKey val="0"/>
+            <c:showVal val="1"/>
+            <c:showCatName val="0"/>
+            <c:showSerName val="0"/>
+            <c:showPercent val="0"/>
+            <c:showBubbleSize val="0"/>
+            <c:showLeaderLines val="0"/>
+            <c:extLst>
+              <c:ext xmlns:c15="http://schemas.microsoft.com/office/drawing/2012/chart" uri="{CE6537A1-D6FC-4f65-9D91-7224C49458BB}">
+                <c15:showLeaderLines val="0"/>
+              </c:ext>
+            </c:extLst>
+          </c:dLbls>
+          <c:cat>
+            <c:strRef>
+              <c:f>Sheet1!$A$2:$A$4</c:f>
+              <c:strCache>
+                <c:ptCount val="3"/>
+                <c:pt idx="0">
+                  <c:v>Bawang Merah</c:v>
+                </c:pt>
+                <c:pt idx="1">
+                  <c:v>Daging Ayam</c:v>
+                </c:pt>
+                <c:pt idx="2">
+                  <c:v>Cabai Rawit</c:v>
+                </c:pt>
+              </c:strCache>
+            </c:strRef>
+          </c:cat>
+          <c:val>
+            <c:numRef>
+              <c:f>Sheet1!$B$2:$B$4</c:f>
+              <c:numCache>
+                <c:formatCode>General</c:formatCode>
+                <c:ptCount val="3"/>
+                <c:pt idx="0">
+                  <c:v>-0.42</c:v>
+                </c:pt>
+                <c:pt idx="1">
+                  <c:v>-0.61</c:v>
+                </c:pt>
+                <c:pt idx="2">
+                  <c:v>-0.64</c:v>
+                </c:pt>
+              </c:numCache>
+            </c:numRef>
+          </c:val>
+          <c:extLst>
+            <c:ext xmlns:c16="http://schemas.microsoft.com/office/drawing/2014/chart" uri="{C3380CC4-5D6E-409C-BE32-E72D297353CC}">
+              <c16:uniqueId val="{00000000-0395-B141-868D-C8866B39C9D5}"/>
+            </c:ext>
+          </c:extLst>
+        </c:ser>
+        <c:dLbls>
+          <c:showLegendKey val="0"/>
+          <c:showVal val="1"/>
+          <c:showCatName val="0"/>
+          <c:showSerName val="0"/>
+          <c:showPercent val="0"/>
+          <c:showBubbleSize val="0"/>
+        </c:dLbls>
+        <c:gapWidth val="150"/>
+        <c:axId val="2094734554"/>
+        <c:axId val="2094734552"/>
+      </c:barChart>
+      <c:catAx>
+        <c:axId val="2094734554"/>
+        <c:scaling>
+          <c:orientation val="minMax"/>
+        </c:scaling>
+        <c:delete val="0"/>
+        <c:axPos val="l"/>
+        <c:numFmt formatCode="General" sourceLinked="1"/>
+        <c:majorTickMark val="out"/>
+        <c:minorTickMark val="none"/>
+        <c:tickLblPos val="nextTo"/>
+        <c:spPr>
+          <a:ln w="12700" cap="flat">
+            <a:solidFill>
+              <a:srgbClr val="888888"/>
+            </a:solidFill>
+            <a:prstDash val="solid"/>
+            <a:round/>
+          </a:ln>
+        </c:spPr>
+        <c:txPr>
+          <a:bodyPr/>
+          <a:lstStyle/>
+          <a:p>
+            <a:pPr>
+              <a:defRPr sz="1200" b="0" i="0" u="none" strike="noStrike">
+                <a:solidFill>
+                  <a:srgbClr val="000000"/>
+                </a:solidFill>
+                <a:latin typeface="Arial"/>
+              </a:defRPr>
+            </a:pPr>
+            <a:endParaRPr lang="en-US"/>
+          </a:p>
+        </c:txPr>
+        <c:crossAx val="2094734552"/>
+        <c:crosses val="autoZero"/>
+        <c:auto val="1"/>
+        <c:lblAlgn val="ctr"/>
+        <c:lblOffset val="100"/>
+        <c:noMultiLvlLbl val="1"/>
+      </c:catAx>
+      <c:valAx>
+        <c:axId val="2094734552"/>
+        <c:scaling>
+          <c:orientation val="minMax"/>
+        </c:scaling>
+        <c:delete val="0"/>
+        <c:axPos val="b"/>
+        <c:majorGridlines>
+          <c:spPr>
+            <a:ln w="12700" cap="flat">
+              <a:solidFill>
+                <a:srgbClr val="CBD5E1"/>
+              </a:solidFill>
+              <a:prstDash val="dash"/>
+              <a:round/>
+            </a:ln>
+          </c:spPr>
+        </c:majorGridlines>
+        <c:numFmt formatCode="General" sourceLinked="0"/>
+        <c:majorTickMark val="out"/>
+        <c:minorTickMark val="none"/>
+        <c:tickLblPos val="low"/>
+        <c:spPr>
+          <a:ln w="12700" cap="flat">
+            <a:solidFill>
+              <a:srgbClr val="888888"/>
+            </a:solidFill>
+            <a:prstDash val="solid"/>
+            <a:round/>
+          </a:ln>
+        </c:spPr>
+        <c:txPr>
+          <a:bodyPr/>
+          <a:lstStyle/>
+          <a:p>
+            <a:pPr>
+              <a:defRPr sz="1200" b="0" i="0" u="none" strike="noStrike">
+                <a:solidFill>
+                  <a:srgbClr val="000000"/>
+                </a:solidFill>
+                <a:latin typeface="Arial"/>
+              </a:defRPr>
+            </a:pPr>
+            <a:endParaRPr lang="en-US"/>
+          </a:p>
+        </c:txPr>
+        <c:crossAx val="2094734554"/>
+        <c:crosses val="autoZero"/>
+        <c:crossBetween val="between"/>
+      </c:valAx>
+      <c:spPr>
+        <a:noFill/>
+        <a:ln>
+          <a:noFill/>
+        </a:ln>
+        <a:effectLst/>
+      </c:spPr>
+    </c:plotArea>
+    <c:plotVisOnly val="1"/>
+    <c:dispBlanksAs val="span"/>
+    <c:showDLblsOverMax val="1"/>
+  </c:chart>
+  <c:spPr>
+    <a:noFill/>
+    <a:ln>
+      <a:noFill/>
+    </a:ln>
+    <a:effectLst/>
+  </c:spPr>
+  <c:externalData r:id="rId1">
+    <c:autoUpdate val="0"/>
+  </c:externalData>
+</c:chartSpace>
+</file>
+
+<file path=ppt/charts/chart6.xml><?xml version="1.0" encoding="utf-8"?>
+<c:chartSpace xmlns:c="http://schemas.openxmlformats.org/drawingml/2006/chart" xmlns:a="http://schemas.openxmlformats.org/drawingml/2006/main" xmlns:r="http://schemas.openxmlformats.org/officeDocument/2006/relationships" xmlns:c16r2="http://schemas.microsoft.com/office/drawing/2015/06/chart">
+  <c:date1904 val="0"/>
+  <c:lang val="en-US"/>
+  <c:roundedCorners val="1"/>
+  <c:style val="2"/>
+  <c:chart>
+    <c:title>
+      <c:tx>
+        <c:rich>
+          <a:bodyPr/>
+          <a:lstStyle/>
+          <a:p>
+            <a:pPr>
+              <a:defRPr sz="1100" b="0" i="0" u="none" strike="noStrike">
+                <a:solidFill>
+                  <a:srgbClr val="0F172A"/>
+                </a:solidFill>
+                <a:latin typeface="Arial"/>
+              </a:defRPr>
+            </a:pPr>
+            <a:r>
+              <a:rPr sz="1100" b="0" i="0" u="none" strike="noStrike">
+                <a:solidFill>
+                  <a:srgbClr val="0F172A"/>
+                </a:solidFill>
+                <a:latin typeface="Arial"/>
+              </a:rPr>
+              <a:t>Rebound IPH Mingguan September - Oktober 2026</a:t>
+            </a:r>
+          </a:p>
+        </c:rich>
+      </c:tx>
+      <c:overlay val="0"/>
+    </c:title>
+    <c:autoTitleDeleted val="0"/>
+    <c:plotArea>
+      <c:layout/>
+      <c:lineChart>
+        <c:grouping val="standard"/>
+        <c:varyColors val="0"/>
+        <c:ser>
+          <c:idx val="0"/>
+          <c:order val="0"/>
+          <c:tx>
+            <c:strRef>
+              <c:f>Sheet1!$B$1</c:f>
+              <c:strCache>
+                <c:ptCount val="1"/>
+                <c:pt idx="0">
+                  <c:v>IPH Mingguan</c:v>
+                </c:pt>
+              </c:strCache>
+            </c:strRef>
+          </c:tx>
+          <c:spPr>
+            <a:ln w="38100" cap="flat">
+              <a:solidFill>
+                <a:srgbClr val="D97706"/>
+              </a:solidFill>
+              <a:prstDash val="solid"/>
+              <a:round/>
+            </a:ln>
+            <a:effectLst/>
+          </c:spPr>
+          <c:marker>
+            <c:symbol val="circle"/>
+            <c:size val="8"/>
+            <c:spPr>
+              <a:solidFill>
+                <a:srgbClr val="D97706"/>
+              </a:solidFill>
+              <a:ln w="9525" cap="flat">
+                <a:solidFill>
+                  <a:srgbClr val="D97706"/>
+                </a:solidFill>
+                <a:prstDash val="solid"/>
+                <a:round/>
+              </a:ln>
+              <a:effectLst/>
+            </c:spPr>
+          </c:marker>
+          <c:dLbls>
+            <c:numFmt formatCode="#,##0" sourceLinked="0"/>
+            <c:spPr>
+              <a:noFill/>
+              <a:ln>
+                <a:noFill/>
+              </a:ln>
+              <a:effectLst/>
+            </c:spPr>
+            <c:txPr>
+              <a:bodyPr/>
+              <a:lstStyle/>
+              <a:p>
+                <a:pPr>
+                  <a:defRPr sz="1000" b="0" i="0" u="none" strike="noStrike">
+                    <a:solidFill>
+                      <a:srgbClr val="B45309"/>
+                    </a:solidFill>
+                    <a:latin typeface="Arial"/>
+                  </a:defRPr>
+                </a:pPr>
+                <a:endParaRPr lang="en-US"/>
+              </a:p>
+            </c:txPr>
+            <c:showLegendKey val="0"/>
+            <c:showVal val="1"/>
+            <c:showCatName val="0"/>
+            <c:showSerName val="0"/>
+            <c:showPercent val="0"/>
+            <c:showBubbleSize val="0"/>
+            <c:showLeaderLines val="0"/>
+            <c:extLst>
+              <c:ext xmlns:c15="http://schemas.microsoft.com/office/drawing/2012/chart" uri="{CE6537A1-D6FC-4f65-9D91-7224C49458BB}">
+                <c15:showLeaderLines val="0"/>
+              </c:ext>
+            </c:extLst>
+          </c:dLbls>
+          <c:cat>
+            <c:strRef>
+              <c:f>Sheet1!$A$2:$A$6</c:f>
+              <c:strCache>
+                <c:ptCount val="5"/>
+                <c:pt idx="0">
+                  <c:v>Sep W1</c:v>
+                </c:pt>
+                <c:pt idx="1">
+                  <c:v>Sep W2</c:v>
+                </c:pt>
+                <c:pt idx="2">
+                  <c:v>Sep W3</c:v>
+                </c:pt>
+                <c:pt idx="3">
+                  <c:v>Sep W4</c:v>
+                </c:pt>
+                <c:pt idx="4">
+                  <c:v>Okt W1</c:v>
+                </c:pt>
+              </c:strCache>
+            </c:strRef>
+          </c:cat>
+          <c:val>
+            <c:numRef>
+              <c:f>Sheet1!$B$2:$B$6</c:f>
+              <c:numCache>
+                <c:formatCode>General</c:formatCode>
+                <c:ptCount val="5"/>
+                <c:pt idx="0">
+                  <c:v>0.39</c:v>
+                </c:pt>
+                <c:pt idx="1">
+                  <c:v>0.95</c:v>
+                </c:pt>
+                <c:pt idx="2">
+                  <c:v>1.29</c:v>
+                </c:pt>
+                <c:pt idx="3">
+                  <c:v>1.57</c:v>
+                </c:pt>
+                <c:pt idx="4">
+                  <c:v>0.84</c:v>
+                </c:pt>
+              </c:numCache>
+            </c:numRef>
+          </c:val>
+          <c:smooth val="0"/>
+          <c:extLst>
+            <c:ext xmlns:c16="http://schemas.microsoft.com/office/drawing/2014/chart" uri="{C3380CC4-5D6E-409C-BE32-E72D297353CC}">
+              <c16:uniqueId val="{00000000-8F71-B848-AFA0-C73C4427EC4A}"/>
+            </c:ext>
+          </c:extLst>
+        </c:ser>
+        <c:dLbls>
+          <c:showLegendKey val="0"/>
+          <c:showVal val="1"/>
+          <c:showCatName val="0"/>
+          <c:showSerName val="0"/>
+          <c:showPercent val="0"/>
+          <c:showBubbleSize val="0"/>
+        </c:dLbls>
+        <c:marker val="1"/>
+        <c:smooth val="0"/>
+        <c:axId val="2094734554"/>
+        <c:axId val="2094734552"/>
+      </c:lineChart>
+      <c:catAx>
+        <c:axId val="2094734554"/>
+        <c:scaling>
+          <c:orientation val="minMax"/>
+        </c:scaling>
+        <c:delete val="0"/>
+        <c:axPos val="b"/>
+        <c:numFmt formatCode="General" sourceLinked="1"/>
+        <c:majorTickMark val="out"/>
+        <c:minorTickMark val="none"/>
+        <c:tickLblPos val="low"/>
+        <c:spPr>
+          <a:ln w="12700" cap="flat">
+            <a:solidFill>
+              <a:srgbClr val="888888"/>
+            </a:solidFill>
+            <a:prstDash val="solid"/>
+            <a:round/>
+          </a:ln>
+        </c:spPr>
+        <c:txPr>
+          <a:bodyPr/>
+          <a:lstStyle/>
+          <a:p>
+            <a:pPr>
+              <a:defRPr sz="1200" b="0" i="0" u="none" strike="noStrike">
+                <a:solidFill>
+                  <a:srgbClr val="000000"/>
+                </a:solidFill>
+                <a:latin typeface="Arial"/>
+              </a:defRPr>
+            </a:pPr>
+            <a:endParaRPr lang="en-US"/>
+          </a:p>
+        </c:txPr>
+        <c:crossAx val="2094734552"/>
+        <c:crosses val="autoZero"/>
+        <c:auto val="1"/>
+        <c:lblAlgn val="ctr"/>
+        <c:lblOffset val="100"/>
+        <c:noMultiLvlLbl val="1"/>
+      </c:catAx>
+      <c:valAx>
+        <c:axId val="2094734552"/>
+        <c:scaling>
+          <c:orientation val="minMax"/>
+        </c:scaling>
+        <c:delete val="0"/>
+        <c:axPos val="l"/>
+        <c:majorGridlines>
+          <c:spPr>
+            <a:ln w="12700" cap="flat">
+              <a:solidFill>
+                <a:srgbClr val="CBD5E1"/>
+              </a:solidFill>
+              <a:prstDash val="dash"/>
+              <a:round/>
+            </a:ln>
+          </c:spPr>
+        </c:majorGridlines>
+        <c:numFmt formatCode="General" sourceLinked="0"/>
+        <c:majorTickMark val="out"/>
+        <c:minorTickMark val="none"/>
+        <c:tickLblPos val="nextTo"/>
+        <c:spPr>
+          <a:ln w="12700" cap="flat">
+            <a:solidFill>
+              <a:srgbClr val="888888"/>
+            </a:solidFill>
+            <a:prstDash val="solid"/>
+            <a:round/>
+          </a:ln>
+        </c:spPr>
+        <c:txPr>
+          <a:bodyPr/>
+          <a:lstStyle/>
+          <a:p>
+            <a:pPr>
+              <a:defRPr sz="1200" b="0" i="0" u="none" strike="noStrike">
+                <a:solidFill>
+                  <a:srgbClr val="000000"/>
+                </a:solidFill>
+                <a:latin typeface="Arial"/>
+              </a:defRPr>
+            </a:pPr>
+            <a:endParaRPr lang="en-US"/>
+          </a:p>
+        </c:txPr>
+        <c:crossAx val="2094734554"/>
+        <c:crosses val="autoZero"/>
+        <c:crossBetween val="between"/>
+      </c:valAx>
+      <c:spPr>
+        <a:noFill/>
+        <a:ln>
+          <a:noFill/>
+        </a:ln>
+        <a:effectLst/>
+      </c:spPr>
+    </c:plotArea>
+    <c:plotVisOnly val="1"/>
+    <c:dispBlanksAs val="span"/>
+    <c:showDLblsOverMax val="1"/>
+  </c:chart>
+  <c:spPr>
+    <a:noFill/>
+    <a:ln>
+      <a:noFill/>
+    </a:ln>
+    <a:effectLst/>
+  </c:spPr>
+  <c:externalData r:id="rId1">
+    <c:autoUpdate val="0"/>
+  </c:externalData>
+</c:chartSpace>
+</file>
+
+<file path=ppt/charts/chart7.xml><?xml version="1.0" encoding="utf-8"?>
+<c:chartSpace xmlns:c="http://schemas.openxmlformats.org/drawingml/2006/chart" xmlns:a="http://schemas.openxmlformats.org/drawingml/2006/main" xmlns:r="http://schemas.openxmlformats.org/officeDocument/2006/relationships" xmlns:c16r2="http://schemas.microsoft.com/office/drawing/2015/06/chart">
+  <c:date1904 val="0"/>
+  <c:lang val="en-US"/>
+  <c:roundedCorners val="1"/>
+  <c:style val="2"/>
+  <c:chart>
+    <c:title>
+      <c:tx>
+        <c:rich>
+          <a:bodyPr/>
+          <a:lstStyle/>
+          <a:p>
+            <a:pPr>
+              <a:defRPr sz="1100" b="0" i="0" u="none" strike="noStrike">
+                <a:solidFill>
+                  <a:srgbClr val="0F172A"/>
+                </a:solidFill>
+                <a:latin typeface="Arial"/>
+              </a:defRPr>
+            </a:pPr>
+            <a:r>
+              <a:rPr sz="1100" b="0" i="0" u="none" strike="noStrike">
+                <a:solidFill>
+                  <a:srgbClr val="0F172A"/>
+                </a:solidFill>
+                <a:latin typeface="Arial"/>
+              </a:rPr>
+              <a:t>Komoditas Pendorong Kenaikan Akhir Q3 (%)</a:t>
+            </a:r>
+          </a:p>
+        </c:rich>
+      </c:tx>
+      <c:overlay val="0"/>
+    </c:title>
+    <c:autoTitleDeleted val="0"/>
+    <c:plotArea>
+      <c:layout/>
+      <c:barChart>
+        <c:barDir val="bar"/>
+        <c:grouping val="clustered"/>
+        <c:varyColors val="0"/>
+        <c:ser>
+          <c:idx val="0"/>
+          <c:order val="0"/>
+          <c:tx>
+            <c:strRef>
+              <c:f>Sheet1!$B$1</c:f>
+              <c:strCache>
+                <c:ptCount val="1"/>
+                <c:pt idx="0">
+                  <c:v>Andil Inflasi</c:v>
+                </c:pt>
+              </c:strCache>
+            </c:strRef>
+          </c:tx>
+          <c:spPr>
+            <a:solidFill>
+              <a:srgbClr val="EA580C"/>
+            </a:solidFill>
+            <a:effectLst/>
+          </c:spPr>
+          <c:invertIfNegative val="0"/>
+          <c:dLbls>
+            <c:numFmt formatCode="#,##0" sourceLinked="0"/>
+            <c:spPr>
+              <a:noFill/>
+              <a:ln>
+                <a:noFill/>
+              </a:ln>
+              <a:effectLst/>
+            </c:spPr>
+            <c:txPr>
+              <a:bodyPr/>
+              <a:lstStyle/>
+              <a:p>
+                <a:pPr>
+                  <a:defRPr sz="1000" b="0" i="0" u="none" strike="noStrike">
+                    <a:solidFill>
+                      <a:srgbClr val="9A3412"/>
+                    </a:solidFill>
+                    <a:latin typeface="Arial"/>
+                  </a:defRPr>
+                </a:pPr>
+                <a:endParaRPr lang="en-US"/>
+              </a:p>
+            </c:txPr>
+            <c:showLegendKey val="0"/>
+            <c:showVal val="1"/>
+            <c:showCatName val="0"/>
+            <c:showSerName val="0"/>
+            <c:showPercent val="0"/>
+            <c:showBubbleSize val="0"/>
+            <c:showLeaderLines val="0"/>
+            <c:extLst>
+              <c:ext xmlns:c15="http://schemas.microsoft.com/office/drawing/2012/chart" uri="{CE6537A1-D6FC-4f65-9D91-7224C49458BB}">
+                <c15:showLeaderLines val="0"/>
+              </c:ext>
+            </c:extLst>
+          </c:dLbls>
+          <c:cat>
+            <c:strRef>
+              <c:f>Sheet1!$A$2:$A$4</c:f>
+              <c:strCache>
+                <c:ptCount val="3"/>
+                <c:pt idx="0">
+                  <c:v>Beras</c:v>
+                </c:pt>
+                <c:pt idx="1">
+                  <c:v>Cabai Merah</c:v>
+                </c:pt>
+                <c:pt idx="2">
+                  <c:v>Cabai Rawit</c:v>
+                </c:pt>
+              </c:strCache>
+            </c:strRef>
+          </c:cat>
+          <c:val>
+            <c:numRef>
+              <c:f>Sheet1!$B$2:$B$4</c:f>
+              <c:numCache>
+                <c:formatCode>General</c:formatCode>
+                <c:ptCount val="3"/>
+                <c:pt idx="0">
+                  <c:v>0.53</c:v>
+                </c:pt>
+                <c:pt idx="1">
+                  <c:v>0.62</c:v>
+                </c:pt>
+                <c:pt idx="2">
+                  <c:v>1.1299999999999999</c:v>
+                </c:pt>
+              </c:numCache>
+            </c:numRef>
+          </c:val>
+          <c:extLst>
+            <c:ext xmlns:c16="http://schemas.microsoft.com/office/drawing/2014/chart" uri="{C3380CC4-5D6E-409C-BE32-E72D297353CC}">
+              <c16:uniqueId val="{00000000-45E1-744A-BE4C-1F24E0FC0BCC}"/>
+            </c:ext>
+          </c:extLst>
+        </c:ser>
+        <c:dLbls>
+          <c:showLegendKey val="0"/>
+          <c:showVal val="1"/>
+          <c:showCatName val="0"/>
+          <c:showSerName val="0"/>
+          <c:showPercent val="0"/>
+          <c:showBubbleSize val="0"/>
+        </c:dLbls>
+        <c:gapWidth val="150"/>
+        <c:axId val="2094734554"/>
+        <c:axId val="2094734552"/>
+      </c:barChart>
+      <c:catAx>
+        <c:axId val="2094734554"/>
+        <c:scaling>
+          <c:orientation val="minMax"/>
+        </c:scaling>
+        <c:delete val="0"/>
+        <c:axPos val="l"/>
+        <c:numFmt formatCode="General" sourceLinked="1"/>
+        <c:majorTickMark val="out"/>
+        <c:minorTickMark val="none"/>
+        <c:tickLblPos val="nextTo"/>
+        <c:spPr>
+          <a:ln w="12700" cap="flat">
+            <a:solidFill>
+              <a:srgbClr val="888888"/>
+            </a:solidFill>
+            <a:prstDash val="solid"/>
+            <a:round/>
+          </a:ln>
+        </c:spPr>
+        <c:txPr>
+          <a:bodyPr/>
+          <a:lstStyle/>
+          <a:p>
+            <a:pPr>
+              <a:defRPr sz="1200" b="0" i="0" u="none" strike="noStrike">
+                <a:solidFill>
+                  <a:srgbClr val="000000"/>
+                </a:solidFill>
+                <a:latin typeface="Arial"/>
+              </a:defRPr>
+            </a:pPr>
+            <a:endParaRPr lang="en-US"/>
+          </a:p>
+        </c:txPr>
+        <c:crossAx val="2094734552"/>
+        <c:crosses val="autoZero"/>
+        <c:auto val="1"/>
+        <c:lblAlgn val="ctr"/>
+        <c:lblOffset val="100"/>
+        <c:noMultiLvlLbl val="1"/>
+      </c:catAx>
+      <c:valAx>
+        <c:axId val="2094734552"/>
+        <c:scaling>
+          <c:orientation val="minMax"/>
+        </c:scaling>
+        <c:delete val="0"/>
+        <c:axPos val="b"/>
+        <c:majorGridlines>
+          <c:spPr>
+            <a:ln w="12700" cap="flat">
+              <a:solidFill>
+                <a:srgbClr val="CBD5E1"/>
+              </a:solidFill>
+              <a:prstDash val="dash"/>
+              <a:round/>
+            </a:ln>
+          </c:spPr>
+        </c:majorGridlines>
+        <c:numFmt formatCode="General" sourceLinked="0"/>
+        <c:majorTickMark val="out"/>
+        <c:minorTickMark val="none"/>
+        <c:tickLblPos val="low"/>
+        <c:spPr>
+          <a:ln w="12700" cap="flat">
+            <a:solidFill>
+              <a:srgbClr val="888888"/>
+            </a:solidFill>
+            <a:prstDash val="solid"/>
+            <a:round/>
+          </a:ln>
+        </c:spPr>
+        <c:txPr>
+          <a:bodyPr/>
+          <a:lstStyle/>
+          <a:p>
+            <a:pPr>
+              <a:defRPr sz="1200" b="0" i="0" u="none" strike="noStrike">
+                <a:solidFill>
+                  <a:srgbClr val="000000"/>
+                </a:solidFill>
+                <a:latin typeface="Arial"/>
+              </a:defRPr>
+            </a:pPr>
+            <a:endParaRPr lang="en-US"/>
+          </a:p>
+        </c:txPr>
+        <c:crossAx val="2094734554"/>
+        <c:crosses val="autoZero"/>
+        <c:crossBetween val="between"/>
+      </c:valAx>
+      <c:spPr>
+        <a:noFill/>
+        <a:ln>
+          <a:noFill/>
+        </a:ln>
+        <a:effectLst/>
+      </c:spPr>
+    </c:plotArea>
+    <c:plotVisOnly val="1"/>
+    <c:dispBlanksAs val="span"/>
+    <c:showDLblsOverMax val="1"/>
+  </c:chart>
+  <c:spPr>
+    <a:noFill/>
+    <a:ln>
+      <a:noFill/>
+    </a:ln>
+    <a:effectLst/>
+  </c:spPr>
+  <c:externalData r:id="rId1">
+    <c:autoUpdate val="0"/>
+  </c:externalData>
+</c:chartSpace>
+</file>
+
+<file path=ppt/charts/chart8.xml><?xml version="1.0" encoding="utf-8"?>
+<c:chartSpace xmlns:c="http://schemas.openxmlformats.org/drawingml/2006/chart" xmlns:a="http://schemas.openxmlformats.org/drawingml/2006/main" xmlns:r="http://schemas.openxmlformats.org/officeDocument/2006/relationships" xmlns:c16r2="http://schemas.microsoft.com/office/drawing/2015/06/chart">
+  <c:date1904 val="0"/>
+  <c:lang val="en-US"/>
+  <c:roundedCorners val="1"/>
+  <c:style val="2"/>
+  <c:chart>
+    <c:title>
+      <c:tx>
+        <c:rich>
+          <a:bodyPr/>
+          <a:lstStyle/>
+          <a:p>
+            <a:pPr>
+              <a:defRPr sz="1300" b="0" i="0" u="none" strike="noStrike">
+                <a:solidFill>
+                  <a:srgbClr val="0F172A"/>
+                </a:solidFill>
+                <a:latin typeface="Arial"/>
+              </a:defRPr>
+            </a:pPr>
+            <a:r>
+              <a:rPr sz="1300" b="0" i="0" u="none" strike="noStrike">
+                <a:solidFill>
+                  <a:srgbClr val="0F172A"/>
+                </a:solidFill>
+                <a:latin typeface="Arial"/>
+              </a:rPr>
+              <a:t>Frekuensi Komoditas Pemicu Gejolak Utama (2026)</a:t>
+            </a:r>
+          </a:p>
+        </c:rich>
+      </c:tx>
+      <c:overlay val="0"/>
+    </c:title>
+    <c:autoTitleDeleted val="0"/>
+    <c:plotArea>
+      <c:layout/>
+      <c:barChart>
+        <c:barDir val="bar"/>
+        <c:grouping val="clustered"/>
+        <c:varyColors val="0"/>
+        <c:ser>
+          <c:idx val="0"/>
+          <c:order val="0"/>
+          <c:tx>
+            <c:strRef>
+              <c:f>Sheet1!$B$1</c:f>
+              <c:strCache>
+                <c:ptCount val="1"/>
+                <c:pt idx="0">
+                  <c:v>Frekuensi Kejadian</c:v>
+                </c:pt>
+              </c:strCache>
+            </c:strRef>
+          </c:tx>
+          <c:spPr>
+            <a:solidFill>
+              <a:srgbClr val="0284C7"/>
+            </a:solidFill>
+            <a:effectLst/>
+          </c:spPr>
+          <c:invertIfNegative val="0"/>
+          <c:dLbls>
+            <c:numFmt formatCode="#,##0" sourceLinked="0"/>
+            <c:spPr>
+              <a:noFill/>
+              <a:ln>
+                <a:noFill/>
+              </a:ln>
+              <a:effectLst/>
+            </c:spPr>
+            <c:txPr>
+              <a:bodyPr/>
+              <a:lstStyle/>
+              <a:p>
+                <a:pPr>
+                  <a:defRPr sz="1100" b="0" i="0" u="none" strike="noStrike">
+                    <a:solidFill>
+                      <a:srgbClr val="0369A1"/>
+                    </a:solidFill>
+                    <a:latin typeface="Arial"/>
+                  </a:defRPr>
+                </a:pPr>
+                <a:endParaRPr lang="en-US"/>
+              </a:p>
+            </c:txPr>
+            <c:showLegendKey val="0"/>
+            <c:showVal val="1"/>
+            <c:showCatName val="0"/>
+            <c:showSerName val="0"/>
+            <c:showPercent val="0"/>
+            <c:showBubbleSize val="0"/>
+            <c:showLeaderLines val="0"/>
+            <c:extLst>
+              <c:ext xmlns:c15="http://schemas.microsoft.com/office/drawing/2012/chart" uri="{CE6537A1-D6FC-4f65-9D91-7224C49458BB}">
+                <c15:showLeaderLines val="0"/>
+              </c:ext>
+            </c:extLst>
+          </c:dLbls>
+          <c:cat>
+            <c:strRef>
+              <c:f>Sheet1!$A$2:$A$6</c:f>
+              <c:strCache>
+                <c:ptCount val="5"/>
+                <c:pt idx="0">
+                  <c:v>Daging Ayam</c:v>
+                </c:pt>
+                <c:pt idx="1">
+                  <c:v>Cabai Merah</c:v>
+                </c:pt>
+                <c:pt idx="2">
+                  <c:v>Beras</c:v>
+                </c:pt>
+                <c:pt idx="3">
+                  <c:v>Telur Ayam</c:v>
+                </c:pt>
+                <c:pt idx="4">
+                  <c:v>Cabai Rawit</c:v>
+                </c:pt>
+              </c:strCache>
+            </c:strRef>
+          </c:cat>
+          <c:val>
+            <c:numRef>
+              <c:f>Sheet1!$B$2:$B$6</c:f>
+              <c:numCache>
+                <c:formatCode>General</c:formatCode>
+                <c:ptCount val="5"/>
+                <c:pt idx="0">
+                  <c:v>3</c:v>
+                </c:pt>
+                <c:pt idx="1">
+                  <c:v>4</c:v>
+                </c:pt>
+                <c:pt idx="2">
+                  <c:v>4</c:v>
+                </c:pt>
+                <c:pt idx="3">
+                  <c:v>5</c:v>
+                </c:pt>
+                <c:pt idx="4">
+                  <c:v>15</c:v>
+                </c:pt>
+              </c:numCache>
+            </c:numRef>
+          </c:val>
+          <c:extLst>
+            <c:ext xmlns:c16="http://schemas.microsoft.com/office/drawing/2014/chart" uri="{C3380CC4-5D6E-409C-BE32-E72D297353CC}">
+              <c16:uniqueId val="{00000000-9B53-E440-821C-CE62562B758F}"/>
+            </c:ext>
+          </c:extLst>
+        </c:ser>
+        <c:dLbls>
+          <c:showLegendKey val="0"/>
+          <c:showVal val="1"/>
+          <c:showCatName val="0"/>
+          <c:showSerName val="0"/>
+          <c:showPercent val="0"/>
+          <c:showBubbleSize val="0"/>
+        </c:dLbls>
+        <c:gapWidth val="150"/>
+        <c:axId val="2094734554"/>
+        <c:axId val="2094734552"/>
+      </c:barChart>
+      <c:catAx>
+        <c:axId val="2094734554"/>
+        <c:scaling>
+          <c:orientation val="minMax"/>
+        </c:scaling>
+        <c:delete val="0"/>
+        <c:axPos val="l"/>
+        <c:numFmt formatCode="General" sourceLinked="1"/>
+        <c:majorTickMark val="out"/>
+        <c:minorTickMark val="none"/>
+        <c:tickLblPos val="nextTo"/>
+        <c:spPr>
+          <a:ln w="12700" cap="flat">
+            <a:solidFill>
+              <a:srgbClr val="888888"/>
+            </a:solidFill>
+            <a:prstDash val="solid"/>
+            <a:round/>
+          </a:ln>
+        </c:spPr>
+        <c:txPr>
+          <a:bodyPr/>
+          <a:lstStyle/>
+          <a:p>
+            <a:pPr>
+              <a:defRPr sz="1200" b="0" i="0" u="none" strike="noStrike">
+                <a:solidFill>
+                  <a:srgbClr val="000000"/>
+                </a:solidFill>
+                <a:latin typeface="Arial"/>
+              </a:defRPr>
+            </a:pPr>
+            <a:endParaRPr lang="en-US"/>
+          </a:p>
+        </c:txPr>
+        <c:crossAx val="2094734552"/>
+        <c:crosses val="autoZero"/>
+        <c:auto val="1"/>
+        <c:lblAlgn val="ctr"/>
+        <c:lblOffset val="100"/>
+        <c:noMultiLvlLbl val="1"/>
+      </c:catAx>
+      <c:valAx>
+        <c:axId val="2094734552"/>
+        <c:scaling>
+          <c:orientation val="minMax"/>
+          <c:max val="18"/>
+        </c:scaling>
+        <c:delete val="0"/>
+        <c:axPos val="b"/>
+        <c:majorGridlines>
+          <c:spPr>
+            <a:ln w="12700" cap="flat">
+              <a:solidFill>
+                <a:srgbClr val="CBD5E1"/>
+              </a:solidFill>
+              <a:prstDash val="dash"/>
+              <a:round/>
+            </a:ln>
+          </c:spPr>
+        </c:majorGridlines>
+        <c:numFmt formatCode="General" sourceLinked="0"/>
+        <c:majorTickMark val="out"/>
+        <c:minorTickMark val="none"/>
+        <c:tickLblPos val="low"/>
+        <c:spPr>
+          <a:ln w="12700" cap="flat">
+            <a:solidFill>
+              <a:srgbClr val="888888"/>
+            </a:solidFill>
+            <a:prstDash val="solid"/>
+            <a:round/>
+          </a:ln>
+        </c:spPr>
+        <c:txPr>
+          <a:bodyPr/>
+          <a:lstStyle/>
+          <a:p>
+            <a:pPr>
+              <a:defRPr sz="1200" b="0" i="0" u="none" strike="noStrike">
+                <a:solidFill>
+                  <a:srgbClr val="000000"/>
+                </a:solidFill>
+                <a:latin typeface="Arial"/>
+              </a:defRPr>
+            </a:pPr>
+            <a:endParaRPr lang="en-US"/>
+          </a:p>
+        </c:txPr>
+        <c:crossAx val="2094734554"/>
+        <c:crosses val="autoZero"/>
+        <c:crossBetween val="between"/>
+      </c:valAx>
+      <c:spPr>
+        <a:noFill/>
+        <a:ln>
+          <a:noFill/>
+        </a:ln>
+        <a:effectLst/>
+      </c:spPr>
+    </c:plotArea>
+    <c:plotVisOnly val="1"/>
+    <c:dispBlanksAs val="span"/>
+    <c:showDLblsOverMax val="1"/>
+  </c:chart>
+  <c:spPr>
+    <a:noFill/>
+    <a:ln>
+      <a:noFill/>
+    </a:ln>
+    <a:effectLst/>
+  </c:spPr>
+  <c:externalData r:id="rId1">
+    <c:autoUpdate val="0"/>
+  </c:externalData>
+</c:chartSpace>
+</file>
+
 <file path=ppt/notesMasters/notesMaster1.xml><?xml version="1.0" encoding="utf-8"?>
 <p:notesMaster xmlns:a="http://schemas.openxmlformats.org/drawingml/2006/main" xmlns:r="http://schemas.openxmlformats.org/officeDocument/2006/relationships" xmlns:p="http://schemas.openxmlformats.org/presentationml/2006/main">
   <p:cSld>
@@ -144,7 +2445,7 @@
     </p:spTree>
     <p:extLst>
       <p:ext uri="{BB962C8B-B14F-4D97-AF65-F5344CB8AC3E}">
-        <p14:creationId xmlns:p14="http://schemas.microsoft.com/office/powerpoint/2010/main" val="2131833894"/>
+        <p14:creationId xmlns:p14="http://schemas.microsoft.com/office/powerpoint/2010/main" val="876321968"/>
       </p:ext>
     </p:extLst>
   </p:cSld>
@@ -1272,9 +3573,9 @@
           <a:solidFill>
             <a:srgbClr val="1E293B"/>
           </a:solidFill>
-          <a:ln w="19050">
+          <a:ln w="25400">
             <a:solidFill>
-              <a:srgbClr val="334155"/>
+              <a:srgbClr val="475569"/>
             </a:solidFill>
             <a:prstDash val="solid"/>
           </a:ln>
@@ -1289,7 +3590,7 @@
       </p:sp>
       <p:pic>
         <p:nvPicPr>
-          <p:cNvPr id="3" name="Image 0" descr="/Volumes/work/_Projects/siph/assets/logos/logo_selayar.png"/>
+          <p:cNvPr id="3" name="Image 0" descr="preencoded.png"/>
           <p:cNvPicPr>
             <a:picLocks noChangeAspect="1"/>
           </p:cNvPicPr>
@@ -1304,7 +3605,7 @@
         <p:spPr>
           <a:xfrm>
             <a:off x="1188720" y="1143000"/>
-            <a:ext cx="822960" cy="822960"/>
+            <a:ext cx="868680" cy="868680"/>
           </a:xfrm>
           <a:prstGeom prst="rect">
             <a:avLst/>
@@ -1313,7 +3614,7 @@
       </p:pic>
       <p:pic>
         <p:nvPicPr>
-          <p:cNvPr id="4" name="Image 1" descr="/Volumes/work/_Projects/siph/assets/logos/logo_bps.png"/>
+          <p:cNvPr id="4" name="Image 1" descr="preencoded.png"/>
           <p:cNvPicPr>
             <a:picLocks noChangeAspect="1"/>
           </p:cNvPicPr>
@@ -1327,8 +3628,8 @@
         </p:blipFill>
         <p:spPr>
           <a:xfrm>
-            <a:off x="2194560" y="1325880"/>
-            <a:ext cx="1645920" cy="557784"/>
+            <a:off x="2286000" y="1325880"/>
+            <a:ext cx="1737360" cy="585216"/>
           </a:xfrm>
           <a:prstGeom prst="rect">
             <a:avLst/>
@@ -1344,17 +3645,17 @@
         <p:spPr>
           <a:xfrm>
             <a:off x="1188720" y="2240280"/>
-            <a:ext cx="4389120" cy="347472"/>
+            <a:ext cx="4754880" cy="384048"/>
           </a:xfrm>
           <a:prstGeom prst="roundRect">
             <a:avLst>
-              <a:gd name="adj" fmla="val 21053"/>
+              <a:gd name="adj" fmla="val 19048"/>
             </a:avLst>
           </a:prstGeom>
           <a:solidFill>
             <a:srgbClr val="0284C7"/>
           </a:solidFill>
-          <a:ln w="12700">
+          <a:ln w="15240">
             <a:solidFill>
               <a:srgbClr val="38BDF8"/>
             </a:solidFill>
@@ -1378,7 +3679,7 @@
         <p:spPr>
           <a:xfrm>
             <a:off x="1188720" y="2240280"/>
-            <a:ext cx="4389120" cy="347472"/>
+            <a:ext cx="4754880" cy="384048"/>
           </a:xfrm>
           <a:prstGeom prst="rect">
             <a:avLst/>
@@ -1394,7 +3695,7 @@
               <a:buNone/>
             </a:pPr>
             <a:r>
-              <a:rPr lang="en-US" sz="1000" b="1" dirty="0">
+              <a:rPr lang="en-US" sz="1100" b="1" dirty="0">
                 <a:solidFill>
                   <a:srgbClr val="FFFFFF"/>
                 </a:solidFill>
@@ -1404,7 +3705,7 @@
               </a:rPr>
               <a:t>TIM PENGENDALIAN INFLASI DAERAH (TPID) &amp; BPS</a:t>
             </a:r>
-            <a:endParaRPr lang="en-US" sz="1000" dirty="0"/>
+            <a:endParaRPr lang="en-US" sz="1100" dirty="0"/>
           </a:p>
         </p:txBody>
       </p:sp>
@@ -1416,7 +3717,7 @@
         </p:nvSpPr>
         <p:spPr>
           <a:xfrm>
-            <a:off x="1188720" y="2697480"/>
+            <a:off x="1188720" y="2724912"/>
             <a:ext cx="9601200" cy="1280160"/>
           </a:xfrm>
           <a:prstGeom prst="rect">
@@ -1431,12 +3732,12 @@
           <a:p>
             <a:pPr marL="0" indent="0">
               <a:lnSpc>
-                <a:spcPts val="3400"/>
+                <a:spcPts val="3600"/>
               </a:lnSpc>
               <a:buNone/>
             </a:pPr>
             <a:r>
-              <a:rPr lang="en-US" sz="2800" b="1" dirty="0">
+              <a:rPr lang="en-US" sz="2900" b="1" dirty="0">
                 <a:solidFill>
                   <a:srgbClr val="FFFFFF"/>
                 </a:solidFill>
@@ -1444,9 +3745,29 @@
                 <a:ea typeface="Calibri" pitchFamily="34" charset="-122"/>
                 <a:cs typeface="Calibri" pitchFamily="34" charset="-120"/>
               </a:rPr>
-              <a:t>Perkembangan Indeks Perkembangan Harga (IPH) 2026\nKabupaten Kepulauan Selayar</a:t>
-            </a:r>
-            <a:endParaRPr lang="en-US" sz="2800" dirty="0"/>
+              <a:t>Perkembangan Indeks Perkembangan Harga (IPH) 2026</a:t>
+            </a:r>
+            <a:endParaRPr lang="en-US" sz="2900" dirty="0"/>
+          </a:p>
+          <a:p>
+            <a:pPr marL="0" indent="0">
+              <a:lnSpc>
+                <a:spcPts val="3600"/>
+              </a:lnSpc>
+              <a:buNone/>
+            </a:pPr>
+            <a:r>
+              <a:rPr lang="en-US" sz="2900" b="1" dirty="0">
+                <a:solidFill>
+                  <a:srgbClr val="FFFFFF"/>
+                </a:solidFill>
+                <a:latin typeface="Calibri" pitchFamily="34" charset="0"/>
+                <a:ea typeface="Calibri" pitchFamily="34" charset="-122"/>
+                <a:cs typeface="Calibri" pitchFamily="34" charset="-120"/>
+              </a:rPr>
+              <a:t>Kabupaten Kepulauan Selayar</a:t>
+            </a:r>
+            <a:endParaRPr lang="en-US" sz="2900" dirty="0"/>
           </a:p>
         </p:txBody>
       </p:sp>
@@ -1459,7 +3780,7 @@
         <p:spPr>
           <a:xfrm>
             <a:off x="1188720" y="4069080"/>
-            <a:ext cx="9326880" cy="457200"/>
+            <a:ext cx="9326880" cy="502920"/>
           </a:xfrm>
           <a:prstGeom prst="rect">
             <a:avLst/>
@@ -1475,9 +3796,9 @@
               <a:buNone/>
             </a:pPr>
             <a:r>
-              <a:rPr lang="en-US" sz="1350" dirty="0">
-                <a:solidFill>
-                  <a:srgbClr val="94A3B8"/>
+              <a:rPr lang="en-US" sz="1400" dirty="0">
+                <a:solidFill>
+                  <a:srgbClr val="CBD5E1"/>
                 </a:solidFill>
                 <a:latin typeface="Calibri" pitchFamily="34" charset="0"/>
                 <a:ea typeface="Calibri" pitchFamily="34" charset="-122"/>
@@ -1485,7 +3806,7 @@
               </a:rPr>
               <a:t>Evaluasi Dinamika Fluktuasi Harga Mingguan, Komoditas Pemicu, dan Rekomendasi Kebijakan Pengendalian Inflasi (Januari – Oktober 2026)</a:t>
             </a:r>
-            <a:endParaRPr lang="en-US" sz="1350" dirty="0"/>
+            <a:endParaRPr lang="en-US" sz="1400" dirty="0"/>
           </a:p>
         </p:txBody>
       </p:sp>
@@ -1498,19 +3819,19 @@
         <p:spPr>
           <a:xfrm>
             <a:off x="1188720" y="4709160"/>
-            <a:ext cx="9784080" cy="1051560"/>
+            <a:ext cx="9784080" cy="1078992"/>
           </a:xfrm>
           <a:prstGeom prst="roundRect">
             <a:avLst>
-              <a:gd name="adj" fmla="val 8696"/>
+              <a:gd name="adj" fmla="val 8475"/>
             </a:avLst>
           </a:prstGeom>
           <a:solidFill>
             <a:srgbClr val="0F172A"/>
           </a:solidFill>
-          <a:ln w="12700">
+          <a:ln w="15240">
             <a:solidFill>
-              <a:srgbClr val="334155"/>
+              <a:srgbClr val="475569"/>
             </a:solidFill>
             <a:prstDash val="solid"/>
           </a:ln>
@@ -1532,7 +3853,7 @@
         <p:spPr>
           <a:xfrm>
             <a:off x="1371600" y="4800600"/>
-            <a:ext cx="9418320" cy="868680"/>
+            <a:ext cx="9418320" cy="896112"/>
           </a:xfrm>
           <a:prstGeom prst="rect">
             <a:avLst/>
@@ -1548,7 +3869,7 @@
               <a:buNone/>
             </a:pPr>
             <a:r>
-              <a:rPr lang="en-US" sz="1100" b="1" dirty="0">
+              <a:rPr lang="en-US" sz="1200" b="1" dirty="0">
                 <a:solidFill>
                   <a:srgbClr val="38BDF8"/>
                 </a:solidFill>
@@ -1559,7 +3880,7 @@
               <a:t>Forum: </a:t>
             </a:r>
             <a:r>
-              <a:rPr lang="en-US" sz="1100" dirty="0">
+              <a:rPr lang="en-US" sz="1200" dirty="0">
                 <a:solidFill>
                   <a:srgbClr val="F1F5F9"/>
                 </a:solidFill>
@@ -1567,37 +3888,11 @@
                 <a:ea typeface="Calibri" pitchFamily="34" charset="-122"/>
                 <a:cs typeface="Calibri" pitchFamily="34" charset="-120"/>
               </a:rPr>
-              <a:t>High Level Meeting (HLM) dan Capacity Building Penyusunan Neraca Pangan Daerah </a:t>
-            </a:r>
-            <a:r>
-              <a:rPr lang="en-US" sz="1100" dirty="0" err="1">
-                <a:solidFill>
-                  <a:srgbClr val="F1F5F9"/>
-                </a:solidFill>
-                <a:latin typeface="Calibri" pitchFamily="34" charset="0"/>
-                <a:ea typeface="Calibri" pitchFamily="34" charset="-122"/>
-                <a:cs typeface="Calibri" pitchFamily="34" charset="-120"/>
-              </a:rPr>
-              <a:t>Tahun</a:t>
-            </a:r>
-            <a:r>
-              <a:rPr lang="en-US" sz="1100" dirty="0">
-                <a:solidFill>
-                  <a:srgbClr val="F1F5F9"/>
-                </a:solidFill>
-                <a:latin typeface="Calibri" pitchFamily="34" charset="0"/>
-                <a:ea typeface="Calibri" pitchFamily="34" charset="-122"/>
-                <a:cs typeface="Calibri" pitchFamily="34" charset="-120"/>
-              </a:rPr>
-              <a:t> 2026</a:t>
-            </a:r>
-          </a:p>
-          <a:p>
-            <a:pPr marL="0" indent="0">
-              <a:buNone/>
-            </a:pPr>
-            <a:r>
-              <a:rPr lang="en-US" sz="1100" b="1" dirty="0" err="1">
+              <a:t>High Level Meeting (HLM) dan Capacity Building Penyusunan Neraca Pangan Daerah Tahun 2026
+</a:t>
+            </a:r>
+            <a:r>
+              <a:rPr lang="en-US" sz="1200" b="1" dirty="0">
                 <a:solidFill>
                   <a:srgbClr val="38BDF8"/>
                 </a:solidFill>
@@ -1605,10 +3900,21 @@
                 <a:ea typeface="Calibri" pitchFamily="34" charset="-122"/>
                 <a:cs typeface="Calibri" pitchFamily="34" charset="-120"/>
               </a:rPr>
-              <a:t>Cakupan</a:t>
-            </a:r>
-            <a:r>
-              <a:rPr lang="en-US" sz="1100" b="1" dirty="0">
+              <a:t>Cakupan: </a:t>
+            </a:r>
+            <a:r>
+              <a:rPr lang="en-US" sz="1200" dirty="0">
+                <a:solidFill>
+                  <a:srgbClr val="CBD5E1"/>
+                </a:solidFill>
+                <a:latin typeface="Calibri" pitchFamily="34" charset="0"/>
+                <a:ea typeface="Calibri" pitchFamily="34" charset="-122"/>
+                <a:cs typeface="Calibri" pitchFamily="34" charset="-120"/>
+              </a:rPr>
+              <a:t>33 Rilis Mingguan (Januari – Oktober 2026)  |  </a:t>
+            </a:r>
+            <a:r>
+              <a:rPr lang="en-US" sz="1200" b="1" dirty="0">
                 <a:solidFill>
                   <a:srgbClr val="38BDF8"/>
                 </a:solidFill>
@@ -1616,10 +3922,10 @@
                 <a:ea typeface="Calibri" pitchFamily="34" charset="-122"/>
                 <a:cs typeface="Calibri" pitchFamily="34" charset="-120"/>
               </a:rPr>
-              <a:t> Evaluasi: </a:t>
-            </a:r>
-            <a:r>
-              <a:rPr lang="en-US" sz="1100" dirty="0">
+              <a:t>Sumber: </a:t>
+            </a:r>
+            <a:r>
+              <a:rPr lang="en-US" sz="1200" dirty="0">
                 <a:solidFill>
                   <a:srgbClr val="CBD5E1"/>
                 </a:solidFill>
@@ -1627,31 +3933,9 @@
                 <a:ea typeface="Calibri" pitchFamily="34" charset="-122"/>
                 <a:cs typeface="Calibri" pitchFamily="34" charset="-120"/>
               </a:rPr>
-              <a:t>33 Rilis Mingguan (Januari – Oktober 2026)  |  </a:t>
-            </a:r>
-            <a:r>
-              <a:rPr lang="en-US" sz="1100" b="1" dirty="0">
-                <a:solidFill>
-                  <a:srgbClr val="38BDF8"/>
-                </a:solidFill>
-                <a:latin typeface="Calibri" pitchFamily="34" charset="0"/>
-                <a:ea typeface="Calibri" pitchFamily="34" charset="-122"/>
-                <a:cs typeface="Calibri" pitchFamily="34" charset="-120"/>
-              </a:rPr>
-              <a:t>Sumber Data: </a:t>
-            </a:r>
-            <a:r>
-              <a:rPr lang="en-US" sz="1100" dirty="0">
-                <a:solidFill>
-                  <a:srgbClr val="CBD5E1"/>
-                </a:solidFill>
-                <a:latin typeface="Calibri" pitchFamily="34" charset="0"/>
-                <a:ea typeface="Calibri" pitchFamily="34" charset="-122"/>
-                <a:cs typeface="Calibri" pitchFamily="34" charset="-120"/>
-              </a:rPr>
-              <a:t>Sistem SP2KP BPS RI &amp; SIPH Sulawesi Selatan</a:t>
-            </a:r>
-            <a:endParaRPr lang="en-US" sz="1100" dirty="0"/>
+              <a:t>Pemantauan SP2KP BPS RI &amp; Portal SIPH Sulawesi Selatan</a:t>
+            </a:r>
+            <a:endParaRPr lang="en-US" sz="1200" dirty="0"/>
           </a:p>
         </p:txBody>
       </p:sp>
@@ -1696,20 +3980,20 @@
         </p:nvSpPr>
         <p:spPr>
           <a:xfrm>
-            <a:off x="548640" y="411480"/>
-            <a:ext cx="3108960" cy="292608"/>
+            <a:off x="548640" y="365760"/>
+            <a:ext cx="3291840" cy="329184"/>
           </a:xfrm>
           <a:prstGeom prst="roundRect">
             <a:avLst>
-              <a:gd name="adj" fmla="val 25000"/>
+              <a:gd name="adj" fmla="val 22222"/>
             </a:avLst>
           </a:prstGeom>
           <a:solidFill>
             <a:srgbClr val="E0F2FE"/>
           </a:solidFill>
-          <a:ln w="12700">
+          <a:ln w="15240">
             <a:solidFill>
-              <a:srgbClr val="BAE6FD"/>
+              <a:srgbClr val="0284C7"/>
             </a:solidFill>
             <a:prstDash val="solid"/>
           </a:ln>
@@ -1730,8 +4014,8 @@
         </p:nvSpPr>
         <p:spPr>
           <a:xfrm>
-            <a:off x="548640" y="411480"/>
-            <a:ext cx="3108960" cy="292608"/>
+            <a:off x="548640" y="365760"/>
+            <a:ext cx="3291840" cy="329184"/>
           </a:xfrm>
           <a:prstGeom prst="rect">
             <a:avLst/>
@@ -1747,7 +4031,7 @@
               <a:buNone/>
             </a:pPr>
             <a:r>
-              <a:rPr lang="en-US" sz="850" b="1" dirty="0">
+              <a:rPr lang="en-US" sz="1000" b="1" dirty="0">
                 <a:solidFill>
                   <a:srgbClr val="0369A1"/>
                 </a:solidFill>
@@ -1757,7 +4041,7 @@
               </a:rPr>
               <a:t>TINJAUAN TAHUNAN 2026</a:t>
             </a:r>
-            <a:endParaRPr lang="en-US" sz="850" dirty="0"/>
+            <a:endParaRPr lang="en-US" sz="1000" dirty="0"/>
           </a:p>
         </p:txBody>
       </p:sp>
@@ -1769,8 +4053,8 @@
         </p:nvSpPr>
         <p:spPr>
           <a:xfrm>
-            <a:off x="548640" y="777240"/>
-            <a:ext cx="9601200" cy="438912"/>
+            <a:off x="548640" y="749808"/>
+            <a:ext cx="9509760" cy="475488"/>
           </a:xfrm>
           <a:prstGeom prst="rect">
             <a:avLst/>
@@ -1786,7 +4070,7 @@
               <a:buNone/>
             </a:pPr>
             <a:r>
-              <a:rPr lang="en-US" sz="2000" b="1" dirty="0">
+              <a:rPr lang="en-US" sz="2200" b="1" dirty="0">
                 <a:solidFill>
                   <a:srgbClr val="0F172A"/>
                 </a:solidFill>
@@ -1796,7 +4080,7 @@
               </a:rPr>
               <a:t>Dinamika IPH Kabupaten Kepulauan Selayar Sepanjang 2026</a:t>
             </a:r>
-            <a:endParaRPr lang="en-US" sz="2000" dirty="0"/>
+            <a:endParaRPr lang="en-US" sz="2200" dirty="0"/>
           </a:p>
         </p:txBody>
       </p:sp>
@@ -1809,7 +4093,7 @@
         <p:spPr>
           <a:xfrm>
             <a:off x="548640" y="1234440"/>
-            <a:ext cx="9601200" cy="320040"/>
+            <a:ext cx="9509760" cy="347472"/>
           </a:xfrm>
           <a:prstGeom prst="rect">
             <a:avLst/>
@@ -1825,9 +4109,9 @@
               <a:buNone/>
             </a:pPr>
             <a:r>
-              <a:rPr lang="en-US" sz="1200" dirty="0">
-                <a:solidFill>
-                  <a:srgbClr val="64748B"/>
+              <a:rPr lang="en-US" sz="1300" dirty="0">
+                <a:solidFill>
+                  <a:srgbClr val="334155"/>
                 </a:solidFill>
                 <a:latin typeface="Calibri" pitchFamily="34" charset="0"/>
                 <a:ea typeface="Calibri" pitchFamily="34" charset="-122"/>
@@ -1835,13 +4119,13 @@
               </a:rPr>
               <a:t>Tren Harga: Fluktuasi Ekstrem Saat HBKN April Diikuti Deflasi Panjang dan Rebound di Q3</a:t>
             </a:r>
-            <a:endParaRPr lang="en-US" sz="1200" dirty="0"/>
+            <a:endParaRPr lang="en-US" sz="1300" dirty="0"/>
           </a:p>
         </p:txBody>
       </p:sp>
       <p:pic>
         <p:nvPicPr>
-          <p:cNvPr id="6" name="Image 0" descr="/Volumes/work/_Projects/siph/assets/logos/logo_bps.png"/>
+          <p:cNvPr id="6" name="Image 0" descr="preencoded.png"/>
           <p:cNvPicPr>
             <a:picLocks noChangeAspect="1"/>
           </p:cNvPicPr>
@@ -1855,8 +4139,8 @@
         </p:blipFill>
         <p:spPr>
           <a:xfrm>
-            <a:off x="10241280" y="411480"/>
-            <a:ext cx="1371600" cy="466344"/>
+            <a:off x="10149840" y="384048"/>
+            <a:ext cx="1463040" cy="493776"/>
           </a:xfrm>
           <a:prstGeom prst="rect">
             <a:avLst/>
@@ -1888,9 +4172,9 @@
               <a:buNone/>
             </a:pPr>
             <a:r>
-              <a:rPr lang="en-US" sz="900" dirty="0">
-                <a:solidFill>
-                  <a:srgbClr val="94A3B8"/>
+              <a:rPr lang="en-US" sz="1000" dirty="0">
+                <a:solidFill>
+                  <a:srgbClr val="64748B"/>
                 </a:solidFill>
                 <a:latin typeface="Calibri" pitchFamily="34" charset="0"/>
                 <a:ea typeface="Calibri" pitchFamily="34" charset="-122"/>
@@ -1898,7 +4182,7 @@
               </a:rPr>
               <a:t>Sumber: Badan Pusat Statistik &amp; SIPH Sulawesi Selatan 2026 | Evaluasi TPID Kab. Kepulauan Selayar</a:t>
             </a:r>
-            <a:endParaRPr lang="en-US" sz="900" dirty="0"/>
+            <a:endParaRPr lang="en-US" sz="1000" dirty="0"/>
           </a:p>
         </p:txBody>
       </p:sp>
@@ -1927,9 +4211,9 @@
               <a:buNone/>
             </a:pPr>
             <a:r>
-              <a:rPr lang="en-US" sz="1000" b="1" dirty="0">
-                <a:solidFill>
-                  <a:srgbClr val="94A3B8"/>
+              <a:rPr lang="en-US" sz="1100" b="1" dirty="0">
+                <a:solidFill>
+                  <a:srgbClr val="64748B"/>
                 </a:solidFill>
                 <a:latin typeface="Calibri" pitchFamily="34" charset="0"/>
                 <a:ea typeface="Calibri" pitchFamily="34" charset="-122"/>
@@ -1937,71 +4221,29 @@
               </a:rPr>
               <a:t>2</a:t>
             </a:r>
-            <a:endParaRPr lang="en-US" sz="1000" dirty="0"/>
-          </a:p>
-        </p:txBody>
-      </p:sp>
-      <p:sp>
-        <p:nvSpPr>
-          <p:cNvPr id="9" name="Shape 6"/>
-          <p:cNvSpPr/>
-          <p:nvPr/>
-        </p:nvSpPr>
-        <p:spPr>
-          <a:xfrm>
-            <a:off x="548640" y="1691640"/>
-            <a:ext cx="6583680" cy="4617720"/>
-          </a:xfrm>
-          <a:prstGeom prst="roundRect">
-            <a:avLst>
-              <a:gd name="adj" fmla="val 2376"/>
-            </a:avLst>
-          </a:prstGeom>
-          <a:solidFill>
-            <a:srgbClr val="FFFFFF"/>
-          </a:solidFill>
-          <a:ln w="12700">
-            <a:solidFill>
-              <a:srgbClr val="E2E8F0"/>
-            </a:solidFill>
-            <a:prstDash val="solid"/>
-          </a:ln>
-        </p:spPr>
-        <p:txBody>
-          <a:bodyPr/>
-          <a:lstStyle/>
-          <a:p>
-            <a:endParaRPr lang="en-US"/>
-          </a:p>
-        </p:txBody>
-      </p:sp>
-      <p:pic>
-        <p:nvPicPr>
-          <p:cNvPr id="10" name="Image 1" descr="/Volumes/work/_Projects/siph/assets/charts/chart_slide2.png"/>
-          <p:cNvPicPr>
-            <a:picLocks noChangeAspect="1"/>
-          </p:cNvPicPr>
-          <p:nvPr/>
-        </p:nvPicPr>
-        <p:blipFill>
-          <a:blip r:embed="rId4"/>
-          <a:stretch>
-            <a:fillRect/>
-          </a:stretch>
-        </p:blipFill>
-        <p:spPr>
-          <a:xfrm>
-            <a:off x="685800" y="1783080"/>
-            <a:ext cx="6309360" cy="4434840"/>
-          </a:xfrm>
-          <a:prstGeom prst="rect">
-            <a:avLst/>
-          </a:prstGeom>
-        </p:spPr>
-      </p:pic>
-      <p:sp>
-        <p:nvSpPr>
-          <p:cNvPr id="11" name="Shape 7"/>
+            <a:endParaRPr lang="en-US" sz="1100" dirty="0"/>
+          </a:p>
+        </p:txBody>
+      </p:sp>
+      <p:graphicFrame>
+        <p:nvGraphicFramePr>
+          <p:cNvPr id="9" name="Chart 0"/>
+          <p:cNvGraphicFramePr/>
+          <p:nvPr/>
+        </p:nvGraphicFramePr>
+        <p:xfrm>
+          <a:off x="548640" y="1691640"/>
+          <a:ext cx="6583680" cy="4617720"/>
+        </p:xfrm>
+        <a:graphic>
+          <a:graphicData uri="http://schemas.openxmlformats.org/drawingml/2006/chart">
+            <c:chart xmlns:c="http://schemas.openxmlformats.org/drawingml/2006/chart" xmlns:r="http://schemas.openxmlformats.org/officeDocument/2006/relationships" r:id="rId4"/>
+          </a:graphicData>
+        </a:graphic>
+      </p:graphicFrame>
+      <p:sp>
+        <p:nvSpPr>
+          <p:cNvPr id="10" name="Shape 6"/>
           <p:cNvSpPr/>
           <p:nvPr/>
         </p:nvSpPr>
@@ -2018,7 +4260,7 @@
           <a:solidFill>
             <a:srgbClr val="FFFFFF"/>
           </a:solidFill>
-          <a:ln w="12700">
+          <a:ln w="19050">
             <a:solidFill>
               <a:srgbClr val="FCA5A5"/>
             </a:solidFill>
@@ -2035,14 +4277,14 @@
       </p:sp>
       <p:sp>
         <p:nvSpPr>
-          <p:cNvPr id="12" name="Text 8"/>
-          <p:cNvSpPr/>
-          <p:nvPr/>
-        </p:nvSpPr>
-        <p:spPr>
-          <a:xfrm>
-            <a:off x="7498080" y="1810512"/>
-            <a:ext cx="3931920" cy="228600"/>
+          <p:cNvPr id="11" name="Text 7"/>
+          <p:cNvSpPr/>
+          <p:nvPr/>
+        </p:nvSpPr>
+        <p:spPr>
+          <a:xfrm>
+            <a:off x="7498080" y="1792224"/>
+            <a:ext cx="3931920" cy="256032"/>
           </a:xfrm>
           <a:prstGeom prst="rect">
             <a:avLst/>
@@ -2058,7 +4300,7 @@
               <a:buNone/>
             </a:pPr>
             <a:r>
-              <a:rPr lang="en-US" sz="1000" b="1" dirty="0">
+              <a:rPr lang="en-US" sz="1150" b="1" dirty="0">
                 <a:solidFill>
                   <a:srgbClr val="DC2626"/>
                 </a:solidFill>
@@ -2068,13 +4310,13 @@
               </a:rPr>
               <a:t>PUNCAK FLUKTUASI HBKN (APRIL 2026)</a:t>
             </a:r>
-            <a:endParaRPr lang="en-US" sz="1000" dirty="0"/>
-          </a:p>
-        </p:txBody>
-      </p:sp>
-      <p:sp>
-        <p:nvSpPr>
-          <p:cNvPr id="13" name="Text 9"/>
+            <a:endParaRPr lang="en-US" sz="1150" dirty="0"/>
+          </a:p>
+        </p:txBody>
+      </p:sp>
+      <p:sp>
+        <p:nvSpPr>
+          <p:cNvPr id="12" name="Text 8"/>
           <p:cNvSpPr/>
           <p:nvPr/>
         </p:nvSpPr>
@@ -2097,7 +4339,7 @@
               <a:buNone/>
             </a:pPr>
             <a:r>
-              <a:rPr lang="en-US" sz="1050" b="1" dirty="0">
+              <a:rPr lang="en-US" sz="1150" b="1" dirty="0">
                 <a:solidFill>
                   <a:srgbClr val="0F172A"/>
                 </a:solidFill>
@@ -2108,7 +4350,7 @@
               <a:t>• Rentang Ayunan: </a:t>
             </a:r>
             <a:r>
-              <a:rPr lang="en-US" sz="1050" b="1" dirty="0">
+              <a:rPr lang="en-US" sz="1200" b="1" dirty="0">
                 <a:solidFill>
                   <a:srgbClr val="DC2626"/>
                 </a:solidFill>
@@ -2118,16 +4360,16 @@
               </a:rPr>
               <a:t>-3.29% s.d. +3.29%</a:t>
             </a:r>
-            <a:endParaRPr lang="en-US" sz="1050" dirty="0"/>
+            <a:endParaRPr lang="en-US" sz="1150" dirty="0"/>
           </a:p>
           <a:p>
             <a:pPr marL="0" indent="0">
               <a:buNone/>
             </a:pPr>
             <a:r>
-              <a:rPr lang="en-US" sz="1000" dirty="0">
-                <a:solidFill>
-                  <a:srgbClr val="64748B"/>
+              <a:rPr lang="en-US" sz="1100" dirty="0">
+                <a:solidFill>
+                  <a:srgbClr val="1E293B"/>
                 </a:solidFill>
                 <a:latin typeface="Calibri" pitchFamily="34" charset="0"/>
                 <a:ea typeface="Calibri" pitchFamily="34" charset="-122"/>
@@ -2135,13 +4377,13 @@
               </a:rPr>
               <a:t>• Analisis: Lonjakan belanja Idul Fitri pada Daging Sapi (+2.17%) dan Telur Ayam (+1.35%) memicu puncak inflasi sebelum terkoreksi tajam.</a:t>
             </a:r>
-            <a:endParaRPr lang="en-US" sz="1050" dirty="0"/>
-          </a:p>
-        </p:txBody>
-      </p:sp>
-      <p:sp>
-        <p:nvSpPr>
-          <p:cNvPr id="14" name="Shape 10"/>
+            <a:endParaRPr lang="en-US" sz="1150" dirty="0"/>
+          </a:p>
+        </p:txBody>
+      </p:sp>
+      <p:sp>
+        <p:nvSpPr>
+          <p:cNvPr id="13" name="Shape 9"/>
           <p:cNvSpPr/>
           <p:nvPr/>
         </p:nvSpPr>
@@ -2158,7 +4400,7 @@
           <a:solidFill>
             <a:srgbClr val="FFFFFF"/>
           </a:solidFill>
-          <a:ln w="12700">
+          <a:ln w="19050">
             <a:solidFill>
               <a:srgbClr val="86EFAC"/>
             </a:solidFill>
@@ -2175,14 +4417,14 @@
       </p:sp>
       <p:sp>
         <p:nvSpPr>
-          <p:cNvPr id="15" name="Text 11"/>
-          <p:cNvSpPr/>
-          <p:nvPr/>
-        </p:nvSpPr>
-        <p:spPr>
-          <a:xfrm>
-            <a:off x="7498080" y="3410712"/>
-            <a:ext cx="3931920" cy="228600"/>
+          <p:cNvPr id="14" name="Text 10"/>
+          <p:cNvSpPr/>
+          <p:nvPr/>
+        </p:nvSpPr>
+        <p:spPr>
+          <a:xfrm>
+            <a:off x="7498080" y="3392424"/>
+            <a:ext cx="3931920" cy="256032"/>
           </a:xfrm>
           <a:prstGeom prst="rect">
             <a:avLst/>
@@ -2198,7 +4440,7 @@
               <a:buNone/>
             </a:pPr>
             <a:r>
-              <a:rPr lang="en-US" sz="1000" b="1" dirty="0">
+              <a:rPr lang="en-US" sz="1150" b="1" dirty="0">
                 <a:solidFill>
                   <a:srgbClr val="16A34A"/>
                 </a:solidFill>
@@ -2208,13 +4450,13 @@
               </a:rPr>
               <a:t>FASE DEFLASI PANJANG (MEI – AGUSTUS 2026)</a:t>
             </a:r>
-            <a:endParaRPr lang="en-US" sz="1000" dirty="0"/>
-          </a:p>
-        </p:txBody>
-      </p:sp>
-      <p:sp>
-        <p:nvSpPr>
-          <p:cNvPr id="16" name="Text 12"/>
+            <a:endParaRPr lang="en-US" sz="1150" dirty="0"/>
+          </a:p>
+        </p:txBody>
+      </p:sp>
+      <p:sp>
+        <p:nvSpPr>
+          <p:cNvPr id="15" name="Text 11"/>
           <p:cNvSpPr/>
           <p:nvPr/>
         </p:nvSpPr>
@@ -2237,7 +4479,7 @@
               <a:buNone/>
             </a:pPr>
             <a:r>
-              <a:rPr lang="en-US" sz="1050" b="1" dirty="0">
+              <a:rPr lang="en-US" sz="1150" b="1" dirty="0">
                 <a:solidFill>
                   <a:srgbClr val="0F172A"/>
                 </a:solidFill>
@@ -2248,7 +4490,7 @@
               <a:t>• Titik Deflasi Terendah: </a:t>
             </a:r>
             <a:r>
-              <a:rPr lang="en-US" sz="1050" b="1" dirty="0">
+              <a:rPr lang="en-US" sz="1200" b="1" dirty="0">
                 <a:solidFill>
                   <a:srgbClr val="16A34A"/>
                 </a:solidFill>
@@ -2258,30 +4500,30 @@
               </a:rPr>
               <a:t>-2.02% di Juli (M5)</a:t>
             </a:r>
-            <a:endParaRPr lang="en-US" sz="1050" dirty="0"/>
+            <a:endParaRPr lang="en-US" sz="1150" dirty="0"/>
           </a:p>
           <a:p>
             <a:pPr marL="0" indent="0">
               <a:buNone/>
             </a:pPr>
             <a:r>
-              <a:rPr lang="en-US" sz="1000" dirty="0">
-                <a:solidFill>
-                  <a:srgbClr val="64748B"/>
-                </a:solidFill>
-                <a:latin typeface="Calibri" pitchFamily="34" charset="0"/>
-                <a:ea typeface="Calibri" pitchFamily="34" charset="-122"/>
-                <a:cs typeface="Calibri" pitchFamily="34" charset="-120"/>
-              </a:rPr>
-              <a:t>• Analisis: Melimpahnya panen cabai rawit dan pasokan beras daratan Sulsel selama kondisi perairan laut stabil menjaga daya beli warga.</a:t>
-            </a:r>
-            <a:endParaRPr lang="en-US" sz="1050" dirty="0"/>
-          </a:p>
-        </p:txBody>
-      </p:sp>
-      <p:sp>
-        <p:nvSpPr>
-          <p:cNvPr id="17" name="Shape 13"/>
+              <a:rPr lang="en-US" sz="1100" dirty="0">
+                <a:solidFill>
+                  <a:srgbClr val="1E293B"/>
+                </a:solidFill>
+                <a:latin typeface="Calibri" pitchFamily="34" charset="0"/>
+                <a:ea typeface="Calibri" pitchFamily="34" charset="-122"/>
+                <a:cs typeface="Calibri" pitchFamily="34" charset="-120"/>
+              </a:rPr>
+              <a:t>• Analisis: Melimpahnya panen cabai rawit dan pasokan beras daratan Sulsel selama kondisi perairan laut tenang menjaga daya beli warga.</a:t>
+            </a:r>
+            <a:endParaRPr lang="en-US" sz="1150" dirty="0"/>
+          </a:p>
+        </p:txBody>
+      </p:sp>
+      <p:sp>
+        <p:nvSpPr>
+          <p:cNvPr id="16" name="Shape 12"/>
           <p:cNvSpPr/>
           <p:nvPr/>
         </p:nvSpPr>
@@ -2298,7 +4540,7 @@
           <a:solidFill>
             <a:srgbClr val="FFFFFF"/>
           </a:solidFill>
-          <a:ln w="12700">
+          <a:ln w="19050">
             <a:solidFill>
               <a:srgbClr val="FDE68A"/>
             </a:solidFill>
@@ -2315,14 +4557,14 @@
       </p:sp>
       <p:sp>
         <p:nvSpPr>
-          <p:cNvPr id="18" name="Text 14"/>
-          <p:cNvSpPr/>
-          <p:nvPr/>
-        </p:nvSpPr>
-        <p:spPr>
-          <a:xfrm>
-            <a:off x="7498080" y="5010912"/>
-            <a:ext cx="3931920" cy="228600"/>
+          <p:cNvPr id="17" name="Text 13"/>
+          <p:cNvSpPr/>
+          <p:nvPr/>
+        </p:nvSpPr>
+        <p:spPr>
+          <a:xfrm>
+            <a:off x="7498080" y="4992624"/>
+            <a:ext cx="3931920" cy="256032"/>
           </a:xfrm>
           <a:prstGeom prst="rect">
             <a:avLst/>
@@ -2338,7 +4580,7 @@
               <a:buNone/>
             </a:pPr>
             <a:r>
-              <a:rPr lang="en-US" sz="1000" b="1" dirty="0">
+              <a:rPr lang="en-US" sz="1150" b="1" dirty="0">
                 <a:solidFill>
                   <a:srgbClr val="D97706"/>
                 </a:solidFill>
@@ -2348,13 +4590,13 @@
               </a:rPr>
               <a:t>REBOUND TEKANAN HARGA (SEP – OKT 2026)</a:t>
             </a:r>
-            <a:endParaRPr lang="en-US" sz="1000" dirty="0"/>
-          </a:p>
-        </p:txBody>
-      </p:sp>
-      <p:sp>
-        <p:nvSpPr>
-          <p:cNvPr id="19" name="Text 15"/>
+            <a:endParaRPr lang="en-US" sz="1150" dirty="0"/>
+          </a:p>
+        </p:txBody>
+      </p:sp>
+      <p:sp>
+        <p:nvSpPr>
+          <p:cNvPr id="18" name="Text 14"/>
           <p:cNvSpPr/>
           <p:nvPr/>
         </p:nvSpPr>
@@ -2377,7 +4619,7 @@
               <a:buNone/>
             </a:pPr>
             <a:r>
-              <a:rPr lang="en-US" sz="1050" b="1" dirty="0">
+              <a:rPr lang="en-US" sz="1150" b="1" dirty="0">
                 <a:solidFill>
                   <a:srgbClr val="0F172A"/>
                 </a:solidFill>
@@ -2388,7 +4630,7 @@
               <a:t>• Tren Rebound: </a:t>
             </a:r>
             <a:r>
-              <a:rPr lang="en-US" sz="1050" b="1" dirty="0">
+              <a:rPr lang="en-US" sz="1200" b="1" dirty="0">
                 <a:solidFill>
                   <a:srgbClr val="D97706"/>
                 </a:solidFill>
@@ -2398,16 +4640,16 @@
               </a:rPr>
               <a:t>+0.39% ke +1.57% (Sep)</a:t>
             </a:r>
-            <a:endParaRPr lang="en-US" sz="1050" dirty="0"/>
+            <a:endParaRPr lang="en-US" sz="1150" dirty="0"/>
           </a:p>
           <a:p>
             <a:pPr marL="0" indent="0">
               <a:buNone/>
             </a:pPr>
             <a:r>
-              <a:rPr lang="en-US" sz="1000" dirty="0">
-                <a:solidFill>
-                  <a:srgbClr val="64748B"/>
+              <a:rPr lang="en-US" sz="1100" dirty="0">
+                <a:solidFill>
+                  <a:srgbClr val="1E293B"/>
                 </a:solidFill>
                 <a:latin typeface="Calibri" pitchFamily="34" charset="0"/>
                 <a:ea typeface="Calibri" pitchFamily="34" charset="-122"/>
@@ -2415,7 +4657,7 @@
               </a:rPr>
               <a:t>• Analisis: Masa peralihan musim menekan hasil panen cabai rawit lokal, diperkuat kenaikan harga beras awal Oktober (+0.84%).</a:t>
             </a:r>
-            <a:endParaRPr lang="en-US" sz="1050" dirty="0"/>
+            <a:endParaRPr lang="en-US" sz="1150" dirty="0"/>
           </a:p>
         </p:txBody>
       </p:sp>
@@ -2460,20 +4702,20 @@
         </p:nvSpPr>
         <p:spPr>
           <a:xfrm>
-            <a:off x="548640" y="411480"/>
-            <a:ext cx="3108960" cy="292608"/>
+            <a:off x="548640" y="365760"/>
+            <a:ext cx="3291840" cy="329184"/>
           </a:xfrm>
           <a:prstGeom prst="roundRect">
             <a:avLst>
-              <a:gd name="adj" fmla="val 25000"/>
+              <a:gd name="adj" fmla="val 22222"/>
             </a:avLst>
           </a:prstGeom>
           <a:solidFill>
             <a:srgbClr val="E0F2FE"/>
           </a:solidFill>
-          <a:ln w="12700">
+          <a:ln w="15240">
             <a:solidFill>
-              <a:srgbClr val="BAE6FD"/>
+              <a:srgbClr val="0284C7"/>
             </a:solidFill>
             <a:prstDash val="solid"/>
           </a:ln>
@@ -2494,8 +4736,8 @@
         </p:nvSpPr>
         <p:spPr>
           <a:xfrm>
-            <a:off x="548640" y="411480"/>
-            <a:ext cx="3108960" cy="292608"/>
+            <a:off x="548640" y="365760"/>
+            <a:ext cx="3291840" cy="329184"/>
           </a:xfrm>
           <a:prstGeom prst="rect">
             <a:avLst/>
@@ -2511,7 +4753,7 @@
               <a:buNone/>
             </a:pPr>
             <a:r>
-              <a:rPr lang="en-US" sz="850" b="1" dirty="0">
+              <a:rPr lang="en-US" sz="1000" b="1" dirty="0">
                 <a:solidFill>
                   <a:srgbClr val="0369A1"/>
                 </a:solidFill>
@@ -2521,7 +4763,7 @@
               </a:rPr>
               <a:t>ANALISIS PERIODE I • HBKN</a:t>
             </a:r>
-            <a:endParaRPr lang="en-US" sz="850" dirty="0"/>
+            <a:endParaRPr lang="en-US" sz="1000" dirty="0"/>
           </a:p>
         </p:txBody>
       </p:sp>
@@ -2533,8 +4775,8 @@
         </p:nvSpPr>
         <p:spPr>
           <a:xfrm>
-            <a:off x="548640" y="777240"/>
-            <a:ext cx="9601200" cy="438912"/>
+            <a:off x="548640" y="749808"/>
+            <a:ext cx="9509760" cy="475488"/>
           </a:xfrm>
           <a:prstGeom prst="rect">
             <a:avLst/>
@@ -2550,7 +4792,7 @@
               <a:buNone/>
             </a:pPr>
             <a:r>
-              <a:rPr lang="en-US" sz="2000" b="1" dirty="0">
+              <a:rPr lang="en-US" sz="2200" b="1" dirty="0">
                 <a:solidFill>
                   <a:srgbClr val="0F172A"/>
                 </a:solidFill>
@@ -2560,7 +4802,7 @@
               </a:rPr>
               <a:t>Maret – April 2026: Dinamika Harga Fase Ramadan &amp; Idul Fitri</a:t>
             </a:r>
-            <a:endParaRPr lang="en-US" sz="2000" dirty="0"/>
+            <a:endParaRPr lang="en-US" sz="2200" dirty="0"/>
           </a:p>
         </p:txBody>
       </p:sp>
@@ -2573,7 +4815,7 @@
         <p:spPr>
           <a:xfrm>
             <a:off x="548640" y="1234440"/>
-            <a:ext cx="9601200" cy="320040"/>
+            <a:ext cx="9509760" cy="347472"/>
           </a:xfrm>
           <a:prstGeom prst="rect">
             <a:avLst/>
@@ -2589,9 +4831,9 @@
               <a:buNone/>
             </a:pPr>
             <a:r>
-              <a:rPr lang="en-US" sz="1200" dirty="0">
-                <a:solidFill>
-                  <a:srgbClr val="64748B"/>
+              <a:rPr lang="en-US" sz="1300" dirty="0">
+                <a:solidFill>
+                  <a:srgbClr val="334155"/>
                 </a:solidFill>
                 <a:latin typeface="Calibri" pitchFamily="34" charset="0"/>
                 <a:ea typeface="Calibri" pitchFamily="34" charset="-122"/>
@@ -2599,13 +4841,13 @@
               </a:rPr>
               <a:t>Eskalasi Tajam Protein Hewani &amp; Telur Menjelang Hari Raya Sebelum Terjadi Koreksi Pasca HBKN</a:t>
             </a:r>
-            <a:endParaRPr lang="en-US" sz="1200" dirty="0"/>
+            <a:endParaRPr lang="en-US" sz="1300" dirty="0"/>
           </a:p>
         </p:txBody>
       </p:sp>
       <p:pic>
         <p:nvPicPr>
-          <p:cNvPr id="6" name="Image 0" descr="/Volumes/work/_Projects/siph/assets/logos/logo_bps.png"/>
+          <p:cNvPr id="6" name="Image 0" descr="preencoded.png"/>
           <p:cNvPicPr>
             <a:picLocks noChangeAspect="1"/>
           </p:cNvPicPr>
@@ -2619,8 +4861,8 @@
         </p:blipFill>
         <p:spPr>
           <a:xfrm>
-            <a:off x="10241280" y="411480"/>
-            <a:ext cx="1371600" cy="466344"/>
+            <a:off x="10149840" y="384048"/>
+            <a:ext cx="1463040" cy="493776"/>
           </a:xfrm>
           <a:prstGeom prst="rect">
             <a:avLst/>
@@ -2652,9 +4894,9 @@
               <a:buNone/>
             </a:pPr>
             <a:r>
-              <a:rPr lang="en-US" sz="900" dirty="0">
-                <a:solidFill>
-                  <a:srgbClr val="94A3B8"/>
+              <a:rPr lang="en-US" sz="1000" dirty="0">
+                <a:solidFill>
+                  <a:srgbClr val="64748B"/>
                 </a:solidFill>
                 <a:latin typeface="Calibri" pitchFamily="34" charset="0"/>
                 <a:ea typeface="Calibri" pitchFamily="34" charset="-122"/>
@@ -2662,7 +4904,7 @@
               </a:rPr>
               <a:t>Sumber: Badan Pusat Statistik &amp; SIPH Sulawesi Selatan 2026 | Evaluasi TPID Kab. Kepulauan Selayar</a:t>
             </a:r>
-            <a:endParaRPr lang="en-US" sz="900" dirty="0"/>
+            <a:endParaRPr lang="en-US" sz="1000" dirty="0"/>
           </a:p>
         </p:txBody>
       </p:sp>
@@ -2691,9 +4933,9 @@
               <a:buNone/>
             </a:pPr>
             <a:r>
-              <a:rPr lang="en-US" sz="1000" b="1" dirty="0">
-                <a:solidFill>
-                  <a:srgbClr val="94A3B8"/>
+              <a:rPr lang="en-US" sz="1100" b="1" dirty="0">
+                <a:solidFill>
+                  <a:srgbClr val="64748B"/>
                 </a:solidFill>
                 <a:latin typeface="Calibri" pitchFamily="34" charset="0"/>
                 <a:ea typeface="Calibri" pitchFamily="34" charset="-122"/>
@@ -2701,71 +4943,45 @@
               </a:rPr>
               <a:t>3</a:t>
             </a:r>
-            <a:endParaRPr lang="en-US" sz="1000" dirty="0"/>
-          </a:p>
-        </p:txBody>
-      </p:sp>
-      <p:sp>
-        <p:nvSpPr>
-          <p:cNvPr id="9" name="Shape 6"/>
-          <p:cNvSpPr/>
-          <p:nvPr/>
-        </p:nvSpPr>
-        <p:spPr>
-          <a:xfrm>
-            <a:off x="548640" y="1691640"/>
-            <a:ext cx="6217920" cy="4617720"/>
-          </a:xfrm>
-          <a:prstGeom prst="roundRect">
-            <a:avLst>
-              <a:gd name="adj" fmla="val 2376"/>
-            </a:avLst>
-          </a:prstGeom>
-          <a:solidFill>
-            <a:srgbClr val="FFFFFF"/>
-          </a:solidFill>
-          <a:ln w="12700">
-            <a:solidFill>
-              <a:srgbClr val="E2E8F0"/>
-            </a:solidFill>
-            <a:prstDash val="solid"/>
-          </a:ln>
-        </p:spPr>
-        <p:txBody>
-          <a:bodyPr/>
-          <a:lstStyle/>
-          <a:p>
-            <a:endParaRPr lang="en-US"/>
-          </a:p>
-        </p:txBody>
-      </p:sp>
-      <p:pic>
-        <p:nvPicPr>
-          <p:cNvPr id="10" name="Image 1" descr="/Volumes/work/_Projects/siph/assets/charts/chart_slide3.png"/>
-          <p:cNvPicPr>
-            <a:picLocks noChangeAspect="1"/>
-          </p:cNvPicPr>
-          <p:nvPr/>
-        </p:nvPicPr>
-        <p:blipFill>
-          <a:blip r:embed="rId4"/>
-          <a:stretch>
-            <a:fillRect/>
-          </a:stretch>
-        </p:blipFill>
-        <p:spPr>
-          <a:xfrm>
-            <a:off x="685800" y="1783080"/>
-            <a:ext cx="5943600" cy="4434840"/>
-          </a:xfrm>
-          <a:prstGeom prst="rect">
-            <a:avLst/>
-          </a:prstGeom>
-        </p:spPr>
-      </p:pic>
-      <p:sp>
-        <p:nvSpPr>
-          <p:cNvPr id="11" name="Shape 7"/>
+            <a:endParaRPr lang="en-US" sz="1100" dirty="0"/>
+          </a:p>
+        </p:txBody>
+      </p:sp>
+      <p:graphicFrame>
+        <p:nvGraphicFramePr>
+          <p:cNvPr id="9" name="Chart 0"/>
+          <p:cNvGraphicFramePr/>
+          <p:nvPr/>
+        </p:nvGraphicFramePr>
+        <p:xfrm>
+          <a:off x="548640" y="1691640"/>
+          <a:ext cx="6217920" cy="2194560"/>
+        </p:xfrm>
+        <a:graphic>
+          <a:graphicData uri="http://schemas.openxmlformats.org/drawingml/2006/chart">
+            <c:chart xmlns:c="http://schemas.openxmlformats.org/drawingml/2006/chart" xmlns:r="http://schemas.openxmlformats.org/officeDocument/2006/relationships" r:id="rId4"/>
+          </a:graphicData>
+        </a:graphic>
+      </p:graphicFrame>
+      <p:graphicFrame>
+        <p:nvGraphicFramePr>
+          <p:cNvPr id="10" name="Chart 1"/>
+          <p:cNvGraphicFramePr/>
+          <p:nvPr/>
+        </p:nvGraphicFramePr>
+        <p:xfrm>
+          <a:off x="548640" y="4023360"/>
+          <a:ext cx="6217920" cy="2286000"/>
+        </p:xfrm>
+        <a:graphic>
+          <a:graphicData uri="http://schemas.openxmlformats.org/drawingml/2006/chart">
+            <c:chart xmlns:c="http://schemas.openxmlformats.org/drawingml/2006/chart" xmlns:r="http://schemas.openxmlformats.org/officeDocument/2006/relationships" r:id="rId5"/>
+          </a:graphicData>
+        </a:graphic>
+      </p:graphicFrame>
+      <p:sp>
+        <p:nvSpPr>
+          <p:cNvPr id="11" name="Shape 6"/>
           <p:cNvSpPr/>
           <p:nvPr/>
         </p:nvSpPr>
@@ -2782,7 +4998,7 @@
           <a:solidFill>
             <a:srgbClr val="FFFFFF"/>
           </a:solidFill>
-          <a:ln w="12700">
+          <a:ln w="19050">
             <a:solidFill>
               <a:srgbClr val="FCA5A5"/>
             </a:solidFill>
@@ -2799,14 +5015,14 @@
       </p:sp>
       <p:sp>
         <p:nvSpPr>
-          <p:cNvPr id="12" name="Text 8"/>
-          <p:cNvSpPr/>
-          <p:nvPr/>
-        </p:nvSpPr>
-        <p:spPr>
-          <a:xfrm>
-            <a:off x="7178040" y="1828800"/>
-            <a:ext cx="4206240" cy="228600"/>
+          <p:cNvPr id="12" name="Text 7"/>
+          <p:cNvSpPr/>
+          <p:nvPr/>
+        </p:nvSpPr>
+        <p:spPr>
+          <a:xfrm>
+            <a:off x="7178040" y="1792224"/>
+            <a:ext cx="4206240" cy="256032"/>
           </a:xfrm>
           <a:prstGeom prst="rect">
             <a:avLst/>
@@ -2822,7 +5038,7 @@
               <a:buNone/>
             </a:pPr>
             <a:r>
-              <a:rPr lang="en-US" sz="1000" b="1" dirty="0">
+              <a:rPr lang="en-US" sz="1150" b="1" dirty="0">
                 <a:solidFill>
                   <a:srgbClr val="DC2626"/>
                 </a:solidFill>
@@ -2832,20 +5048,20 @@
               </a:rPr>
               <a:t>LONJAKAN PERMINTAAN DAGING &amp; TELUR</a:t>
             </a:r>
-            <a:endParaRPr lang="en-US" sz="1000" dirty="0"/>
-          </a:p>
-        </p:txBody>
-      </p:sp>
-      <p:sp>
-        <p:nvSpPr>
-          <p:cNvPr id="13" name="Text 9"/>
-          <p:cNvSpPr/>
-          <p:nvPr/>
-        </p:nvSpPr>
-        <p:spPr>
-          <a:xfrm>
-            <a:off x="7178040" y="2103120"/>
-            <a:ext cx="4206240" cy="868680"/>
+            <a:endParaRPr lang="en-US" sz="1150" dirty="0"/>
+          </a:p>
+        </p:txBody>
+      </p:sp>
+      <p:sp>
+        <p:nvSpPr>
+          <p:cNvPr id="13" name="Text 8"/>
+          <p:cNvSpPr/>
+          <p:nvPr/>
+        </p:nvSpPr>
+        <p:spPr>
+          <a:xfrm>
+            <a:off x="7178040" y="2066544"/>
+            <a:ext cx="4206240" cy="960120"/>
           </a:xfrm>
           <a:prstGeom prst="rect">
             <a:avLst/>
@@ -2861,23 +5077,23 @@
               <a:buNone/>
             </a:pPr>
             <a:r>
-              <a:rPr lang="en-US" sz="1050" dirty="0">
-                <a:solidFill>
-                  <a:srgbClr val="334155"/>
-                </a:solidFill>
-                <a:latin typeface="Calibri" pitchFamily="34" charset="0"/>
-                <a:ea typeface="Calibri" pitchFamily="34" charset="-122"/>
-                <a:cs typeface="Calibri" pitchFamily="34" charset="-120"/>
-              </a:rPr>
-              <a:t>Menjelang hari raya Idul Fitri 2026, permintaan protein hewani meningkat berlipat ganda. Daging Sapi mencatat andil inflasi hingga +2.17%, sementara Telur Ayam Ras menyumbang andil +1.35% akibat kebutuhan kue hari raya.</a:t>
-            </a:r>
-            <a:endParaRPr lang="en-US" sz="1050" dirty="0"/>
-          </a:p>
-        </p:txBody>
-      </p:sp>
-      <p:sp>
-        <p:nvSpPr>
-          <p:cNvPr id="14" name="Shape 10"/>
+              <a:rPr lang="en-US" sz="1100" dirty="0">
+                <a:solidFill>
+                  <a:srgbClr val="1E293B"/>
+                </a:solidFill>
+                <a:latin typeface="Calibri" pitchFamily="34" charset="0"/>
+                <a:ea typeface="Calibri" pitchFamily="34" charset="-122"/>
+                <a:cs typeface="Calibri" pitchFamily="34" charset="-120"/>
+              </a:rPr>
+              <a:t>Menjelang hari raya Idul Fitri 2026, permintaan protein hewani melonjak tajam. Daging Sapi mencatat andil inflasi hingga +2.17%, sementara Telur Ayam Ras menyumbang andil +1.35% akibat kebutuhan jamuan dan kue hari raya.</a:t>
+            </a:r>
+            <a:endParaRPr lang="en-US" sz="1100" dirty="0"/>
+          </a:p>
+        </p:txBody>
+      </p:sp>
+      <p:sp>
+        <p:nvSpPr>
+          <p:cNvPr id="14" name="Shape 9"/>
           <p:cNvSpPr/>
           <p:nvPr/>
         </p:nvSpPr>
@@ -2894,7 +5110,7 @@
           <a:solidFill>
             <a:srgbClr val="FFFFFF"/>
           </a:solidFill>
-          <a:ln w="12700">
+          <a:ln w="19050">
             <a:solidFill>
               <a:srgbClr val="86EFAC"/>
             </a:solidFill>
@@ -2911,14 +5127,14 @@
       </p:sp>
       <p:sp>
         <p:nvSpPr>
-          <p:cNvPr id="15" name="Text 11"/>
-          <p:cNvSpPr/>
-          <p:nvPr/>
-        </p:nvSpPr>
-        <p:spPr>
-          <a:xfrm>
-            <a:off x="7178040" y="3429000"/>
-            <a:ext cx="4206240" cy="228600"/>
+          <p:cNvPr id="15" name="Text 10"/>
+          <p:cNvSpPr/>
+          <p:nvPr/>
+        </p:nvSpPr>
+        <p:spPr>
+          <a:xfrm>
+            <a:off x="7178040" y="3392424"/>
+            <a:ext cx="4206240" cy="256032"/>
           </a:xfrm>
           <a:prstGeom prst="rect">
             <a:avLst/>
@@ -2934,7 +5150,7 @@
               <a:buNone/>
             </a:pPr>
             <a:r>
-              <a:rPr lang="en-US" sz="1000" b="1" dirty="0">
+              <a:rPr lang="en-US" sz="1150" b="1" dirty="0">
                 <a:solidFill>
                   <a:srgbClr val="16A34A"/>
                 </a:solidFill>
@@ -2944,20 +5160,20 @@
               </a:rPr>
               <a:t>KOREKSI HARGA PASCA-HARI RAYA (APRIL W2)</a:t>
             </a:r>
-            <a:endParaRPr lang="en-US" sz="1000" dirty="0"/>
-          </a:p>
-        </p:txBody>
-      </p:sp>
-      <p:sp>
-        <p:nvSpPr>
-          <p:cNvPr id="16" name="Text 12"/>
-          <p:cNvSpPr/>
-          <p:nvPr/>
-        </p:nvSpPr>
-        <p:spPr>
-          <a:xfrm>
-            <a:off x="7178040" y="3703320"/>
-            <a:ext cx="4206240" cy="868680"/>
+            <a:endParaRPr lang="en-US" sz="1150" dirty="0"/>
+          </a:p>
+        </p:txBody>
+      </p:sp>
+      <p:sp>
+        <p:nvSpPr>
+          <p:cNvPr id="16" name="Text 11"/>
+          <p:cNvSpPr/>
+          <p:nvPr/>
+        </p:nvSpPr>
+        <p:spPr>
+          <a:xfrm>
+            <a:off x="7178040" y="3666744"/>
+            <a:ext cx="4206240" cy="960120"/>
           </a:xfrm>
           <a:prstGeom prst="rect">
             <a:avLst/>
@@ -2973,23 +5189,23 @@
               <a:buNone/>
             </a:pPr>
             <a:r>
-              <a:rPr lang="en-US" sz="1050" dirty="0">
-                <a:solidFill>
-                  <a:srgbClr val="334155"/>
-                </a:solidFill>
-                <a:latin typeface="Calibri" pitchFamily="34" charset="0"/>
-                <a:ea typeface="Calibri" pitchFamily="34" charset="-122"/>
-                <a:cs typeface="Calibri" pitchFamily="34" charset="-120"/>
-              </a:rPr>
-              <a:t>Setelah puncak lebaran usai, konsumsi masyarakat turun drastis sementara pasokan komoditas hortikultura daratan kembali mengalir, memicu deflasi sesaat -3.29% di minggu ke-2 sebelum kembali naik di akhir bulan.</a:t>
-            </a:r>
-            <a:endParaRPr lang="en-US" sz="1050" dirty="0"/>
-          </a:p>
-        </p:txBody>
-      </p:sp>
-      <p:sp>
-        <p:nvSpPr>
-          <p:cNvPr id="17" name="Shape 13"/>
+              <a:rPr lang="en-US" sz="1100" dirty="0">
+                <a:solidFill>
+                  <a:srgbClr val="1E293B"/>
+                </a:solidFill>
+                <a:latin typeface="Calibri" pitchFamily="34" charset="0"/>
+                <a:ea typeface="Calibri" pitchFamily="34" charset="-122"/>
+                <a:cs typeface="Calibri" pitchFamily="34" charset="-120"/>
+              </a:rPr>
+              <a:t>Setelah puncak lebaran selesai, konsumsi masyarakat melandai normal sementara pasokan sayuran daratan kembali lancar, memicu deflasi sesaat -3.29% di minggu ke-2 sebelum stabil kembali di akhir bulan.</a:t>
+            </a:r>
+            <a:endParaRPr lang="en-US" sz="1100" dirty="0"/>
+          </a:p>
+        </p:txBody>
+      </p:sp>
+      <p:sp>
+        <p:nvSpPr>
+          <p:cNvPr id="17" name="Shape 12"/>
           <p:cNvSpPr/>
           <p:nvPr/>
         </p:nvSpPr>
@@ -3006,9 +5222,9 @@
           <a:solidFill>
             <a:srgbClr val="FFFFFF"/>
           </a:solidFill>
-          <a:ln w="12700">
+          <a:ln w="19050">
             <a:solidFill>
-              <a:srgbClr val="E2E8F0"/>
+              <a:srgbClr val="BAE6FD"/>
             </a:solidFill>
             <a:prstDash val="solid"/>
           </a:ln>
@@ -3023,14 +5239,14 @@
       </p:sp>
       <p:sp>
         <p:nvSpPr>
-          <p:cNvPr id="18" name="Text 14"/>
-          <p:cNvSpPr/>
-          <p:nvPr/>
-        </p:nvSpPr>
-        <p:spPr>
-          <a:xfrm>
-            <a:off x="7178040" y="5029200"/>
-            <a:ext cx="4206240" cy="228600"/>
+          <p:cNvPr id="18" name="Text 13"/>
+          <p:cNvSpPr/>
+          <p:nvPr/>
+        </p:nvSpPr>
+        <p:spPr>
+          <a:xfrm>
+            <a:off x="7178040" y="4992624"/>
+            <a:ext cx="4206240" cy="256032"/>
           </a:xfrm>
           <a:prstGeom prst="rect">
             <a:avLst/>
@@ -3046,7 +5262,7 @@
               <a:buNone/>
             </a:pPr>
             <a:r>
-              <a:rPr lang="en-US" sz="1000" b="1" dirty="0">
+              <a:rPr lang="en-US" sz="1150" b="1" dirty="0">
                 <a:solidFill>
                   <a:srgbClr val="0284C7"/>
                 </a:solidFill>
@@ -3056,20 +5272,20 @@
               </a:rPr>
               <a:t>KOMODITAS KUNCI PERIODE HBKN 2026</a:t>
             </a:r>
-            <a:endParaRPr lang="en-US" sz="1000" dirty="0"/>
-          </a:p>
-        </p:txBody>
-      </p:sp>
-      <p:sp>
-        <p:nvSpPr>
-          <p:cNvPr id="19" name="Text 15"/>
-          <p:cNvSpPr/>
-          <p:nvPr/>
-        </p:nvSpPr>
-        <p:spPr>
-          <a:xfrm>
-            <a:off x="7178040" y="5303520"/>
-            <a:ext cx="4206240" cy="914400"/>
+            <a:endParaRPr lang="en-US" sz="1150" dirty="0"/>
+          </a:p>
+        </p:txBody>
+      </p:sp>
+      <p:sp>
+        <p:nvSpPr>
+          <p:cNvPr id="19" name="Text 14"/>
+          <p:cNvSpPr/>
+          <p:nvPr/>
+        </p:nvSpPr>
+        <p:spPr>
+          <a:xfrm>
+            <a:off x="7178040" y="5266944"/>
+            <a:ext cx="4206240" cy="960120"/>
           </a:xfrm>
           <a:prstGeom prst="rect">
             <a:avLst/>
@@ -3085,7 +5301,7 @@
               <a:buNone/>
             </a:pPr>
             <a:r>
-              <a:rPr lang="en-US" sz="1000" b="1" dirty="0">
+              <a:rPr lang="en-US" sz="1100" b="1" dirty="0">
                 <a:solidFill>
                   <a:srgbClr val="0F172A"/>
                 </a:solidFill>
@@ -3096,9 +5312,9 @@
               <a:t>• Daging Sapi: </a:t>
             </a:r>
             <a:r>
-              <a:rPr lang="en-US" sz="1000" dirty="0">
-                <a:solidFill>
-                  <a:srgbClr val="334155"/>
+              <a:rPr lang="en-US" sz="1100" dirty="0">
+                <a:solidFill>
+                  <a:srgbClr val="1E293B"/>
                 </a:solidFill>
                 <a:latin typeface="Calibri" pitchFamily="34" charset="0"/>
                 <a:ea typeface="Calibri" pitchFamily="34" charset="-122"/>
@@ -3106,14 +5322,14 @@
               </a:rPr>
               <a:t>Andil maksimal +2.17% (April W1), pasokan ternak lokal terbatas.</a:t>
             </a:r>
-            <a:endParaRPr lang="en-US" sz="1000" dirty="0"/>
+            <a:endParaRPr lang="en-US" sz="1100" dirty="0"/>
           </a:p>
           <a:p>
             <a:pPr marL="0" indent="0">
               <a:buNone/>
             </a:pPr>
             <a:r>
-              <a:rPr lang="en-US" sz="1000" b="1" dirty="0">
+              <a:rPr lang="en-US" sz="1100" b="1" dirty="0">
                 <a:solidFill>
                   <a:srgbClr val="0F172A"/>
                 </a:solidFill>
@@ -3124,9 +5340,9 @@
               <a:t>• Telur Ayam Ras: </a:t>
             </a:r>
             <a:r>
-              <a:rPr lang="en-US" sz="1000" dirty="0">
-                <a:solidFill>
-                  <a:srgbClr val="334155"/>
+              <a:rPr lang="en-US" sz="1100" dirty="0">
+                <a:solidFill>
+                  <a:srgbClr val="1E293B"/>
                 </a:solidFill>
                 <a:latin typeface="Calibri" pitchFamily="34" charset="0"/>
                 <a:ea typeface="Calibri" pitchFamily="34" charset="-122"/>
@@ -3134,14 +5350,14 @@
               </a:rPr>
               <a:t>Andil +1.35%, ketergantungan pasokan dari sentra Sidrap/Maros.</a:t>
             </a:r>
-            <a:endParaRPr lang="en-US" sz="1000" dirty="0"/>
+            <a:endParaRPr lang="en-US" sz="1100" dirty="0"/>
           </a:p>
           <a:p>
             <a:pPr marL="0" indent="0">
               <a:buNone/>
             </a:pPr>
             <a:r>
-              <a:rPr lang="en-US" sz="1000" b="1" dirty="0">
+              <a:rPr lang="en-US" sz="1100" b="1" dirty="0">
                 <a:solidFill>
                   <a:srgbClr val="0F172A"/>
                 </a:solidFill>
@@ -3152,17 +5368,17 @@
               <a:t>• Daging Ayam Ras: </a:t>
             </a:r>
             <a:r>
-              <a:rPr lang="en-US" sz="1000" dirty="0">
-                <a:solidFill>
-                  <a:srgbClr val="334155"/>
-                </a:solidFill>
-                <a:latin typeface="Calibri" pitchFamily="34" charset="0"/>
-                <a:ea typeface="Calibri" pitchFamily="34" charset="-122"/>
-                <a:cs typeface="Calibri" pitchFamily="34" charset="-120"/>
-              </a:rPr>
-              <a:t>Andil +0.92%, konsumsi pesta dan jamuan keluarga meningkat tajam.</a:t>
-            </a:r>
-            <a:endParaRPr lang="en-US" sz="1000" dirty="0"/>
+              <a:rPr lang="en-US" sz="1100" dirty="0">
+                <a:solidFill>
+                  <a:srgbClr val="1E293B"/>
+                </a:solidFill>
+                <a:latin typeface="Calibri" pitchFamily="34" charset="0"/>
+                <a:ea typeface="Calibri" pitchFamily="34" charset="-122"/>
+                <a:cs typeface="Calibri" pitchFamily="34" charset="-120"/>
+              </a:rPr>
+              <a:t>Andil +0.92%, konsumsi jamuan keluarga meningkat tajam.</a:t>
+            </a:r>
+            <a:endParaRPr lang="en-US" sz="1100" dirty="0"/>
           </a:p>
         </p:txBody>
       </p:sp>
@@ -3207,20 +5423,20 @@
         </p:nvSpPr>
         <p:spPr>
           <a:xfrm>
-            <a:off x="548640" y="411480"/>
-            <a:ext cx="3108960" cy="292608"/>
+            <a:off x="548640" y="365760"/>
+            <a:ext cx="3291840" cy="329184"/>
           </a:xfrm>
           <a:prstGeom prst="roundRect">
             <a:avLst>
-              <a:gd name="adj" fmla="val 25000"/>
+              <a:gd name="adj" fmla="val 22222"/>
             </a:avLst>
           </a:prstGeom>
           <a:solidFill>
             <a:srgbClr val="E0F2FE"/>
           </a:solidFill>
-          <a:ln w="12700">
+          <a:ln w="15240">
             <a:solidFill>
-              <a:srgbClr val="BAE6FD"/>
+              <a:srgbClr val="0284C7"/>
             </a:solidFill>
             <a:prstDash val="solid"/>
           </a:ln>
@@ -3241,8 +5457,8 @@
         </p:nvSpPr>
         <p:spPr>
           <a:xfrm>
-            <a:off x="548640" y="411480"/>
-            <a:ext cx="3108960" cy="292608"/>
+            <a:off x="548640" y="365760"/>
+            <a:ext cx="3291840" cy="329184"/>
           </a:xfrm>
           <a:prstGeom prst="rect">
             <a:avLst/>
@@ -3258,7 +5474,7 @@
               <a:buNone/>
             </a:pPr>
             <a:r>
-              <a:rPr lang="en-US" sz="850" b="1" dirty="0">
+              <a:rPr lang="en-US" sz="1000" b="1" dirty="0">
                 <a:solidFill>
                   <a:srgbClr val="0369A1"/>
                 </a:solidFill>
@@ -3268,7 +5484,7 @@
               </a:rPr>
               <a:t>ANALISIS PERIODE II • PANEN RAYA</a:t>
             </a:r>
-            <a:endParaRPr lang="en-US" sz="850" dirty="0"/>
+            <a:endParaRPr lang="en-US" sz="1000" dirty="0"/>
           </a:p>
         </p:txBody>
       </p:sp>
@@ -3280,8 +5496,8 @@
         </p:nvSpPr>
         <p:spPr>
           <a:xfrm>
-            <a:off x="548640" y="777240"/>
-            <a:ext cx="9601200" cy="438912"/>
+            <a:off x="548640" y="749808"/>
+            <a:ext cx="9509760" cy="475488"/>
           </a:xfrm>
           <a:prstGeom prst="rect">
             <a:avLst/>
@@ -3297,7 +5513,7 @@
               <a:buNone/>
             </a:pPr>
             <a:r>
-              <a:rPr lang="en-US" sz="2000" b="1" dirty="0">
+              <a:rPr lang="en-US" sz="2200" b="1" dirty="0">
                 <a:solidFill>
                   <a:srgbClr val="0F172A"/>
                 </a:solidFill>
@@ -3307,7 +5523,7 @@
               </a:rPr>
               <a:t>Mei – Juli 2026: Tren Deflasi Konsisten Pasca Panen Raya</a:t>
             </a:r>
-            <a:endParaRPr lang="en-US" sz="2000" dirty="0"/>
+            <a:endParaRPr lang="en-US" sz="2200" dirty="0"/>
           </a:p>
         </p:txBody>
       </p:sp>
@@ -3320,7 +5536,7 @@
         <p:spPr>
           <a:xfrm>
             <a:off x="548640" y="1234440"/>
-            <a:ext cx="9601200" cy="320040"/>
+            <a:ext cx="9509760" cy="347472"/>
           </a:xfrm>
           <a:prstGeom prst="rect">
             <a:avLst/>
@@ -3336,9 +5552,9 @@
               <a:buNone/>
             </a:pPr>
             <a:r>
-              <a:rPr lang="en-US" sz="1200" dirty="0">
-                <a:solidFill>
-                  <a:srgbClr val="64748B"/>
+              <a:rPr lang="en-US" sz="1300" dirty="0">
+                <a:solidFill>
+                  <a:srgbClr val="334155"/>
                 </a:solidFill>
                 <a:latin typeface="Calibri" pitchFamily="34" charset="0"/>
                 <a:ea typeface="Calibri" pitchFamily="34" charset="-122"/>
@@ -3346,13 +5562,13 @@
               </a:rPr>
               <a:t>IPH Bergerak Negatif Hingga Menyentuh -2.02% Didorong Melimpahnya Pasokan Sayuran &amp; Bawang</a:t>
             </a:r>
-            <a:endParaRPr lang="en-US" sz="1200" dirty="0"/>
+            <a:endParaRPr lang="en-US" sz="1300" dirty="0"/>
           </a:p>
         </p:txBody>
       </p:sp>
       <p:pic>
         <p:nvPicPr>
-          <p:cNvPr id="6" name="Image 0" descr="/Volumes/work/_Projects/siph/assets/logos/logo_bps.png"/>
+          <p:cNvPr id="6" name="Image 0" descr="preencoded.png"/>
           <p:cNvPicPr>
             <a:picLocks noChangeAspect="1"/>
           </p:cNvPicPr>
@@ -3366,8 +5582,8 @@
         </p:blipFill>
         <p:spPr>
           <a:xfrm>
-            <a:off x="10241280" y="411480"/>
-            <a:ext cx="1371600" cy="466344"/>
+            <a:off x="10149840" y="384048"/>
+            <a:ext cx="1463040" cy="493776"/>
           </a:xfrm>
           <a:prstGeom prst="rect">
             <a:avLst/>
@@ -3399,9 +5615,9 @@
               <a:buNone/>
             </a:pPr>
             <a:r>
-              <a:rPr lang="en-US" sz="900" dirty="0">
-                <a:solidFill>
-                  <a:srgbClr val="94A3B8"/>
+              <a:rPr lang="en-US" sz="1000" dirty="0">
+                <a:solidFill>
+                  <a:srgbClr val="64748B"/>
                 </a:solidFill>
                 <a:latin typeface="Calibri" pitchFamily="34" charset="0"/>
                 <a:ea typeface="Calibri" pitchFamily="34" charset="-122"/>
@@ -3409,7 +5625,7 @@
               </a:rPr>
               <a:t>Sumber: Badan Pusat Statistik &amp; SIPH Sulawesi Selatan 2026 | Evaluasi TPID Kab. Kepulauan Selayar</a:t>
             </a:r>
-            <a:endParaRPr lang="en-US" sz="900" dirty="0"/>
+            <a:endParaRPr lang="en-US" sz="1000" dirty="0"/>
           </a:p>
         </p:txBody>
       </p:sp>
@@ -3438,9 +5654,9 @@
               <a:buNone/>
             </a:pPr>
             <a:r>
-              <a:rPr lang="en-US" sz="1000" b="1" dirty="0">
-                <a:solidFill>
-                  <a:srgbClr val="94A3B8"/>
+              <a:rPr lang="en-US" sz="1100" b="1" dirty="0">
+                <a:solidFill>
+                  <a:srgbClr val="64748B"/>
                 </a:solidFill>
                 <a:latin typeface="Calibri" pitchFamily="34" charset="0"/>
                 <a:ea typeface="Calibri" pitchFamily="34" charset="-122"/>
@@ -3448,71 +5664,45 @@
               </a:rPr>
               <a:t>4</a:t>
             </a:r>
-            <a:endParaRPr lang="en-US" sz="1000" dirty="0"/>
-          </a:p>
-        </p:txBody>
-      </p:sp>
-      <p:sp>
-        <p:nvSpPr>
-          <p:cNvPr id="9" name="Shape 6"/>
-          <p:cNvSpPr/>
-          <p:nvPr/>
-        </p:nvSpPr>
-        <p:spPr>
-          <a:xfrm>
-            <a:off x="548640" y="1691640"/>
-            <a:ext cx="6217920" cy="4617720"/>
-          </a:xfrm>
-          <a:prstGeom prst="roundRect">
-            <a:avLst>
-              <a:gd name="adj" fmla="val 2376"/>
-            </a:avLst>
-          </a:prstGeom>
-          <a:solidFill>
-            <a:srgbClr val="FFFFFF"/>
-          </a:solidFill>
-          <a:ln w="12700">
-            <a:solidFill>
-              <a:srgbClr val="E2E8F0"/>
-            </a:solidFill>
-            <a:prstDash val="solid"/>
-          </a:ln>
-        </p:spPr>
-        <p:txBody>
-          <a:bodyPr/>
-          <a:lstStyle/>
-          <a:p>
-            <a:endParaRPr lang="en-US"/>
-          </a:p>
-        </p:txBody>
-      </p:sp>
-      <p:pic>
-        <p:nvPicPr>
-          <p:cNvPr id="10" name="Image 1" descr="/Volumes/work/_Projects/siph/assets/charts/chart_slide4.png"/>
-          <p:cNvPicPr>
-            <a:picLocks noChangeAspect="1"/>
-          </p:cNvPicPr>
-          <p:nvPr/>
-        </p:nvPicPr>
-        <p:blipFill>
-          <a:blip r:embed="rId4"/>
-          <a:stretch>
-            <a:fillRect/>
-          </a:stretch>
-        </p:blipFill>
-        <p:spPr>
-          <a:xfrm>
-            <a:off x="685800" y="1783080"/>
-            <a:ext cx="5943600" cy="4434840"/>
-          </a:xfrm>
-          <a:prstGeom prst="rect">
-            <a:avLst/>
-          </a:prstGeom>
-        </p:spPr>
-      </p:pic>
-      <p:sp>
-        <p:nvSpPr>
-          <p:cNvPr id="11" name="Shape 7"/>
+            <a:endParaRPr lang="en-US" sz="1100" dirty="0"/>
+          </a:p>
+        </p:txBody>
+      </p:sp>
+      <p:graphicFrame>
+        <p:nvGraphicFramePr>
+          <p:cNvPr id="9" name="Chart 0"/>
+          <p:cNvGraphicFramePr/>
+          <p:nvPr/>
+        </p:nvGraphicFramePr>
+        <p:xfrm>
+          <a:off x="548640" y="1691640"/>
+          <a:ext cx="6217920" cy="2194560"/>
+        </p:xfrm>
+        <a:graphic>
+          <a:graphicData uri="http://schemas.openxmlformats.org/drawingml/2006/chart">
+            <c:chart xmlns:c="http://schemas.openxmlformats.org/drawingml/2006/chart" xmlns:r="http://schemas.openxmlformats.org/officeDocument/2006/relationships" r:id="rId4"/>
+          </a:graphicData>
+        </a:graphic>
+      </p:graphicFrame>
+      <p:graphicFrame>
+        <p:nvGraphicFramePr>
+          <p:cNvPr id="10" name="Chart 1"/>
+          <p:cNvGraphicFramePr/>
+          <p:nvPr/>
+        </p:nvGraphicFramePr>
+        <p:xfrm>
+          <a:off x="548640" y="4023360"/>
+          <a:ext cx="6217920" cy="2286000"/>
+        </p:xfrm>
+        <a:graphic>
+          <a:graphicData uri="http://schemas.openxmlformats.org/drawingml/2006/chart">
+            <c:chart xmlns:c="http://schemas.openxmlformats.org/drawingml/2006/chart" xmlns:r="http://schemas.openxmlformats.org/officeDocument/2006/relationships" r:id="rId5"/>
+          </a:graphicData>
+        </a:graphic>
+      </p:graphicFrame>
+      <p:sp>
+        <p:nvSpPr>
+          <p:cNvPr id="11" name="Shape 6"/>
           <p:cNvSpPr/>
           <p:nvPr/>
         </p:nvSpPr>
@@ -3529,7 +5719,7 @@
           <a:solidFill>
             <a:srgbClr val="FFFFFF"/>
           </a:solidFill>
-          <a:ln w="12700">
+          <a:ln w="19050">
             <a:solidFill>
               <a:srgbClr val="86EFAC"/>
             </a:solidFill>
@@ -3546,14 +5736,14 @@
       </p:sp>
       <p:sp>
         <p:nvSpPr>
-          <p:cNvPr id="12" name="Text 8"/>
-          <p:cNvSpPr/>
-          <p:nvPr/>
-        </p:nvSpPr>
-        <p:spPr>
-          <a:xfrm>
-            <a:off x="7178040" y="1828800"/>
-            <a:ext cx="4206240" cy="228600"/>
+          <p:cNvPr id="12" name="Text 7"/>
+          <p:cNvSpPr/>
+          <p:nvPr/>
+        </p:nvSpPr>
+        <p:spPr>
+          <a:xfrm>
+            <a:off x="7178040" y="1792224"/>
+            <a:ext cx="4206240" cy="256032"/>
           </a:xfrm>
           <a:prstGeom prst="rect">
             <a:avLst/>
@@ -3569,7 +5759,7 @@
               <a:buNone/>
             </a:pPr>
             <a:r>
-              <a:rPr lang="en-US" sz="1000" b="1" dirty="0">
+              <a:rPr lang="en-US" sz="1150" b="1" dirty="0">
                 <a:solidFill>
                   <a:srgbClr val="16A34A"/>
                 </a:solidFill>
@@ -3579,20 +5769,20 @@
               </a:rPr>
               <a:t>PASOKAN PANEN HORTIKULTURA MELIMPAH</a:t>
             </a:r>
-            <a:endParaRPr lang="en-US" sz="1000" dirty="0"/>
-          </a:p>
-        </p:txBody>
-      </p:sp>
-      <p:sp>
-        <p:nvSpPr>
-          <p:cNvPr id="13" name="Text 9"/>
-          <p:cNvSpPr/>
-          <p:nvPr/>
-        </p:nvSpPr>
-        <p:spPr>
-          <a:xfrm>
-            <a:off x="7178040" y="2103120"/>
-            <a:ext cx="4206240" cy="868680"/>
+            <a:endParaRPr lang="en-US" sz="1150" dirty="0"/>
+          </a:p>
+        </p:txBody>
+      </p:sp>
+      <p:sp>
+        <p:nvSpPr>
+          <p:cNvPr id="13" name="Text 8"/>
+          <p:cNvSpPr/>
+          <p:nvPr/>
+        </p:nvSpPr>
+        <p:spPr>
+          <a:xfrm>
+            <a:off x="7178040" y="2066544"/>
+            <a:ext cx="4206240" cy="960120"/>
           </a:xfrm>
           <a:prstGeom prst="rect">
             <a:avLst/>
@@ -3608,23 +5798,23 @@
               <a:buNone/>
             </a:pPr>
             <a:r>
-              <a:rPr lang="en-US" sz="1050" dirty="0">
-                <a:solidFill>
-                  <a:srgbClr val="334155"/>
-                </a:solidFill>
-                <a:latin typeface="Calibri" pitchFamily="34" charset="0"/>
-                <a:ea typeface="Calibri" pitchFamily="34" charset="-122"/>
-                <a:cs typeface="Calibri" pitchFamily="34" charset="-120"/>
-              </a:rPr>
-              <a:t>Sepanjang Juli 2026, produksi cabai dan bawang merah di sentra daratan Sulsel (Enrekang, Jeneponto, Bantaeng) melimpah. Pasokan masuk lancar ke Selayar melalui pelabuhan feri Bira - Pamatata dengan volume besar.</a:t>
-            </a:r>
-            <a:endParaRPr lang="en-US" sz="1050" dirty="0"/>
-          </a:p>
-        </p:txBody>
-      </p:sp>
-      <p:sp>
-        <p:nvSpPr>
-          <p:cNvPr id="14" name="Shape 10"/>
+              <a:rPr lang="en-US" sz="1100" dirty="0">
+                <a:solidFill>
+                  <a:srgbClr val="1E293B"/>
+                </a:solidFill>
+                <a:latin typeface="Calibri" pitchFamily="34" charset="0"/>
+                <a:ea typeface="Calibri" pitchFamily="34" charset="-122"/>
+                <a:cs typeface="Calibri" pitchFamily="34" charset="-120"/>
+              </a:rPr>
+              <a:t>Sepanjang Juli 2026, produksi cabai dan bawang merah di sentra daratan Sulsel (Enrekang, Jeneponto, Bantaeng) melimpah. Pasokan masuk lancar ke Selayar melalui pelabuhan feri Bira - Pamatata dengan volume tinggi.</a:t>
+            </a:r>
+            <a:endParaRPr lang="en-US" sz="1100" dirty="0"/>
+          </a:p>
+        </p:txBody>
+      </p:sp>
+      <p:sp>
+        <p:nvSpPr>
+          <p:cNvPr id="14" name="Shape 9"/>
           <p:cNvSpPr/>
           <p:nvPr/>
         </p:nvSpPr>
@@ -3641,9 +5831,9 @@
           <a:solidFill>
             <a:srgbClr val="FFFFFF"/>
           </a:solidFill>
-          <a:ln w="12700">
+          <a:ln w="19050">
             <a:solidFill>
-              <a:srgbClr val="E2E8F0"/>
+              <a:srgbClr val="BAE6FD"/>
             </a:solidFill>
             <a:prstDash val="solid"/>
           </a:ln>
@@ -3658,14 +5848,14 @@
       </p:sp>
       <p:sp>
         <p:nvSpPr>
-          <p:cNvPr id="15" name="Text 11"/>
-          <p:cNvSpPr/>
-          <p:nvPr/>
-        </p:nvSpPr>
-        <p:spPr>
-          <a:xfrm>
-            <a:off x="7178040" y="3429000"/>
-            <a:ext cx="4206240" cy="228600"/>
+          <p:cNvPr id="15" name="Text 10"/>
+          <p:cNvSpPr/>
+          <p:nvPr/>
+        </p:nvSpPr>
+        <p:spPr>
+          <a:xfrm>
+            <a:off x="7178040" y="3392424"/>
+            <a:ext cx="4206240" cy="256032"/>
           </a:xfrm>
           <a:prstGeom prst="rect">
             <a:avLst/>
@@ -3681,7 +5871,7 @@
               <a:buNone/>
             </a:pPr>
             <a:r>
-              <a:rPr lang="en-US" sz="1000" b="1" dirty="0">
+              <a:rPr lang="en-US" sz="1150" b="1" dirty="0">
                 <a:solidFill>
                   <a:srgbClr val="0284C7"/>
                 </a:solidFill>
@@ -3691,20 +5881,20 @@
               </a:rPr>
               <a:t>5 MINGGU DEFLASI BERUNTUN DI JULI 2026</a:t>
             </a:r>
-            <a:endParaRPr lang="en-US" sz="1000" dirty="0"/>
-          </a:p>
-        </p:txBody>
-      </p:sp>
-      <p:sp>
-        <p:nvSpPr>
-          <p:cNvPr id="16" name="Text 12"/>
-          <p:cNvSpPr/>
-          <p:nvPr/>
-        </p:nvSpPr>
-        <p:spPr>
-          <a:xfrm>
-            <a:off x="7178040" y="3703320"/>
-            <a:ext cx="4206240" cy="868680"/>
+            <a:endParaRPr lang="en-US" sz="1150" dirty="0"/>
+          </a:p>
+        </p:txBody>
+      </p:sp>
+      <p:sp>
+        <p:nvSpPr>
+          <p:cNvPr id="16" name="Text 11"/>
+          <p:cNvSpPr/>
+          <p:nvPr/>
+        </p:nvSpPr>
+        <p:spPr>
+          <a:xfrm>
+            <a:off x="7178040" y="3666744"/>
+            <a:ext cx="4206240" cy="960120"/>
           </a:xfrm>
           <a:prstGeom prst="rect">
             <a:avLst/>
@@ -3720,23 +5910,23 @@
               <a:buNone/>
             </a:pPr>
             <a:r>
-              <a:rPr lang="en-US" sz="1050" dirty="0">
-                <a:solidFill>
-                  <a:srgbClr val="334155"/>
-                </a:solidFill>
-                <a:latin typeface="Calibri" pitchFamily="34" charset="0"/>
-                <a:ea typeface="Calibri" pitchFamily="34" charset="-122"/>
-                <a:cs typeface="Calibri" pitchFamily="34" charset="-120"/>
-              </a:rPr>
-              <a:t>Bulan Juli mencatat deflasi mingguan berurutan: M1 (-1.31%), M2 (-1.62%), M3 (-1.82%), M4 (-1.97%), dan M5 (-2.02%). Kondisi ini memberikan bantalan daya beli yang kuat bagi rumah tangga di Kepulauan Selayar.</a:t>
-            </a:r>
-            <a:endParaRPr lang="en-US" sz="1050" dirty="0"/>
-          </a:p>
-        </p:txBody>
-      </p:sp>
-      <p:sp>
-        <p:nvSpPr>
-          <p:cNvPr id="17" name="Shape 13"/>
+              <a:rPr lang="en-US" sz="1100" dirty="0">
+                <a:solidFill>
+                  <a:srgbClr val="1E293B"/>
+                </a:solidFill>
+                <a:latin typeface="Calibri" pitchFamily="34" charset="0"/>
+                <a:ea typeface="Calibri" pitchFamily="34" charset="-122"/>
+                <a:cs typeface="Calibri" pitchFamily="34" charset="-120"/>
+              </a:rPr>
+              <a:t>Bulan Juli mencatat deflasi mingguan berurutan: M1 (-1.31%), M2 (-1.62%), M3 (-1.82%), M4 (-1.97%), dan M5 (-2.02%). Kondisi ini memberikan bantalan daya beli yang sangat sehat bagi masyarakat Kepulauan Selayar.</a:t>
+            </a:r>
+            <a:endParaRPr lang="en-US" sz="1100" dirty="0"/>
+          </a:p>
+        </p:txBody>
+      </p:sp>
+      <p:sp>
+        <p:nvSpPr>
+          <p:cNvPr id="17" name="Shape 12"/>
           <p:cNvSpPr/>
           <p:nvPr/>
         </p:nvSpPr>
@@ -3753,7 +5943,7 @@
           <a:solidFill>
             <a:srgbClr val="FFFFFF"/>
           </a:solidFill>
-          <a:ln w="12700">
+          <a:ln w="19050">
             <a:solidFill>
               <a:srgbClr val="86EFAC"/>
             </a:solidFill>
@@ -3770,14 +5960,14 @@
       </p:sp>
       <p:sp>
         <p:nvSpPr>
-          <p:cNvPr id="18" name="Text 14"/>
-          <p:cNvSpPr/>
-          <p:nvPr/>
-        </p:nvSpPr>
-        <p:spPr>
-          <a:xfrm>
-            <a:off x="7178040" y="5029200"/>
-            <a:ext cx="4206240" cy="228600"/>
+          <p:cNvPr id="18" name="Text 13"/>
+          <p:cNvSpPr/>
+          <p:nvPr/>
+        </p:nvSpPr>
+        <p:spPr>
+          <a:xfrm>
+            <a:off x="7178040" y="4992624"/>
+            <a:ext cx="4206240" cy="256032"/>
           </a:xfrm>
           <a:prstGeom prst="rect">
             <a:avLst/>
@@ -3793,7 +5983,7 @@
               <a:buNone/>
             </a:pPr>
             <a:r>
-              <a:rPr lang="en-US" sz="1000" b="1" dirty="0">
+              <a:rPr lang="en-US" sz="1150" b="1" dirty="0">
                 <a:solidFill>
                   <a:srgbClr val="16A34A"/>
                 </a:solidFill>
@@ -3803,20 +5993,20 @@
               </a:rPr>
               <a:t>KOMODITAS PENYUMBANG DEFLASI UTAMA</a:t>
             </a:r>
-            <a:endParaRPr lang="en-US" sz="1000" dirty="0"/>
-          </a:p>
-        </p:txBody>
-      </p:sp>
-      <p:sp>
-        <p:nvSpPr>
-          <p:cNvPr id="19" name="Text 15"/>
-          <p:cNvSpPr/>
-          <p:nvPr/>
-        </p:nvSpPr>
-        <p:spPr>
-          <a:xfrm>
-            <a:off x="7178040" y="5303520"/>
-            <a:ext cx="4206240" cy="914400"/>
+            <a:endParaRPr lang="en-US" sz="1150" dirty="0"/>
+          </a:p>
+        </p:txBody>
+      </p:sp>
+      <p:sp>
+        <p:nvSpPr>
+          <p:cNvPr id="19" name="Text 14"/>
+          <p:cNvSpPr/>
+          <p:nvPr/>
+        </p:nvSpPr>
+        <p:spPr>
+          <a:xfrm>
+            <a:off x="7178040" y="5266944"/>
+            <a:ext cx="4206240" cy="960120"/>
           </a:xfrm>
           <a:prstGeom prst="rect">
             <a:avLst/>
@@ -3832,7 +6022,7 @@
               <a:buNone/>
             </a:pPr>
             <a:r>
-              <a:rPr lang="en-US" sz="1000" b="1" dirty="0">
+              <a:rPr lang="en-US" sz="1100" b="1" dirty="0">
                 <a:solidFill>
                   <a:srgbClr val="0F172A"/>
                 </a:solidFill>
@@ -3843,24 +6033,24 @@
               <a:t>• Cabai Rawit: </a:t>
             </a:r>
             <a:r>
-              <a:rPr lang="en-US" sz="1000" dirty="0">
-                <a:solidFill>
-                  <a:srgbClr val="334155"/>
-                </a:solidFill>
-                <a:latin typeface="Calibri" pitchFamily="34" charset="0"/>
-                <a:ea typeface="Calibri" pitchFamily="34" charset="-122"/>
-                <a:cs typeface="Calibri" pitchFamily="34" charset="-120"/>
-              </a:rPr>
-              <a:t>Andil deflasi terdalam (-0.64%), harga eceran anjlok di pasar induk.</a:t>
-            </a:r>
-            <a:endParaRPr lang="en-US" sz="1000" dirty="0"/>
+              <a:rPr lang="en-US" sz="1100" dirty="0">
+                <a:solidFill>
+                  <a:srgbClr val="1E293B"/>
+                </a:solidFill>
+                <a:latin typeface="Calibri" pitchFamily="34" charset="0"/>
+                <a:ea typeface="Calibri" pitchFamily="34" charset="-122"/>
+                <a:cs typeface="Calibri" pitchFamily="34" charset="-120"/>
+              </a:rPr>
+              <a:t>Andil deflasi terdalam (-0.64%), harga eceran turun stabil di pasar.</a:t>
+            </a:r>
+            <a:endParaRPr lang="en-US" sz="1100" dirty="0"/>
           </a:p>
           <a:p>
             <a:pPr marL="0" indent="0">
               <a:buNone/>
             </a:pPr>
             <a:r>
-              <a:rPr lang="en-US" sz="1000" b="1" dirty="0">
+              <a:rPr lang="en-US" sz="1100" b="1" dirty="0">
                 <a:solidFill>
                   <a:srgbClr val="0F172A"/>
                 </a:solidFill>
@@ -3871,9 +6061,9 @@
               <a:t>• Daging Ayam Ras: </a:t>
             </a:r>
             <a:r>
-              <a:rPr lang="en-US" sz="1000" dirty="0">
-                <a:solidFill>
-                  <a:srgbClr val="334155"/>
+              <a:rPr lang="en-US" sz="1100" dirty="0">
+                <a:solidFill>
+                  <a:srgbClr val="1E293B"/>
                 </a:solidFill>
                 <a:latin typeface="Calibri" pitchFamily="34" charset="0"/>
                 <a:ea typeface="Calibri" pitchFamily="34" charset="-122"/>
@@ -3881,14 +6071,14 @@
               </a:rPr>
               <a:t>Andil deflasi (-0.61%), pasokan karkas melimpah pasca HBKN.</a:t>
             </a:r>
-            <a:endParaRPr lang="en-US" sz="1000" dirty="0"/>
+            <a:endParaRPr lang="en-US" sz="1100" dirty="0"/>
           </a:p>
           <a:p>
             <a:pPr marL="0" indent="0">
               <a:buNone/>
             </a:pPr>
             <a:r>
-              <a:rPr lang="en-US" sz="1000" b="1" dirty="0">
+              <a:rPr lang="en-US" sz="1100" b="1" dirty="0">
                 <a:solidFill>
                   <a:srgbClr val="0F172A"/>
                 </a:solidFill>
@@ -3899,17 +6089,17 @@
               <a:t>• Bawang Merah: </a:t>
             </a:r>
             <a:r>
-              <a:rPr lang="en-US" sz="1000" dirty="0">
-                <a:solidFill>
-                  <a:srgbClr val="334155"/>
-                </a:solidFill>
-                <a:latin typeface="Calibri" pitchFamily="34" charset="0"/>
-                <a:ea typeface="Calibri" pitchFamily="34" charset="-122"/>
-                <a:cs typeface="Calibri" pitchFamily="34" charset="-120"/>
-              </a:rPr>
-              <a:t>Andil deflasi (-0.42%), suplai daratan Sulawesi sangat stabil.</a:t>
-            </a:r>
-            <a:endParaRPr lang="en-US" sz="1000" dirty="0"/>
+              <a:rPr lang="en-US" sz="1100" dirty="0">
+                <a:solidFill>
+                  <a:srgbClr val="1E293B"/>
+                </a:solidFill>
+                <a:latin typeface="Calibri" pitchFamily="34" charset="0"/>
+                <a:ea typeface="Calibri" pitchFamily="34" charset="-122"/>
+                <a:cs typeface="Calibri" pitchFamily="34" charset="-120"/>
+              </a:rPr>
+              <a:t>Andil deflasi (-0.42%), suplai daratan Sulawesi sangat lancar.</a:t>
+            </a:r>
+            <a:endParaRPr lang="en-US" sz="1100" dirty="0"/>
           </a:p>
         </p:txBody>
       </p:sp>
@@ -3954,20 +6144,20 @@
         </p:nvSpPr>
         <p:spPr>
           <a:xfrm>
-            <a:off x="548640" y="411480"/>
-            <a:ext cx="3108960" cy="292608"/>
+            <a:off x="548640" y="365760"/>
+            <a:ext cx="3291840" cy="329184"/>
           </a:xfrm>
           <a:prstGeom prst="roundRect">
             <a:avLst>
-              <a:gd name="adj" fmla="val 25000"/>
+              <a:gd name="adj" fmla="val 22222"/>
             </a:avLst>
           </a:prstGeom>
           <a:solidFill>
             <a:srgbClr val="E0F2FE"/>
           </a:solidFill>
-          <a:ln w="12700">
+          <a:ln w="15240">
             <a:solidFill>
-              <a:srgbClr val="BAE6FD"/>
+              <a:srgbClr val="0284C7"/>
             </a:solidFill>
             <a:prstDash val="solid"/>
           </a:ln>
@@ -3988,8 +6178,8 @@
         </p:nvSpPr>
         <p:spPr>
           <a:xfrm>
-            <a:off x="548640" y="411480"/>
-            <a:ext cx="3108960" cy="292608"/>
+            <a:off x="548640" y="365760"/>
+            <a:ext cx="3291840" cy="329184"/>
           </a:xfrm>
           <a:prstGeom prst="rect">
             <a:avLst/>
@@ -4005,7 +6195,7 @@
               <a:buNone/>
             </a:pPr>
             <a:r>
-              <a:rPr lang="en-US" sz="850" b="1" dirty="0">
+              <a:rPr lang="en-US" sz="1000" b="1" dirty="0">
                 <a:solidFill>
                   <a:srgbClr val="0369A1"/>
                 </a:solidFill>
@@ -4015,7 +6205,7 @@
               </a:rPr>
               <a:t>ANALISIS PERIODE III • MUSIM PERALIHAN</a:t>
             </a:r>
-            <a:endParaRPr lang="en-US" sz="850" dirty="0"/>
+            <a:endParaRPr lang="en-US" sz="1000" dirty="0"/>
           </a:p>
         </p:txBody>
       </p:sp>
@@ -4027,8 +6217,8 @@
         </p:nvSpPr>
         <p:spPr>
           <a:xfrm>
-            <a:off x="548640" y="777240"/>
-            <a:ext cx="9601200" cy="438912"/>
+            <a:off x="548640" y="749808"/>
+            <a:ext cx="9509760" cy="475488"/>
           </a:xfrm>
           <a:prstGeom prst="rect">
             <a:avLst/>
@@ -4044,7 +6234,7 @@
               <a:buNone/>
             </a:pPr>
             <a:r>
-              <a:rPr lang="en-US" sz="2000" b="1" dirty="0">
+              <a:rPr lang="en-US" sz="2200" b="1" dirty="0">
                 <a:solidFill>
                   <a:srgbClr val="0F172A"/>
                 </a:solidFill>
@@ -4054,7 +6244,7 @@
               </a:rPr>
               <a:t>September – Oktober 2026: Rebound Inflasi Komoditas Pangan</a:t>
             </a:r>
-            <a:endParaRPr lang="en-US" sz="2000" dirty="0"/>
+            <a:endParaRPr lang="en-US" sz="2200" dirty="0"/>
           </a:p>
         </p:txBody>
       </p:sp>
@@ -4067,7 +6257,7 @@
         <p:spPr>
           <a:xfrm>
             <a:off x="548640" y="1234440"/>
-            <a:ext cx="9601200" cy="320040"/>
+            <a:ext cx="9509760" cy="347472"/>
           </a:xfrm>
           <a:prstGeom prst="rect">
             <a:avLst/>
@@ -4083,9 +6273,9 @@
               <a:buNone/>
             </a:pPr>
             <a:r>
-              <a:rPr lang="en-US" sz="1200" dirty="0">
-                <a:solidFill>
-                  <a:srgbClr val="64748B"/>
+              <a:rPr lang="en-US" sz="1300" dirty="0">
+                <a:solidFill>
+                  <a:srgbClr val="334155"/>
                 </a:solidFill>
                 <a:latin typeface="Calibri" pitchFamily="34" charset="0"/>
                 <a:ea typeface="Calibri" pitchFamily="34" charset="-122"/>
@@ -4093,13 +6283,13 @@
               </a:rPr>
               <a:t>IPH Kembali Merangkak Positif Dipicu Lonjakan Cabai Rawit &amp; Kenaikan Bertahap Harga Beras</a:t>
             </a:r>
-            <a:endParaRPr lang="en-US" sz="1200" dirty="0"/>
+            <a:endParaRPr lang="en-US" sz="1300" dirty="0"/>
           </a:p>
         </p:txBody>
       </p:sp>
       <p:pic>
         <p:nvPicPr>
-          <p:cNvPr id="6" name="Image 0" descr="/Volumes/work/_Projects/siph/assets/logos/logo_bps.png"/>
+          <p:cNvPr id="6" name="Image 0" descr="preencoded.png"/>
           <p:cNvPicPr>
             <a:picLocks noChangeAspect="1"/>
           </p:cNvPicPr>
@@ -4113,8 +6303,8 @@
         </p:blipFill>
         <p:spPr>
           <a:xfrm>
-            <a:off x="10241280" y="411480"/>
-            <a:ext cx="1371600" cy="466344"/>
+            <a:off x="10149840" y="384048"/>
+            <a:ext cx="1463040" cy="493776"/>
           </a:xfrm>
           <a:prstGeom prst="rect">
             <a:avLst/>
@@ -4146,9 +6336,9 @@
               <a:buNone/>
             </a:pPr>
             <a:r>
-              <a:rPr lang="en-US" sz="900" dirty="0">
-                <a:solidFill>
-                  <a:srgbClr val="94A3B8"/>
+              <a:rPr lang="en-US" sz="1000" dirty="0">
+                <a:solidFill>
+                  <a:srgbClr val="64748B"/>
                 </a:solidFill>
                 <a:latin typeface="Calibri" pitchFamily="34" charset="0"/>
                 <a:ea typeface="Calibri" pitchFamily="34" charset="-122"/>
@@ -4156,7 +6346,7 @@
               </a:rPr>
               <a:t>Sumber: Badan Pusat Statistik &amp; SIPH Sulawesi Selatan 2026 | Evaluasi TPID Kab. Kepulauan Selayar</a:t>
             </a:r>
-            <a:endParaRPr lang="en-US" sz="900" dirty="0"/>
+            <a:endParaRPr lang="en-US" sz="1000" dirty="0"/>
           </a:p>
         </p:txBody>
       </p:sp>
@@ -4185,9 +6375,9 @@
               <a:buNone/>
             </a:pPr>
             <a:r>
-              <a:rPr lang="en-US" sz="1000" b="1" dirty="0">
-                <a:solidFill>
-                  <a:srgbClr val="94A3B8"/>
+              <a:rPr lang="en-US" sz="1100" b="1" dirty="0">
+                <a:solidFill>
+                  <a:srgbClr val="64748B"/>
                 </a:solidFill>
                 <a:latin typeface="Calibri" pitchFamily="34" charset="0"/>
                 <a:ea typeface="Calibri" pitchFamily="34" charset="-122"/>
@@ -4195,71 +6385,45 @@
               </a:rPr>
               <a:t>5</a:t>
             </a:r>
-            <a:endParaRPr lang="en-US" sz="1000" dirty="0"/>
-          </a:p>
-        </p:txBody>
-      </p:sp>
-      <p:sp>
-        <p:nvSpPr>
-          <p:cNvPr id="9" name="Shape 6"/>
-          <p:cNvSpPr/>
-          <p:nvPr/>
-        </p:nvSpPr>
-        <p:spPr>
-          <a:xfrm>
-            <a:off x="548640" y="1691640"/>
-            <a:ext cx="6217920" cy="4617720"/>
-          </a:xfrm>
-          <a:prstGeom prst="roundRect">
-            <a:avLst>
-              <a:gd name="adj" fmla="val 2376"/>
-            </a:avLst>
-          </a:prstGeom>
-          <a:solidFill>
-            <a:srgbClr val="FFFFFF"/>
-          </a:solidFill>
-          <a:ln w="12700">
-            <a:solidFill>
-              <a:srgbClr val="E2E8F0"/>
-            </a:solidFill>
-            <a:prstDash val="solid"/>
-          </a:ln>
-        </p:spPr>
-        <p:txBody>
-          <a:bodyPr/>
-          <a:lstStyle/>
-          <a:p>
-            <a:endParaRPr lang="en-US"/>
-          </a:p>
-        </p:txBody>
-      </p:sp>
-      <p:pic>
-        <p:nvPicPr>
-          <p:cNvPr id="10" name="Image 1" descr="/Volumes/work/_Projects/siph/assets/charts/chart_slide5.png"/>
-          <p:cNvPicPr>
-            <a:picLocks noChangeAspect="1"/>
-          </p:cNvPicPr>
-          <p:nvPr/>
-        </p:nvPicPr>
-        <p:blipFill>
-          <a:blip r:embed="rId4"/>
-          <a:stretch>
-            <a:fillRect/>
-          </a:stretch>
-        </p:blipFill>
-        <p:spPr>
-          <a:xfrm>
-            <a:off x="685800" y="1783080"/>
-            <a:ext cx="5943600" cy="4434840"/>
-          </a:xfrm>
-          <a:prstGeom prst="rect">
-            <a:avLst/>
-          </a:prstGeom>
-        </p:spPr>
-      </p:pic>
-      <p:sp>
-        <p:nvSpPr>
-          <p:cNvPr id="11" name="Shape 7"/>
+            <a:endParaRPr lang="en-US" sz="1100" dirty="0"/>
+          </a:p>
+        </p:txBody>
+      </p:sp>
+      <p:graphicFrame>
+        <p:nvGraphicFramePr>
+          <p:cNvPr id="9" name="Chart 0"/>
+          <p:cNvGraphicFramePr/>
+          <p:nvPr/>
+        </p:nvGraphicFramePr>
+        <p:xfrm>
+          <a:off x="548640" y="1691640"/>
+          <a:ext cx="6217920" cy="2194560"/>
+        </p:xfrm>
+        <a:graphic>
+          <a:graphicData uri="http://schemas.openxmlformats.org/drawingml/2006/chart">
+            <c:chart xmlns:c="http://schemas.openxmlformats.org/drawingml/2006/chart" xmlns:r="http://schemas.openxmlformats.org/officeDocument/2006/relationships" r:id="rId4"/>
+          </a:graphicData>
+        </a:graphic>
+      </p:graphicFrame>
+      <p:graphicFrame>
+        <p:nvGraphicFramePr>
+          <p:cNvPr id="10" name="Chart 1"/>
+          <p:cNvGraphicFramePr/>
+          <p:nvPr/>
+        </p:nvGraphicFramePr>
+        <p:xfrm>
+          <a:off x="548640" y="4023360"/>
+          <a:ext cx="6217920" cy="2286000"/>
+        </p:xfrm>
+        <a:graphic>
+          <a:graphicData uri="http://schemas.openxmlformats.org/drawingml/2006/chart">
+            <c:chart xmlns:c="http://schemas.openxmlformats.org/drawingml/2006/chart" xmlns:r="http://schemas.openxmlformats.org/officeDocument/2006/relationships" r:id="rId5"/>
+          </a:graphicData>
+        </a:graphic>
+      </p:graphicFrame>
+      <p:sp>
+        <p:nvSpPr>
+          <p:cNvPr id="11" name="Shape 6"/>
           <p:cNvSpPr/>
           <p:nvPr/>
         </p:nvSpPr>
@@ -4276,7 +6440,7 @@
           <a:solidFill>
             <a:srgbClr val="FFFFFF"/>
           </a:solidFill>
-          <a:ln w="12700">
+          <a:ln w="19050">
             <a:solidFill>
               <a:srgbClr val="FDE68A"/>
             </a:solidFill>
@@ -4293,14 +6457,14 @@
       </p:sp>
       <p:sp>
         <p:nvSpPr>
-          <p:cNvPr id="12" name="Text 8"/>
-          <p:cNvSpPr/>
-          <p:nvPr/>
-        </p:nvSpPr>
-        <p:spPr>
-          <a:xfrm>
-            <a:off x="7178040" y="1828800"/>
-            <a:ext cx="4206240" cy="228600"/>
+          <p:cNvPr id="12" name="Text 7"/>
+          <p:cNvSpPr/>
+          <p:nvPr/>
+        </p:nvSpPr>
+        <p:spPr>
+          <a:xfrm>
+            <a:off x="7178040" y="1792224"/>
+            <a:ext cx="4206240" cy="256032"/>
           </a:xfrm>
           <a:prstGeom prst="rect">
             <a:avLst/>
@@ -4316,7 +6480,7 @@
               <a:buNone/>
             </a:pPr>
             <a:r>
-              <a:rPr lang="en-US" sz="1000" b="1" dirty="0">
+              <a:rPr lang="en-US" sz="1150" b="1" dirty="0">
                 <a:solidFill>
                   <a:srgbClr val="D97706"/>
                 </a:solidFill>
@@ -4326,20 +6490,20 @@
               </a:rPr>
               <a:t>PERALIHAN MUSIM &amp; PENURUNAN PANEN HORTIKULTURA</a:t>
             </a:r>
-            <a:endParaRPr lang="en-US" sz="1000" dirty="0"/>
-          </a:p>
-        </p:txBody>
-      </p:sp>
-      <p:sp>
-        <p:nvSpPr>
-          <p:cNvPr id="13" name="Text 9"/>
-          <p:cNvSpPr/>
-          <p:nvPr/>
-        </p:nvSpPr>
-        <p:spPr>
-          <a:xfrm>
-            <a:off x="7178040" y="2103120"/>
-            <a:ext cx="4206240" cy="868680"/>
+            <a:endParaRPr lang="en-US" sz="1150" dirty="0"/>
+          </a:p>
+        </p:txBody>
+      </p:sp>
+      <p:sp>
+        <p:nvSpPr>
+          <p:cNvPr id="13" name="Text 8"/>
+          <p:cNvSpPr/>
+          <p:nvPr/>
+        </p:nvSpPr>
+        <p:spPr>
+          <a:xfrm>
+            <a:off x="7178040" y="2066544"/>
+            <a:ext cx="4206240" cy="960120"/>
           </a:xfrm>
           <a:prstGeom prst="rect">
             <a:avLst/>
@@ -4355,23 +6519,23 @@
               <a:buNone/>
             </a:pPr>
             <a:r>
-              <a:rPr lang="en-US" sz="1050" dirty="0">
-                <a:solidFill>
-                  <a:srgbClr val="334155"/>
-                </a:solidFill>
-                <a:latin typeface="Calibri" pitchFamily="34" charset="0"/>
-                <a:ea typeface="Calibri" pitchFamily="34" charset="-122"/>
-                <a:cs typeface="Calibri" pitchFamily="34" charset="-120"/>
-              </a:rPr>
-              <a:t>Memasuki akhir kuartal III 2026, produksi cabai lokal di Selayar mulai menurun seiring perubahan cuaca. Berkurangnya pasokan menyebabkan harga cabai rawit dan cabai merah melonjak cepat di pasar Bonea dan pasar tradisional.</a:t>
-            </a:r>
-            <a:endParaRPr lang="en-US" sz="1050" dirty="0"/>
-          </a:p>
-        </p:txBody>
-      </p:sp>
-      <p:sp>
-        <p:nvSpPr>
-          <p:cNvPr id="14" name="Shape 10"/>
+              <a:rPr lang="en-US" sz="1100" dirty="0">
+                <a:solidFill>
+                  <a:srgbClr val="1E293B"/>
+                </a:solidFill>
+                <a:latin typeface="Calibri" pitchFamily="34" charset="0"/>
+                <a:ea typeface="Calibri" pitchFamily="34" charset="-122"/>
+                <a:cs typeface="Calibri" pitchFamily="34" charset="-120"/>
+              </a:rPr>
+              <a:t>Memasuki akhir kuartal III 2026, panen cabai lokal di pulau Selayar mulai berkurang. Keterbatasan suplai menyebabkan harga cabai rawit dan cabai merah kembali merangkak naik di pasar tradisional.</a:t>
+            </a:r>
+            <a:endParaRPr lang="en-US" sz="1100" dirty="0"/>
+          </a:p>
+        </p:txBody>
+      </p:sp>
+      <p:sp>
+        <p:nvSpPr>
+          <p:cNvPr id="14" name="Shape 9"/>
           <p:cNvSpPr/>
           <p:nvPr/>
         </p:nvSpPr>
@@ -4388,7 +6552,7 @@
           <a:solidFill>
             <a:srgbClr val="FFFFFF"/>
           </a:solidFill>
-          <a:ln w="12700">
+          <a:ln w="19050">
             <a:solidFill>
               <a:srgbClr val="FCA5A5"/>
             </a:solidFill>
@@ -4405,14 +6569,14 @@
       </p:sp>
       <p:sp>
         <p:nvSpPr>
-          <p:cNvPr id="15" name="Text 11"/>
-          <p:cNvSpPr/>
-          <p:nvPr/>
-        </p:nvSpPr>
-        <p:spPr>
-          <a:xfrm>
-            <a:off x="7178040" y="3429000"/>
-            <a:ext cx="4206240" cy="228600"/>
+          <p:cNvPr id="15" name="Text 10"/>
+          <p:cNvSpPr/>
+          <p:nvPr/>
+        </p:nvSpPr>
+        <p:spPr>
+          <a:xfrm>
+            <a:off x="7178040" y="3392424"/>
+            <a:ext cx="4206240" cy="256032"/>
           </a:xfrm>
           <a:prstGeom prst="rect">
             <a:avLst/>
@@ -4428,7 +6592,7 @@
               <a:buNone/>
             </a:pPr>
             <a:r>
-              <a:rPr lang="en-US" sz="1000" b="1" dirty="0">
+              <a:rPr lang="en-US" sz="1150" b="1" dirty="0">
                 <a:solidFill>
                   <a:srgbClr val="DC2626"/>
                 </a:solidFill>
@@ -4438,20 +6602,20 @@
               </a:rPr>
               <a:t>TEKANAN BERAS DI AWAL OKTOBER 2026</a:t>
             </a:r>
-            <a:endParaRPr lang="en-US" sz="1000" dirty="0"/>
-          </a:p>
-        </p:txBody>
-      </p:sp>
-      <p:sp>
-        <p:nvSpPr>
-          <p:cNvPr id="16" name="Text 12"/>
-          <p:cNvSpPr/>
-          <p:nvPr/>
-        </p:nvSpPr>
-        <p:spPr>
-          <a:xfrm>
-            <a:off x="7178040" y="3703320"/>
-            <a:ext cx="4206240" cy="868680"/>
+            <a:endParaRPr lang="en-US" sz="1150" dirty="0"/>
+          </a:p>
+        </p:txBody>
+      </p:sp>
+      <p:sp>
+        <p:nvSpPr>
+          <p:cNvPr id="16" name="Text 11"/>
+          <p:cNvSpPr/>
+          <p:nvPr/>
+        </p:nvSpPr>
+        <p:spPr>
+          <a:xfrm>
+            <a:off x="7178040" y="3666744"/>
+            <a:ext cx="4206240" cy="960120"/>
           </a:xfrm>
           <a:prstGeom prst="rect">
             <a:avLst/>
@@ -4467,23 +6631,23 @@
               <a:buNone/>
             </a:pPr>
             <a:r>
-              <a:rPr lang="en-US" sz="1050" dirty="0">
-                <a:solidFill>
-                  <a:srgbClr val="334155"/>
-                </a:solidFill>
-                <a:latin typeface="Calibri" pitchFamily="34" charset="0"/>
-                <a:ea typeface="Calibri" pitchFamily="34" charset="-122"/>
-                <a:cs typeface="Calibri" pitchFamily="34" charset="-120"/>
-              </a:rPr>
-              <a:t>Pada minggu ke-1 Oktober 2026, IPH berada di level +0.84% dengan Beras sebagai komoditas bergejolak utama. Pergerakan harga gabah daratan mulai menekan harga eceran beras medium di Kepulauan Selayar.</a:t>
-            </a:r>
-            <a:endParaRPr lang="en-US" sz="1050" dirty="0"/>
-          </a:p>
-        </p:txBody>
-      </p:sp>
-      <p:sp>
-        <p:nvSpPr>
-          <p:cNvPr id="17" name="Shape 13"/>
+              <a:rPr lang="en-US" sz="1100" dirty="0">
+                <a:solidFill>
+                  <a:srgbClr val="1E293B"/>
+                </a:solidFill>
+                <a:latin typeface="Calibri" pitchFamily="34" charset="0"/>
+                <a:ea typeface="Calibri" pitchFamily="34" charset="-122"/>
+                <a:cs typeface="Calibri" pitchFamily="34" charset="-120"/>
+              </a:rPr>
+              <a:t>Pada minggu ke-1 Oktober 2026, IPH berada di level +0.84% dengan Beras sebagai komoditas bergejolak utama. Pergerakan harga gabah daratan mulai terasa pada harga eceran beras medium di Kepulauan Selayar.</a:t>
+            </a:r>
+            <a:endParaRPr lang="en-US" sz="1100" dirty="0"/>
+          </a:p>
+        </p:txBody>
+      </p:sp>
+      <p:sp>
+        <p:nvSpPr>
+          <p:cNvPr id="17" name="Shape 12"/>
           <p:cNvSpPr/>
           <p:nvPr/>
         </p:nvSpPr>
@@ -4500,9 +6664,9 @@
           <a:solidFill>
             <a:srgbClr val="FFFFFF"/>
           </a:solidFill>
-          <a:ln w="12700">
+          <a:ln w="19050">
             <a:solidFill>
-              <a:srgbClr val="E2E8F0"/>
+              <a:srgbClr val="BAE6FD"/>
             </a:solidFill>
             <a:prstDash val="solid"/>
           </a:ln>
@@ -4517,14 +6681,14 @@
       </p:sp>
       <p:sp>
         <p:nvSpPr>
-          <p:cNvPr id="18" name="Text 14"/>
-          <p:cNvSpPr/>
-          <p:nvPr/>
-        </p:nvSpPr>
-        <p:spPr>
-          <a:xfrm>
-            <a:off x="7178040" y="5029200"/>
-            <a:ext cx="4206240" cy="228600"/>
+          <p:cNvPr id="18" name="Text 13"/>
+          <p:cNvSpPr/>
+          <p:nvPr/>
+        </p:nvSpPr>
+        <p:spPr>
+          <a:xfrm>
+            <a:off x="7178040" y="4992624"/>
+            <a:ext cx="4206240" cy="256032"/>
           </a:xfrm>
           <a:prstGeom prst="rect">
             <a:avLst/>
@@ -4540,7 +6704,7 @@
               <a:buNone/>
             </a:pPr>
             <a:r>
-              <a:rPr lang="en-US" sz="1000" b="1" dirty="0">
+              <a:rPr lang="en-US" sz="1150" b="1" dirty="0">
                 <a:solidFill>
                   <a:srgbClr val="0284C7"/>
                 </a:solidFill>
@@ -4550,20 +6714,20 @@
               </a:rPr>
               <a:t>KOMODITAS PENYUMBANG KENAIKAN AKHIR Q3</a:t>
             </a:r>
-            <a:endParaRPr lang="en-US" sz="1000" dirty="0"/>
-          </a:p>
-        </p:txBody>
-      </p:sp>
-      <p:sp>
-        <p:nvSpPr>
-          <p:cNvPr id="19" name="Text 15"/>
-          <p:cNvSpPr/>
-          <p:nvPr/>
-        </p:nvSpPr>
-        <p:spPr>
-          <a:xfrm>
-            <a:off x="7178040" y="5303520"/>
-            <a:ext cx="4206240" cy="914400"/>
+            <a:endParaRPr lang="en-US" sz="1150" dirty="0"/>
+          </a:p>
+        </p:txBody>
+      </p:sp>
+      <p:sp>
+        <p:nvSpPr>
+          <p:cNvPr id="19" name="Text 14"/>
+          <p:cNvSpPr/>
+          <p:nvPr/>
+        </p:nvSpPr>
+        <p:spPr>
+          <a:xfrm>
+            <a:off x="7178040" y="5266944"/>
+            <a:ext cx="4206240" cy="960120"/>
           </a:xfrm>
           <a:prstGeom prst="rect">
             <a:avLst/>
@@ -4579,7 +6743,7 @@
               <a:buNone/>
             </a:pPr>
             <a:r>
-              <a:rPr lang="en-US" sz="1000" b="1" dirty="0">
+              <a:rPr lang="en-US" sz="1100" b="1" dirty="0">
                 <a:solidFill>
                   <a:srgbClr val="0F172A"/>
                 </a:solidFill>
@@ -4590,9 +6754,9 @@
               <a:t>• Cabai Rawit: </a:t>
             </a:r>
             <a:r>
-              <a:rPr lang="en-US" sz="1000" dirty="0">
-                <a:solidFill>
-                  <a:srgbClr val="334155"/>
+              <a:rPr lang="en-US" sz="1100" dirty="0">
+                <a:solidFill>
+                  <a:srgbClr val="1E293B"/>
                 </a:solidFill>
                 <a:latin typeface="Calibri" pitchFamily="34" charset="0"/>
                 <a:ea typeface="Calibri" pitchFamily="34" charset="-122"/>
@@ -4600,14 +6764,14 @@
               </a:rPr>
               <a:t>Andil inflasi hingga +1.13% (September W4), fluktuasi tertinggi.</a:t>
             </a:r>
-            <a:endParaRPr lang="en-US" sz="1000" dirty="0"/>
+            <a:endParaRPr lang="en-US" sz="1100" dirty="0"/>
           </a:p>
           <a:p>
             <a:pPr marL="0" indent="0">
               <a:buNone/>
             </a:pPr>
             <a:r>
-              <a:rPr lang="en-US" sz="1000" b="1" dirty="0">
+              <a:rPr lang="en-US" sz="1100" b="1" dirty="0">
                 <a:solidFill>
                   <a:srgbClr val="0F172A"/>
                 </a:solidFill>
@@ -4618,24 +6782,24 @@
               <a:t>• Cabai Merah: </a:t>
             </a:r>
             <a:r>
-              <a:rPr lang="en-US" sz="1000" dirty="0">
-                <a:solidFill>
-                  <a:srgbClr val="334155"/>
-                </a:solidFill>
-                <a:latin typeface="Calibri" pitchFamily="34" charset="0"/>
-                <a:ea typeface="Calibri" pitchFamily="34" charset="-122"/>
-                <a:cs typeface="Calibri" pitchFamily="34" charset="-120"/>
-              </a:rPr>
-              <a:t>Andil +0.62%, permintaan stabil namun suplai menipis.</a:t>
-            </a:r>
-            <a:endParaRPr lang="en-US" sz="1000" dirty="0"/>
+              <a:rPr lang="en-US" sz="1100" dirty="0">
+                <a:solidFill>
+                  <a:srgbClr val="1E293B"/>
+                </a:solidFill>
+                <a:latin typeface="Calibri" pitchFamily="34" charset="0"/>
+                <a:ea typeface="Calibri" pitchFamily="34" charset="-122"/>
+                <a:cs typeface="Calibri" pitchFamily="34" charset="-120"/>
+              </a:rPr>
+              <a:t>Andil +0.62%, permintaan stabil namun suplai lokal menipis.</a:t>
+            </a:r>
+            <a:endParaRPr lang="en-US" sz="1100" dirty="0"/>
           </a:p>
           <a:p>
             <a:pPr marL="0" indent="0">
               <a:buNone/>
             </a:pPr>
             <a:r>
-              <a:rPr lang="en-US" sz="1000" b="1" dirty="0">
+              <a:rPr lang="en-US" sz="1100" b="1" dirty="0">
                 <a:solidFill>
                   <a:srgbClr val="0F172A"/>
                 </a:solidFill>
@@ -4646,9 +6810,9 @@
               <a:t>• Beras: </a:t>
             </a:r>
             <a:r>
-              <a:rPr lang="en-US" sz="1000" dirty="0">
-                <a:solidFill>
-                  <a:srgbClr val="334155"/>
+              <a:rPr lang="en-US" sz="1100" dirty="0">
+                <a:solidFill>
+                  <a:srgbClr val="1E293B"/>
                 </a:solidFill>
                 <a:latin typeface="Calibri" pitchFamily="34" charset="0"/>
                 <a:ea typeface="Calibri" pitchFamily="34" charset="-122"/>
@@ -4656,7 +6820,7 @@
               </a:rPr>
               <a:t>Andil +0.53%, menjadi pemicu utama kenaikan awal Oktober 2026.</a:t>
             </a:r>
-            <a:endParaRPr lang="en-US" sz="1000" dirty="0"/>
+            <a:endParaRPr lang="en-US" sz="1100" dirty="0"/>
           </a:p>
         </p:txBody>
       </p:sp>
@@ -4701,20 +6865,20 @@
         </p:nvSpPr>
         <p:spPr>
           <a:xfrm>
-            <a:off x="548640" y="411480"/>
-            <a:ext cx="3108960" cy="292608"/>
+            <a:off x="548640" y="365760"/>
+            <a:ext cx="3291840" cy="329184"/>
           </a:xfrm>
           <a:prstGeom prst="roundRect">
             <a:avLst>
-              <a:gd name="adj" fmla="val 25000"/>
+              <a:gd name="adj" fmla="val 22222"/>
             </a:avLst>
           </a:prstGeom>
           <a:solidFill>
             <a:srgbClr val="E0F2FE"/>
           </a:solidFill>
-          <a:ln w="12700">
+          <a:ln w="15240">
             <a:solidFill>
-              <a:srgbClr val="BAE6FD"/>
+              <a:srgbClr val="0284C7"/>
             </a:solidFill>
             <a:prstDash val="solid"/>
           </a:ln>
@@ -4735,8 +6899,8 @@
         </p:nvSpPr>
         <p:spPr>
           <a:xfrm>
-            <a:off x="548640" y="411480"/>
-            <a:ext cx="3108960" cy="292608"/>
+            <a:off x="548640" y="365760"/>
+            <a:ext cx="3291840" cy="329184"/>
           </a:xfrm>
           <a:prstGeom prst="rect">
             <a:avLst/>
@@ -4752,7 +6916,7 @@
               <a:buNone/>
             </a:pPr>
             <a:r>
-              <a:rPr lang="en-US" sz="850" b="1" dirty="0">
+              <a:rPr lang="en-US" sz="1000" b="1" dirty="0">
                 <a:solidFill>
                   <a:srgbClr val="0369A1"/>
                 </a:solidFill>
@@ -4762,7 +6926,7 @@
               </a:rPr>
               <a:t>ANALISIS KOMODITAS 2026</a:t>
             </a:r>
-            <a:endParaRPr lang="en-US" sz="850" dirty="0"/>
+            <a:endParaRPr lang="en-US" sz="1000" dirty="0"/>
           </a:p>
         </p:txBody>
       </p:sp>
@@ -4774,8 +6938,8 @@
         </p:nvSpPr>
         <p:spPr>
           <a:xfrm>
-            <a:off x="548640" y="777240"/>
-            <a:ext cx="9601200" cy="438912"/>
+            <a:off x="548640" y="749808"/>
+            <a:ext cx="9509760" cy="475488"/>
           </a:xfrm>
           <a:prstGeom prst="rect">
             <a:avLst/>
@@ -4791,7 +6955,7 @@
               <a:buNone/>
             </a:pPr>
             <a:r>
-              <a:rPr lang="en-US" sz="2000" b="1" dirty="0">
+              <a:rPr lang="en-US" sz="2200" b="1" dirty="0">
                 <a:solidFill>
                   <a:srgbClr val="0F172A"/>
                 </a:solidFill>
@@ -4801,7 +6965,7 @@
               </a:rPr>
               <a:t>Profil Komoditas Bergejolak Kabupaten Kepulauan Selayar</a:t>
             </a:r>
-            <a:endParaRPr lang="en-US" sz="2000" dirty="0"/>
+            <a:endParaRPr lang="en-US" sz="2200" dirty="0"/>
           </a:p>
         </p:txBody>
       </p:sp>
@@ -4814,7 +6978,7 @@
         <p:spPr>
           <a:xfrm>
             <a:off x="548640" y="1234440"/>
-            <a:ext cx="9601200" cy="320040"/>
+            <a:ext cx="9509760" cy="347472"/>
           </a:xfrm>
           <a:prstGeom prst="rect">
             <a:avLst/>
@@ -4830,9 +6994,9 @@
               <a:buNone/>
             </a:pPr>
             <a:r>
-              <a:rPr lang="en-US" sz="1200" dirty="0">
-                <a:solidFill>
-                  <a:srgbClr val="64748B"/>
+              <a:rPr lang="en-US" sz="1300" dirty="0">
+                <a:solidFill>
+                  <a:srgbClr val="334155"/>
                 </a:solidFill>
                 <a:latin typeface="Calibri" pitchFamily="34" charset="0"/>
                 <a:ea typeface="Calibri" pitchFamily="34" charset="-122"/>
@@ -4840,13 +7004,13 @@
               </a:rPr>
               <a:t>Cabai Rawit Memimpin Frekuensi Fluktuasi (15x), Disusul Telur Ayam Ras, Beras, dan Cabai Merah</a:t>
             </a:r>
-            <a:endParaRPr lang="en-US" sz="1200" dirty="0"/>
+            <a:endParaRPr lang="en-US" sz="1300" dirty="0"/>
           </a:p>
         </p:txBody>
       </p:sp>
       <p:pic>
         <p:nvPicPr>
-          <p:cNvPr id="6" name="Image 0" descr="/Volumes/work/_Projects/siph/assets/logos/logo_bps.png"/>
+          <p:cNvPr id="6" name="Image 0" descr="preencoded.png"/>
           <p:cNvPicPr>
             <a:picLocks noChangeAspect="1"/>
           </p:cNvPicPr>
@@ -4860,8 +7024,8 @@
         </p:blipFill>
         <p:spPr>
           <a:xfrm>
-            <a:off x="10241280" y="411480"/>
-            <a:ext cx="1371600" cy="466344"/>
+            <a:off x="10149840" y="384048"/>
+            <a:ext cx="1463040" cy="493776"/>
           </a:xfrm>
           <a:prstGeom prst="rect">
             <a:avLst/>
@@ -4893,9 +7057,9 @@
               <a:buNone/>
             </a:pPr>
             <a:r>
-              <a:rPr lang="en-US" sz="900" dirty="0">
-                <a:solidFill>
-                  <a:srgbClr val="94A3B8"/>
+              <a:rPr lang="en-US" sz="1000" dirty="0">
+                <a:solidFill>
+                  <a:srgbClr val="64748B"/>
                 </a:solidFill>
                 <a:latin typeface="Calibri" pitchFamily="34" charset="0"/>
                 <a:ea typeface="Calibri" pitchFamily="34" charset="-122"/>
@@ -4903,7 +7067,7 @@
               </a:rPr>
               <a:t>Sumber: Badan Pusat Statistik &amp; SIPH Sulawesi Selatan 2026 | Evaluasi TPID Kab. Kepulauan Selayar</a:t>
             </a:r>
-            <a:endParaRPr lang="en-US" sz="900" dirty="0"/>
+            <a:endParaRPr lang="en-US" sz="1000" dirty="0"/>
           </a:p>
         </p:txBody>
       </p:sp>
@@ -4932,9 +7096,9 @@
               <a:buNone/>
             </a:pPr>
             <a:r>
-              <a:rPr lang="en-US" sz="1000" b="1" dirty="0">
-                <a:solidFill>
-                  <a:srgbClr val="94A3B8"/>
+              <a:rPr lang="en-US" sz="1100" b="1" dirty="0">
+                <a:solidFill>
+                  <a:srgbClr val="64748B"/>
                 </a:solidFill>
                 <a:latin typeface="Calibri" pitchFamily="34" charset="0"/>
                 <a:ea typeface="Calibri" pitchFamily="34" charset="-122"/>
@@ -4942,71 +7106,29 @@
               </a:rPr>
               <a:t>6</a:t>
             </a:r>
-            <a:endParaRPr lang="en-US" sz="1000" dirty="0"/>
-          </a:p>
-        </p:txBody>
-      </p:sp>
-      <p:sp>
-        <p:nvSpPr>
-          <p:cNvPr id="9" name="Shape 6"/>
-          <p:cNvSpPr/>
-          <p:nvPr/>
-        </p:nvSpPr>
-        <p:spPr>
-          <a:xfrm>
-            <a:off x="548640" y="1691640"/>
-            <a:ext cx="6217920" cy="4617720"/>
-          </a:xfrm>
-          <a:prstGeom prst="roundRect">
-            <a:avLst>
-              <a:gd name="adj" fmla="val 2376"/>
-            </a:avLst>
-          </a:prstGeom>
-          <a:solidFill>
-            <a:srgbClr val="FFFFFF"/>
-          </a:solidFill>
-          <a:ln w="12700">
-            <a:solidFill>
-              <a:srgbClr val="E2E8F0"/>
-            </a:solidFill>
-            <a:prstDash val="solid"/>
-          </a:ln>
-        </p:spPr>
-        <p:txBody>
-          <a:bodyPr/>
-          <a:lstStyle/>
-          <a:p>
-            <a:endParaRPr lang="en-US"/>
-          </a:p>
-        </p:txBody>
-      </p:sp>
-      <p:pic>
-        <p:nvPicPr>
-          <p:cNvPr id="10" name="Image 1" descr="/Volumes/work/_Projects/siph/assets/charts/chart_slide6.png"/>
-          <p:cNvPicPr>
-            <a:picLocks noChangeAspect="1"/>
-          </p:cNvPicPr>
-          <p:nvPr/>
-        </p:nvPicPr>
-        <p:blipFill>
-          <a:blip r:embed="rId4"/>
-          <a:stretch>
-            <a:fillRect/>
-          </a:stretch>
-        </p:blipFill>
-        <p:spPr>
-          <a:xfrm>
-            <a:off x="685800" y="1783080"/>
-            <a:ext cx="5943600" cy="4434840"/>
-          </a:xfrm>
-          <a:prstGeom prst="rect">
-            <a:avLst/>
-          </a:prstGeom>
-        </p:spPr>
-      </p:pic>
-      <p:sp>
-        <p:nvSpPr>
-          <p:cNvPr id="11" name="Shape 7"/>
+            <a:endParaRPr lang="en-US" sz="1100" dirty="0"/>
+          </a:p>
+        </p:txBody>
+      </p:sp>
+      <p:graphicFrame>
+        <p:nvGraphicFramePr>
+          <p:cNvPr id="9" name="Chart 0"/>
+          <p:cNvGraphicFramePr/>
+          <p:nvPr/>
+        </p:nvGraphicFramePr>
+        <p:xfrm>
+          <a:off x="548640" y="1691640"/>
+          <a:ext cx="6217920" cy="4617720"/>
+        </p:xfrm>
+        <a:graphic>
+          <a:graphicData uri="http://schemas.openxmlformats.org/drawingml/2006/chart">
+            <c:chart xmlns:c="http://schemas.openxmlformats.org/drawingml/2006/chart" xmlns:r="http://schemas.openxmlformats.org/officeDocument/2006/relationships" r:id="rId4"/>
+          </a:graphicData>
+        </a:graphic>
+      </p:graphicFrame>
+      <p:sp>
+        <p:nvSpPr>
+          <p:cNvPr id="10" name="Shape 6"/>
           <p:cNvSpPr/>
           <p:nvPr/>
         </p:nvSpPr>
@@ -5023,7 +7145,7 @@
           <a:solidFill>
             <a:srgbClr val="FFFFFF"/>
           </a:solidFill>
-          <a:ln w="12700">
+          <a:ln w="19050">
             <a:solidFill>
               <a:srgbClr val="FCA5A5"/>
             </a:solidFill>
@@ -5040,14 +7162,14 @@
       </p:sp>
       <p:sp>
         <p:nvSpPr>
-          <p:cNvPr id="12" name="Text 8"/>
-          <p:cNvSpPr/>
-          <p:nvPr/>
-        </p:nvSpPr>
-        <p:spPr>
-          <a:xfrm>
-            <a:off x="7178040" y="1828800"/>
-            <a:ext cx="4206240" cy="228600"/>
+          <p:cNvPr id="11" name="Text 7"/>
+          <p:cNvSpPr/>
+          <p:nvPr/>
+        </p:nvSpPr>
+        <p:spPr>
+          <a:xfrm>
+            <a:off x="7178040" y="1792224"/>
+            <a:ext cx="4206240" cy="256032"/>
           </a:xfrm>
           <a:prstGeom prst="rect">
             <a:avLst/>
@@ -5063,7 +7185,7 @@
               <a:buNone/>
             </a:pPr>
             <a:r>
-              <a:rPr lang="en-US" sz="1000" b="1" dirty="0">
+              <a:rPr lang="en-US" sz="1150" b="1" dirty="0">
                 <a:solidFill>
                   <a:srgbClr val="DC2626"/>
                 </a:solidFill>
@@ -5073,20 +7195,20 @@
               </a:rPr>
               <a:t>KLASTER HORTIKULTURA: KERENTANAN TINGGI</a:t>
             </a:r>
-            <a:endParaRPr lang="en-US" sz="1000" dirty="0"/>
-          </a:p>
-        </p:txBody>
-      </p:sp>
-      <p:sp>
-        <p:nvSpPr>
-          <p:cNvPr id="13" name="Text 9"/>
-          <p:cNvSpPr/>
-          <p:nvPr/>
-        </p:nvSpPr>
-        <p:spPr>
-          <a:xfrm>
-            <a:off x="7178040" y="2103120"/>
-            <a:ext cx="4206240" cy="868680"/>
+            <a:endParaRPr lang="en-US" sz="1150" dirty="0"/>
+          </a:p>
+        </p:txBody>
+      </p:sp>
+      <p:sp>
+        <p:nvSpPr>
+          <p:cNvPr id="12" name="Text 8"/>
+          <p:cNvSpPr/>
+          <p:nvPr/>
+        </p:nvSpPr>
+        <p:spPr>
+          <a:xfrm>
+            <a:off x="7178040" y="2066544"/>
+            <a:ext cx="4206240" cy="960120"/>
           </a:xfrm>
           <a:prstGeom prst="rect">
             <a:avLst/>
@@ -5102,23 +7224,23 @@
               <a:buNone/>
             </a:pPr>
             <a:r>
-              <a:rPr lang="en-US" sz="1050" dirty="0">
-                <a:solidFill>
-                  <a:srgbClr val="334155"/>
-                </a:solidFill>
-                <a:latin typeface="Calibri" pitchFamily="34" charset="0"/>
-                <a:ea typeface="Calibri" pitchFamily="34" charset="-122"/>
-                <a:cs typeface="Calibri" pitchFamily="34" charset="-120"/>
-              </a:rPr>
-              <a:t>Cabai Rawit menjadi komoditas paling volatil dengan 15 kali tercatat sebagai pemicu gejolak utama sepanjang 2026. Sifatnya yang lekas rusak (perishable) dan ketergantungan pasokan pulau menjadikannya indikator paling sensitif.</a:t>
-            </a:r>
-            <a:endParaRPr lang="en-US" sz="1050" dirty="0"/>
-          </a:p>
-        </p:txBody>
-      </p:sp>
-      <p:sp>
-        <p:nvSpPr>
-          <p:cNvPr id="14" name="Shape 10"/>
+              <a:rPr lang="en-US" sz="1100" dirty="0">
+                <a:solidFill>
+                  <a:srgbClr val="1E293B"/>
+                </a:solidFill>
+                <a:latin typeface="Calibri" pitchFamily="34" charset="0"/>
+                <a:ea typeface="Calibri" pitchFamily="34" charset="-122"/>
+                <a:cs typeface="Calibri" pitchFamily="34" charset="-120"/>
+              </a:rPr>
+              <a:t>Cabai Rawit menjadi komoditas paling volatil dengan 15 kali tercatat sebagai pemicu gejolak utama sepanjang 2026. Sifatnya yang lekas rusak (perishable) dan ketergantungan pasokan daratan menjadikannya indikator paling sensitif.</a:t>
+            </a:r>
+            <a:endParaRPr lang="en-US" sz="1100" dirty="0"/>
+          </a:p>
+        </p:txBody>
+      </p:sp>
+      <p:sp>
+        <p:nvSpPr>
+          <p:cNvPr id="13" name="Shape 9"/>
           <p:cNvSpPr/>
           <p:nvPr/>
         </p:nvSpPr>
@@ -5135,7 +7257,7 @@
           <a:solidFill>
             <a:srgbClr val="FFFFFF"/>
           </a:solidFill>
-          <a:ln w="12700">
+          <a:ln w="19050">
             <a:solidFill>
               <a:srgbClr val="FDE68A"/>
             </a:solidFill>
@@ -5152,14 +7274,14 @@
       </p:sp>
       <p:sp>
         <p:nvSpPr>
-          <p:cNvPr id="15" name="Text 11"/>
-          <p:cNvSpPr/>
-          <p:nvPr/>
-        </p:nvSpPr>
-        <p:spPr>
-          <a:xfrm>
-            <a:off x="7178040" y="3429000"/>
-            <a:ext cx="4206240" cy="228600"/>
+          <p:cNvPr id="14" name="Text 10"/>
+          <p:cNvSpPr/>
+          <p:nvPr/>
+        </p:nvSpPr>
+        <p:spPr>
+          <a:xfrm>
+            <a:off x="7178040" y="3392424"/>
+            <a:ext cx="4206240" cy="256032"/>
           </a:xfrm>
           <a:prstGeom prst="rect">
             <a:avLst/>
@@ -5175,7 +7297,7 @@
               <a:buNone/>
             </a:pPr>
             <a:r>
-              <a:rPr lang="en-US" sz="1000" b="1" dirty="0">
+              <a:rPr lang="en-US" sz="1150" b="1" dirty="0">
                 <a:solidFill>
                   <a:srgbClr val="D97706"/>
                 </a:solidFill>
@@ -5185,20 +7307,20 @@
               </a:rPr>
               <a:t>KLASTER PROTEIN HEWANI: SENSITIF HBKN</a:t>
             </a:r>
-            <a:endParaRPr lang="en-US" sz="1000" dirty="0"/>
-          </a:p>
-        </p:txBody>
-      </p:sp>
-      <p:sp>
-        <p:nvSpPr>
-          <p:cNvPr id="16" name="Text 12"/>
-          <p:cNvSpPr/>
-          <p:nvPr/>
-        </p:nvSpPr>
-        <p:spPr>
-          <a:xfrm>
-            <a:off x="7178040" y="3703320"/>
-            <a:ext cx="4206240" cy="868680"/>
+            <a:endParaRPr lang="en-US" sz="1150" dirty="0"/>
+          </a:p>
+        </p:txBody>
+      </p:sp>
+      <p:sp>
+        <p:nvSpPr>
+          <p:cNvPr id="15" name="Text 11"/>
+          <p:cNvSpPr/>
+          <p:nvPr/>
+        </p:nvSpPr>
+        <p:spPr>
+          <a:xfrm>
+            <a:off x="7178040" y="3666744"/>
+            <a:ext cx="4206240" cy="960120"/>
           </a:xfrm>
           <a:prstGeom prst="rect">
             <a:avLst/>
@@ -5214,23 +7336,23 @@
               <a:buNone/>
             </a:pPr>
             <a:r>
-              <a:rPr lang="en-US" sz="1050" dirty="0">
-                <a:solidFill>
-                  <a:srgbClr val="334155"/>
-                </a:solidFill>
-                <a:latin typeface="Calibri" pitchFamily="34" charset="0"/>
-                <a:ea typeface="Calibri" pitchFamily="34" charset="-122"/>
-                <a:cs typeface="Calibri" pitchFamily="34" charset="-120"/>
-              </a:rPr>
-              <a:t>Telur Ayam Ras (5x gejolak) dan Daging Ayam (3x gejolak) mendominasi lonjakan harga pada momen perayaan dan hari libur. Pasokan ayam ras petelur lokal belum mampu memenuhi kebutuhan mandiri seluruh pulau.</a:t>
-            </a:r>
-            <a:endParaRPr lang="en-US" sz="1050" dirty="0"/>
-          </a:p>
-        </p:txBody>
-      </p:sp>
-      <p:sp>
-        <p:nvSpPr>
-          <p:cNvPr id="17" name="Shape 13"/>
+              <a:rPr lang="en-US" sz="1100" dirty="0">
+                <a:solidFill>
+                  <a:srgbClr val="1E293B"/>
+                </a:solidFill>
+                <a:latin typeface="Calibri" pitchFamily="34" charset="0"/>
+                <a:ea typeface="Calibri" pitchFamily="34" charset="-122"/>
+                <a:cs typeface="Calibri" pitchFamily="34" charset="-120"/>
+              </a:rPr>
+              <a:t>Telur Ayam Ras (5x gejolak) dan Daging Ayam (3x gejolak) mendominasi lonjakan harga pada momen perayaan dan hari libur. Pasokan ayam petelur lokal belum mampu memenuhi kebutuhan mandiri seluruh pulau.</a:t>
+            </a:r>
+            <a:endParaRPr lang="en-US" sz="1100" dirty="0"/>
+          </a:p>
+        </p:txBody>
+      </p:sp>
+      <p:sp>
+        <p:nvSpPr>
+          <p:cNvPr id="16" name="Shape 12"/>
           <p:cNvSpPr/>
           <p:nvPr/>
         </p:nvSpPr>
@@ -5247,9 +7369,9 @@
           <a:solidFill>
             <a:srgbClr val="FFFFFF"/>
           </a:solidFill>
-          <a:ln w="12700">
+          <a:ln w="19050">
             <a:solidFill>
-              <a:srgbClr val="E2E8F0"/>
+              <a:srgbClr val="BAE6FD"/>
             </a:solidFill>
             <a:prstDash val="solid"/>
           </a:ln>
@@ -5264,14 +7386,14 @@
       </p:sp>
       <p:sp>
         <p:nvSpPr>
-          <p:cNvPr id="18" name="Text 14"/>
-          <p:cNvSpPr/>
-          <p:nvPr/>
-        </p:nvSpPr>
-        <p:spPr>
-          <a:xfrm>
-            <a:off x="7178040" y="5029200"/>
-            <a:ext cx="4206240" cy="228600"/>
+          <p:cNvPr id="17" name="Text 13"/>
+          <p:cNvSpPr/>
+          <p:nvPr/>
+        </p:nvSpPr>
+        <p:spPr>
+          <a:xfrm>
+            <a:off x="7178040" y="4992624"/>
+            <a:ext cx="4206240" cy="256032"/>
           </a:xfrm>
           <a:prstGeom prst="rect">
             <a:avLst/>
@@ -5287,7 +7409,7 @@
               <a:buNone/>
             </a:pPr>
             <a:r>
-              <a:rPr lang="en-US" sz="1000" b="1" dirty="0">
+              <a:rPr lang="en-US" sz="1150" b="1" dirty="0">
                 <a:solidFill>
                   <a:srgbClr val="0284C7"/>
                 </a:solidFill>
@@ -5297,20 +7419,20 @@
               </a:rPr>
               <a:t>KLASTER PANGAN POKOK: BERAS STRATEGIS</a:t>
             </a:r>
-            <a:endParaRPr lang="en-US" sz="1000" dirty="0"/>
-          </a:p>
-        </p:txBody>
-      </p:sp>
-      <p:sp>
-        <p:nvSpPr>
-          <p:cNvPr id="19" name="Text 15"/>
-          <p:cNvSpPr/>
-          <p:nvPr/>
-        </p:nvSpPr>
-        <p:spPr>
-          <a:xfrm>
-            <a:off x="7178040" y="5303520"/>
-            <a:ext cx="4206240" cy="868680"/>
+            <a:endParaRPr lang="en-US" sz="1150" dirty="0"/>
+          </a:p>
+        </p:txBody>
+      </p:sp>
+      <p:sp>
+        <p:nvSpPr>
+          <p:cNvPr id="18" name="Text 14"/>
+          <p:cNvSpPr/>
+          <p:nvPr/>
+        </p:nvSpPr>
+        <p:spPr>
+          <a:xfrm>
+            <a:off x="7178040" y="5266944"/>
+            <a:ext cx="4206240" cy="960120"/>
           </a:xfrm>
           <a:prstGeom prst="rect">
             <a:avLst/>
@@ -5326,9 +7448,9 @@
               <a:buNone/>
             </a:pPr>
             <a:r>
-              <a:rPr lang="en-US" sz="1050" dirty="0">
-                <a:solidFill>
-                  <a:srgbClr val="334155"/>
+              <a:rPr lang="en-US" sz="1100" dirty="0">
+                <a:solidFill>
+                  <a:srgbClr val="1E293B"/>
                 </a:solidFill>
                 <a:latin typeface="Calibri" pitchFamily="34" charset="0"/>
                 <a:ea typeface="Calibri" pitchFamily="34" charset="-122"/>
@@ -5336,7 +7458,7 @@
               </a:rPr>
               <a:t>Beras tercatat 4 kali sebagai fluktuasi tertinggi pada 2026. Meskipun Selayar memiliki buffer stock BULOG, stabilitas harga beras tetap membutuhkan pengawasan jalur logistik laut dan kepatuhan terhadap HET pasar.</a:t>
             </a:r>
-            <a:endParaRPr lang="en-US" sz="1050" dirty="0"/>
+            <a:endParaRPr lang="en-US" sz="1100" dirty="0"/>
           </a:p>
         </p:txBody>
       </p:sp>
@@ -5381,31 +7503,24 @@
         </p:nvSpPr>
         <p:spPr>
           <a:xfrm>
-            <a:off x="548640" y="411480"/>
-            <a:ext cx="3108960" cy="292608"/>
+            <a:off x="548640" y="365760"/>
+            <a:ext cx="3291840" cy="329184"/>
           </a:xfrm>
           <a:prstGeom prst="roundRect">
             <a:avLst>
-              <a:gd name="adj" fmla="val 25000"/>
+              <a:gd name="adj" fmla="val 22222"/>
             </a:avLst>
           </a:prstGeom>
           <a:solidFill>
             <a:srgbClr val="E0F2FE"/>
           </a:solidFill>
-          <a:ln w="12700">
+          <a:ln w="15240">
             <a:solidFill>
-              <a:srgbClr val="BAE6FD"/>
+              <a:srgbClr val="0284C7"/>
             </a:solidFill>
             <a:prstDash val="solid"/>
           </a:ln>
         </p:spPr>
-        <p:txBody>
-          <a:bodyPr/>
-          <a:lstStyle/>
-          <a:p>
-            <a:endParaRPr lang="en-US"/>
-          </a:p>
-        </p:txBody>
       </p:sp>
       <p:sp>
         <p:nvSpPr>
@@ -5415,8 +7530,8 @@
         </p:nvSpPr>
         <p:spPr>
           <a:xfrm>
-            <a:off x="548640" y="411480"/>
-            <a:ext cx="3108960" cy="292608"/>
+            <a:off x="548640" y="365760"/>
+            <a:ext cx="3291840" cy="329184"/>
           </a:xfrm>
           <a:prstGeom prst="rect">
             <a:avLst/>
@@ -5432,7 +7547,7 @@
               <a:buNone/>
             </a:pPr>
             <a:r>
-              <a:rPr lang="en-US" sz="850" b="1" dirty="0">
+              <a:rPr lang="en-US" sz="1000" b="1" dirty="0">
                 <a:solidFill>
                   <a:srgbClr val="0369A1"/>
                 </a:solidFill>
@@ -5442,7 +7557,7 @@
               </a:rPr>
               <a:t>REKOMENDASI KEBIJAKAN TPID</a:t>
             </a:r>
-            <a:endParaRPr lang="en-US" sz="850" dirty="0"/>
+            <a:endParaRPr lang="en-US" sz="1000" dirty="0"/>
           </a:p>
         </p:txBody>
       </p:sp>
@@ -5454,8 +7569,8 @@
         </p:nvSpPr>
         <p:spPr>
           <a:xfrm>
-            <a:off x="548640" y="777240"/>
-            <a:ext cx="9601200" cy="438912"/>
+            <a:off x="548640" y="749808"/>
+            <a:ext cx="9509760" cy="475488"/>
           </a:xfrm>
           <a:prstGeom prst="rect">
             <a:avLst/>
@@ -5471,7 +7586,7 @@
               <a:buNone/>
             </a:pPr>
             <a:r>
-              <a:rPr lang="en-US" sz="2000" b="1" dirty="0">
+              <a:rPr lang="en-US" sz="2200" b="1" dirty="0">
                 <a:solidFill>
                   <a:srgbClr val="0F172A"/>
                 </a:solidFill>
@@ -5481,7 +7596,7 @@
               </a:rPr>
               <a:t>Rencana Aksi Pengendalian Inflasi Daerah 2026 (Kerangka 4K)</a:t>
             </a:r>
-            <a:endParaRPr lang="en-US" sz="2000" dirty="0"/>
+            <a:endParaRPr lang="en-US" sz="2200" dirty="0"/>
           </a:p>
         </p:txBody>
       </p:sp>
@@ -5494,7 +7609,7 @@
         <p:spPr>
           <a:xfrm>
             <a:off x="548640" y="1234440"/>
-            <a:ext cx="9601200" cy="320040"/>
+            <a:ext cx="9509760" cy="347472"/>
           </a:xfrm>
           <a:prstGeom prst="rect">
             <a:avLst/>
@@ -5510,9 +7625,9 @@
               <a:buNone/>
             </a:pPr>
             <a:r>
-              <a:rPr lang="en-US" sz="1200" dirty="0">
-                <a:solidFill>
-                  <a:srgbClr val="64748B"/>
+              <a:rPr lang="en-US" sz="1300" dirty="0">
+                <a:solidFill>
+                  <a:srgbClr val="334155"/>
                 </a:solidFill>
                 <a:latin typeface="Calibri" pitchFamily="34" charset="0"/>
                 <a:ea typeface="Calibri" pitchFamily="34" charset="-122"/>
@@ -5520,13 +7635,13 @@
               </a:rPr>
               <a:t>Strategi Preventif Berbasis Evaluasi IPH Mingguan Untuk Menjaga Stabilitas Harga di Kepulauan Selayar</a:t>
             </a:r>
-            <a:endParaRPr lang="en-US" sz="1200" dirty="0"/>
+            <a:endParaRPr lang="en-US" sz="1300" dirty="0"/>
           </a:p>
         </p:txBody>
       </p:sp>
       <p:pic>
         <p:nvPicPr>
-          <p:cNvPr id="6" name="Image 0" descr="/Volumes/work/_Projects/siph/assets/logos/logo_bps.png"/>
+          <p:cNvPr id="6" name="Image 0" descr="preencoded.png"/>
           <p:cNvPicPr>
             <a:picLocks noChangeAspect="1"/>
           </p:cNvPicPr>
@@ -5540,8 +7655,8 @@
         </p:blipFill>
         <p:spPr>
           <a:xfrm>
-            <a:off x="10241280" y="411480"/>
-            <a:ext cx="1371600" cy="466344"/>
+            <a:off x="10149840" y="384048"/>
+            <a:ext cx="1463040" cy="493776"/>
           </a:xfrm>
           <a:prstGeom prst="rect">
             <a:avLst/>
@@ -5573,9 +7688,9 @@
               <a:buNone/>
             </a:pPr>
             <a:r>
-              <a:rPr lang="en-US" sz="900" dirty="0">
-                <a:solidFill>
-                  <a:srgbClr val="94A3B8"/>
+              <a:rPr lang="en-US" sz="1000" dirty="0">
+                <a:solidFill>
+                  <a:srgbClr val="64748B"/>
                 </a:solidFill>
                 <a:latin typeface="Calibri" pitchFamily="34" charset="0"/>
                 <a:ea typeface="Calibri" pitchFamily="34" charset="-122"/>
@@ -5583,7 +7698,7 @@
               </a:rPr>
               <a:t>Sumber: Badan Pusat Statistik &amp; SIPH Sulawesi Selatan 2026 | Evaluasi TPID Kab. Kepulauan Selayar</a:t>
             </a:r>
-            <a:endParaRPr lang="en-US" sz="900" dirty="0"/>
+            <a:endParaRPr lang="en-US" sz="1000" dirty="0"/>
           </a:p>
         </p:txBody>
       </p:sp>
@@ -5612,9 +7727,9 @@
               <a:buNone/>
             </a:pPr>
             <a:r>
-              <a:rPr lang="en-US" sz="1000" b="1" dirty="0">
-                <a:solidFill>
-                  <a:srgbClr val="94A3B8"/>
+              <a:rPr lang="en-US" sz="1100" b="1" dirty="0">
+                <a:solidFill>
+                  <a:srgbClr val="64748B"/>
                 </a:solidFill>
                 <a:latin typeface="Calibri" pitchFamily="34" charset="0"/>
                 <a:ea typeface="Calibri" pitchFamily="34" charset="-122"/>
@@ -5622,7 +7737,7 @@
               </a:rPr>
               <a:t>7</a:t>
             </a:r>
-            <a:endParaRPr lang="en-US" sz="1000" dirty="0"/>
+            <a:endParaRPr lang="en-US" sz="1100" dirty="0"/>
           </a:p>
         </p:txBody>
       </p:sp>
@@ -5645,20 +7760,13 @@
           <a:solidFill>
             <a:srgbClr val="FFFFFF"/>
           </a:solidFill>
-          <a:ln w="12700">
+          <a:ln w="15240">
             <a:solidFill>
-              <a:srgbClr val="E2E8F0"/>
+              <a:srgbClr val="CBD5E1"/>
             </a:solidFill>
             <a:prstDash val="solid"/>
           </a:ln>
         </p:spPr>
-        <p:txBody>
-          <a:bodyPr/>
-          <a:lstStyle/>
-          <a:p>
-            <a:endParaRPr lang="en-US"/>
-          </a:p>
-        </p:txBody>
       </p:sp>
       <p:sp>
         <p:nvSpPr>
@@ -5668,12 +7776,12 @@
         </p:nvSpPr>
         <p:spPr>
           <a:xfrm>
-            <a:off x="777240" y="1874520"/>
-            <a:ext cx="411480" cy="320040"/>
+            <a:off x="777240" y="1856232"/>
+            <a:ext cx="457200" cy="347472"/>
           </a:xfrm>
           <a:prstGeom prst="roundRect">
             <a:avLst>
-              <a:gd name="adj" fmla="val 17143"/>
+              <a:gd name="adj" fmla="val 15789"/>
             </a:avLst>
           </a:prstGeom>
           <a:solidFill>
@@ -5681,18 +7789,11 @@
           </a:solidFill>
           <a:ln w="12700">
             <a:solidFill>
-              <a:srgbClr val="E2E8F0"/>
+              <a:srgbClr val="CBD5E1"/>
             </a:solidFill>
             <a:prstDash val="solid"/>
           </a:ln>
         </p:spPr>
-        <p:txBody>
-          <a:bodyPr/>
-          <a:lstStyle/>
-          <a:p>
-            <a:endParaRPr lang="en-US"/>
-          </a:p>
-        </p:txBody>
       </p:sp>
       <p:sp>
         <p:nvSpPr>
@@ -5702,8 +7803,8 @@
         </p:nvSpPr>
         <p:spPr>
           <a:xfrm>
-            <a:off x="777240" y="1874520"/>
-            <a:ext cx="411480" cy="320040"/>
+            <a:off x="777240" y="1856232"/>
+            <a:ext cx="457200" cy="347472"/>
           </a:xfrm>
           <a:prstGeom prst="rect">
             <a:avLst/>
@@ -5719,7 +7820,7 @@
               <a:buNone/>
             </a:pPr>
             <a:r>
-              <a:rPr lang="en-US" sz="1000" b="1" dirty="0">
+              <a:rPr lang="en-US" sz="1200" b="1" dirty="0">
                 <a:solidFill>
                   <a:srgbClr val="0284C7"/>
                 </a:solidFill>
@@ -5729,7 +7830,7 @@
               </a:rPr>
               <a:t>01</a:t>
             </a:r>
-            <a:endParaRPr lang="en-US" sz="1000" dirty="0"/>
+            <a:endParaRPr lang="en-US" sz="1200" dirty="0"/>
           </a:p>
         </p:txBody>
       </p:sp>
@@ -5741,8 +7842,8 @@
         </p:nvSpPr>
         <p:spPr>
           <a:xfrm>
-            <a:off x="1325880" y="1901952"/>
-            <a:ext cx="4297680" cy="274320"/>
+            <a:off x="1353312" y="1892808"/>
+            <a:ext cx="4297680" cy="292608"/>
           </a:xfrm>
           <a:prstGeom prst="rect">
             <a:avLst/>
@@ -5758,7 +7859,7 @@
               <a:buNone/>
             </a:pPr>
             <a:r>
-              <a:rPr lang="en-US" sz="1200" b="1" dirty="0">
+              <a:rPr lang="en-US" sz="1300" b="1" dirty="0">
                 <a:solidFill>
                   <a:srgbClr val="0F172A"/>
                 </a:solidFill>
@@ -5768,7 +7869,7 @@
               </a:rPr>
               <a:t>KETERJANGKAUAN HARGA</a:t>
             </a:r>
-            <a:endParaRPr lang="en-US" sz="1200" dirty="0"/>
+            <a:endParaRPr lang="en-US" sz="1300" dirty="0"/>
           </a:p>
         </p:txBody>
       </p:sp>
@@ -5797,9 +7898,9 @@
               <a:buNone/>
             </a:pPr>
             <a:r>
-              <a:rPr lang="en-US" sz="1000" dirty="0">
-                <a:solidFill>
-                  <a:srgbClr val="334155"/>
+              <a:rPr lang="en-US" sz="1100" dirty="0">
+                <a:solidFill>
+                  <a:srgbClr val="1E293B"/>
                 </a:solidFill>
                 <a:latin typeface="Calibri" pitchFamily="34" charset="0"/>
                 <a:ea typeface="Calibri" pitchFamily="34" charset="-122"/>
@@ -5807,7 +7908,7 @@
               </a:rPr>
               <a:t>Pelaksanaan Gerakan Pangan Murah (GPM) berkala dan operasi pasar terarah di sentra pulau, terutama pada H-14 momen HBKN Idul Fitri dan Nataru, dengan subsidi selisih harga komoditas pokok.</a:t>
             </a:r>
-            <a:endParaRPr lang="en-US" sz="1000" dirty="0"/>
+            <a:endParaRPr lang="en-US" sz="1100" dirty="0"/>
           </a:p>
         </p:txBody>
       </p:sp>
@@ -5819,8 +7920,8 @@
         </p:nvSpPr>
         <p:spPr>
           <a:xfrm>
-            <a:off x="777240" y="3063240"/>
-            <a:ext cx="4892040" cy="274320"/>
+            <a:off x="777240" y="3044952"/>
+            <a:ext cx="4892040" cy="292608"/>
           </a:xfrm>
           <a:prstGeom prst="rect">
             <a:avLst/>
@@ -5836,7 +7937,7 @@
               <a:buNone/>
             </a:pPr>
             <a:r>
-              <a:rPr lang="en-US" sz="950" i="1" dirty="0">
+              <a:rPr lang="en-US" sz="1050" b="1" i="1" dirty="0">
                 <a:solidFill>
                   <a:srgbClr val="0284C7"/>
                 </a:solidFill>
@@ -5846,7 +7947,7 @@
               </a:rPr>
               <a:t>Target: Menjaga daya beli masyarakat berpenghasilan rendah.</a:t>
             </a:r>
-            <a:endParaRPr lang="en-US" sz="950" dirty="0"/>
+            <a:endParaRPr lang="en-US" sz="1050" dirty="0"/>
           </a:p>
         </p:txBody>
       </p:sp>
@@ -5869,20 +7970,13 @@
           <a:solidFill>
             <a:srgbClr val="FFFFFF"/>
           </a:solidFill>
-          <a:ln w="12700">
+          <a:ln w="15240">
             <a:solidFill>
-              <a:srgbClr val="E2E8F0"/>
+              <a:srgbClr val="CBD5E1"/>
             </a:solidFill>
             <a:prstDash val="solid"/>
           </a:ln>
         </p:spPr>
-        <p:txBody>
-          <a:bodyPr/>
-          <a:lstStyle/>
-          <a:p>
-            <a:endParaRPr lang="en-US"/>
-          </a:p>
-        </p:txBody>
       </p:sp>
       <p:sp>
         <p:nvSpPr>
@@ -5892,12 +7986,12 @@
         </p:nvSpPr>
         <p:spPr>
           <a:xfrm>
-            <a:off x="6492240" y="1874520"/>
-            <a:ext cx="411480" cy="320040"/>
+            <a:off x="6492240" y="1856232"/>
+            <a:ext cx="457200" cy="347472"/>
           </a:xfrm>
           <a:prstGeom prst="roundRect">
             <a:avLst>
-              <a:gd name="adj" fmla="val 17143"/>
+              <a:gd name="adj" fmla="val 15789"/>
             </a:avLst>
           </a:prstGeom>
           <a:solidFill>
@@ -5905,18 +7999,11 @@
           </a:solidFill>
           <a:ln w="12700">
             <a:solidFill>
-              <a:srgbClr val="E2E8F0"/>
+              <a:srgbClr val="CBD5E1"/>
             </a:solidFill>
             <a:prstDash val="solid"/>
           </a:ln>
         </p:spPr>
-        <p:txBody>
-          <a:bodyPr/>
-          <a:lstStyle/>
-          <a:p>
-            <a:endParaRPr lang="en-US"/>
-          </a:p>
-        </p:txBody>
       </p:sp>
       <p:sp>
         <p:nvSpPr>
@@ -5926,8 +8013,8 @@
         </p:nvSpPr>
         <p:spPr>
           <a:xfrm>
-            <a:off x="6492240" y="1874520"/>
-            <a:ext cx="411480" cy="320040"/>
+            <a:off x="6492240" y="1856232"/>
+            <a:ext cx="457200" cy="347472"/>
           </a:xfrm>
           <a:prstGeom prst="rect">
             <a:avLst/>
@@ -5943,7 +8030,7 @@
               <a:buNone/>
             </a:pPr>
             <a:r>
-              <a:rPr lang="en-US" sz="1000" b="1" dirty="0">
+              <a:rPr lang="en-US" sz="1200" b="1" dirty="0">
                 <a:solidFill>
                   <a:srgbClr val="16A34A"/>
                 </a:solidFill>
@@ -5953,7 +8040,7 @@
               </a:rPr>
               <a:t>02</a:t>
             </a:r>
-            <a:endParaRPr lang="en-US" sz="1000" dirty="0"/>
+            <a:endParaRPr lang="en-US" sz="1200" dirty="0"/>
           </a:p>
         </p:txBody>
       </p:sp>
@@ -5965,8 +8052,8 @@
         </p:nvSpPr>
         <p:spPr>
           <a:xfrm>
-            <a:off x="7040880" y="1901952"/>
-            <a:ext cx="4297680" cy="274320"/>
+            <a:off x="7068312" y="1892808"/>
+            <a:ext cx="4297680" cy="292608"/>
           </a:xfrm>
           <a:prstGeom prst="rect">
             <a:avLst/>
@@ -5982,7 +8069,7 @@
               <a:buNone/>
             </a:pPr>
             <a:r>
-              <a:rPr lang="en-US" sz="1200" b="1" dirty="0">
+              <a:rPr lang="en-US" sz="1300" b="1" dirty="0">
                 <a:solidFill>
                   <a:srgbClr val="0F172A"/>
                 </a:solidFill>
@@ -5992,7 +8079,7 @@
               </a:rPr>
               <a:t>KETERSEDIAAN PASOKAN</a:t>
             </a:r>
-            <a:endParaRPr lang="en-US" sz="1200" dirty="0"/>
+            <a:endParaRPr lang="en-US" sz="1300" dirty="0"/>
           </a:p>
         </p:txBody>
       </p:sp>
@@ -6021,9 +8108,9 @@
               <a:buNone/>
             </a:pPr>
             <a:r>
-              <a:rPr lang="en-US" sz="1000" dirty="0">
-                <a:solidFill>
-                  <a:srgbClr val="334155"/>
+              <a:rPr lang="en-US" sz="1100" dirty="0">
+                <a:solidFill>
+                  <a:srgbClr val="1E293B"/>
                 </a:solidFill>
                 <a:latin typeface="Calibri" pitchFamily="34" charset="0"/>
                 <a:ea typeface="Calibri" pitchFamily="34" charset="-122"/>
@@ -6031,7 +8118,7 @@
               </a:rPr>
               <a:t>Penguatan cadangan pangan pemerintah daerah (CPPD) bersama BULOG, optimalisasi fasilitas cold storage komunal untuk cabai &amp; bawang, serta penguatan Kerjasama Antar Daerah (KAD) dengan sentra daratan Sulsel.</a:t>
             </a:r>
-            <a:endParaRPr lang="en-US" sz="1000" dirty="0"/>
+            <a:endParaRPr lang="en-US" sz="1100" dirty="0"/>
           </a:p>
         </p:txBody>
       </p:sp>
@@ -6043,8 +8130,8 @@
         </p:nvSpPr>
         <p:spPr>
           <a:xfrm>
-            <a:off x="6492240" y="3063240"/>
-            <a:ext cx="4892040" cy="274320"/>
+            <a:off x="6492240" y="3044952"/>
+            <a:ext cx="4892040" cy="292608"/>
           </a:xfrm>
           <a:prstGeom prst="rect">
             <a:avLst/>
@@ -6060,7 +8147,7 @@
               <a:buNone/>
             </a:pPr>
             <a:r>
-              <a:rPr lang="en-US" sz="950" i="1" dirty="0">
+              <a:rPr lang="en-US" sz="1050" b="1" i="1" dirty="0">
                 <a:solidFill>
                   <a:srgbClr val="16A34A"/>
                 </a:solidFill>
@@ -6070,7 +8157,7 @@
               </a:rPr>
               <a:t>Target: Stok aman minimal 3-4 minggu saat cuaca laut ekstrem.</a:t>
             </a:r>
-            <a:endParaRPr lang="en-US" sz="950" dirty="0"/>
+            <a:endParaRPr lang="en-US" sz="1050" dirty="0"/>
           </a:p>
         </p:txBody>
       </p:sp>
@@ -6093,20 +8180,13 @@
           <a:solidFill>
             <a:srgbClr val="FFFFFF"/>
           </a:solidFill>
-          <a:ln w="12700">
+          <a:ln w="15240">
             <a:solidFill>
-              <a:srgbClr val="E2E8F0"/>
+              <a:srgbClr val="CBD5E1"/>
             </a:solidFill>
             <a:prstDash val="solid"/>
           </a:ln>
         </p:spPr>
-        <p:txBody>
-          <a:bodyPr/>
-          <a:lstStyle/>
-          <a:p>
-            <a:endParaRPr lang="en-US"/>
-          </a:p>
-        </p:txBody>
       </p:sp>
       <p:sp>
         <p:nvSpPr>
@@ -6116,12 +8196,12 @@
         </p:nvSpPr>
         <p:spPr>
           <a:xfrm>
-            <a:off x="777240" y="3794760"/>
-            <a:ext cx="411480" cy="320040"/>
+            <a:off x="777240" y="3776472"/>
+            <a:ext cx="457200" cy="347472"/>
           </a:xfrm>
           <a:prstGeom prst="roundRect">
             <a:avLst>
-              <a:gd name="adj" fmla="val 17143"/>
+              <a:gd name="adj" fmla="val 15789"/>
             </a:avLst>
           </a:prstGeom>
           <a:solidFill>
@@ -6129,18 +8209,11 @@
           </a:solidFill>
           <a:ln w="12700">
             <a:solidFill>
-              <a:srgbClr val="E2E8F0"/>
+              <a:srgbClr val="CBD5E1"/>
             </a:solidFill>
             <a:prstDash val="solid"/>
           </a:ln>
         </p:spPr>
-        <p:txBody>
-          <a:bodyPr/>
-          <a:lstStyle/>
-          <a:p>
-            <a:endParaRPr lang="en-US"/>
-          </a:p>
-        </p:txBody>
       </p:sp>
       <p:sp>
         <p:nvSpPr>
@@ -6150,8 +8223,8 @@
         </p:nvSpPr>
         <p:spPr>
           <a:xfrm>
-            <a:off x="777240" y="3794760"/>
-            <a:ext cx="411480" cy="320040"/>
+            <a:off x="777240" y="3776472"/>
+            <a:ext cx="457200" cy="347472"/>
           </a:xfrm>
           <a:prstGeom prst="rect">
             <a:avLst/>
@@ -6167,7 +8240,7 @@
               <a:buNone/>
             </a:pPr>
             <a:r>
-              <a:rPr lang="en-US" sz="1000" b="1" dirty="0">
+              <a:rPr lang="en-US" sz="1200" b="1" dirty="0">
                 <a:solidFill>
                   <a:srgbClr val="D97706"/>
                 </a:solidFill>
@@ -6177,7 +8250,7 @@
               </a:rPr>
               <a:t>03</a:t>
             </a:r>
-            <a:endParaRPr lang="en-US" sz="1000" dirty="0"/>
+            <a:endParaRPr lang="en-US" sz="1200" dirty="0"/>
           </a:p>
         </p:txBody>
       </p:sp>
@@ -6189,8 +8262,8 @@
         </p:nvSpPr>
         <p:spPr>
           <a:xfrm>
-            <a:off x="1325880" y="3822192"/>
-            <a:ext cx="4297680" cy="274320"/>
+            <a:off x="1353312" y="3813048"/>
+            <a:ext cx="4297680" cy="292608"/>
           </a:xfrm>
           <a:prstGeom prst="rect">
             <a:avLst/>
@@ -6206,7 +8279,7 @@
               <a:buNone/>
             </a:pPr>
             <a:r>
-              <a:rPr lang="en-US" sz="1200" b="1" dirty="0">
+              <a:rPr lang="en-US" sz="1300" b="1" dirty="0">
                 <a:solidFill>
                   <a:srgbClr val="0F172A"/>
                 </a:solidFill>
@@ -6216,7 +8289,7 @@
               </a:rPr>
               <a:t>KELANCARAN DISTRIBUSI</a:t>
             </a:r>
-            <a:endParaRPr lang="en-US" sz="1200" dirty="0"/>
+            <a:endParaRPr lang="en-US" sz="1300" dirty="0"/>
           </a:p>
         </p:txBody>
       </p:sp>
@@ -6245,9 +8318,9 @@
               <a:buNone/>
             </a:pPr>
             <a:r>
-              <a:rPr lang="en-US" sz="1000" dirty="0">
-                <a:solidFill>
-                  <a:srgbClr val="334155"/>
+              <a:rPr lang="en-US" sz="1100" dirty="0">
+                <a:solidFill>
+                  <a:srgbClr val="1E293B"/>
                 </a:solidFill>
                 <a:latin typeface="Calibri" pitchFamily="34" charset="0"/>
                 <a:ea typeface="Calibri" pitchFamily="34" charset="-122"/>
@@ -6255,7 +8328,7 @@
               </a:rPr>
               <a:t>Pemberian dispensasi prioritas muatan bagi truk bahan pangan pokok di pelabuhan feri Bira - Pamatata, koordinasi kesiapan armada ASDP, serta subsidi ongkos angkut (SOA) maritim saat ombak tinggi.</a:t>
             </a:r>
-            <a:endParaRPr lang="en-US" sz="1000" dirty="0"/>
+            <a:endParaRPr lang="en-US" sz="1100" dirty="0"/>
           </a:p>
         </p:txBody>
       </p:sp>
@@ -6267,8 +8340,8 @@
         </p:nvSpPr>
         <p:spPr>
           <a:xfrm>
-            <a:off x="777240" y="4983480"/>
-            <a:ext cx="4892040" cy="274320"/>
+            <a:off x="777240" y="4965192"/>
+            <a:ext cx="4892040" cy="292608"/>
           </a:xfrm>
           <a:prstGeom prst="rect">
             <a:avLst/>
@@ -6284,7 +8357,7 @@
               <a:buNone/>
             </a:pPr>
             <a:r>
-              <a:rPr lang="en-US" sz="950" i="1" dirty="0">
+              <a:rPr lang="en-US" sz="1050" b="1" i="1" dirty="0">
                 <a:solidFill>
                   <a:srgbClr val="D97706"/>
                 </a:solidFill>
@@ -6294,7 +8367,7 @@
               </a:rPr>
               <a:t>Target: Arus barang tidak terputus lebih dari 48 jam.</a:t>
             </a:r>
-            <a:endParaRPr lang="en-US" sz="950" dirty="0"/>
+            <a:endParaRPr lang="en-US" sz="1050" dirty="0"/>
           </a:p>
         </p:txBody>
       </p:sp>
@@ -6317,20 +8390,13 @@
           <a:solidFill>
             <a:srgbClr val="FFFFFF"/>
           </a:solidFill>
-          <a:ln w="12700">
+          <a:ln w="15240">
             <a:solidFill>
-              <a:srgbClr val="E2E8F0"/>
+              <a:srgbClr val="CBD5E1"/>
             </a:solidFill>
             <a:prstDash val="solid"/>
           </a:ln>
         </p:spPr>
-        <p:txBody>
-          <a:bodyPr/>
-          <a:lstStyle/>
-          <a:p>
-            <a:endParaRPr lang="en-US"/>
-          </a:p>
-        </p:txBody>
       </p:sp>
       <p:sp>
         <p:nvSpPr>
@@ -6340,12 +8406,12 @@
         </p:nvSpPr>
         <p:spPr>
           <a:xfrm>
-            <a:off x="6492240" y="3794760"/>
-            <a:ext cx="411480" cy="320040"/>
+            <a:off x="6492240" y="3776472"/>
+            <a:ext cx="457200" cy="347472"/>
           </a:xfrm>
           <a:prstGeom prst="roundRect">
             <a:avLst>
-              <a:gd name="adj" fmla="val 17143"/>
+              <a:gd name="adj" fmla="val 15789"/>
             </a:avLst>
           </a:prstGeom>
           <a:solidFill>
@@ -6353,18 +8419,11 @@
           </a:solidFill>
           <a:ln w="12700">
             <a:solidFill>
-              <a:srgbClr val="E2E8F0"/>
+              <a:srgbClr val="CBD5E1"/>
             </a:solidFill>
             <a:prstDash val="solid"/>
           </a:ln>
         </p:spPr>
-        <p:txBody>
-          <a:bodyPr/>
-          <a:lstStyle/>
-          <a:p>
-            <a:endParaRPr lang="en-US"/>
-          </a:p>
-        </p:txBody>
       </p:sp>
       <p:sp>
         <p:nvSpPr>
@@ -6374,8 +8433,8 @@
         </p:nvSpPr>
         <p:spPr>
           <a:xfrm>
-            <a:off x="6492240" y="3794760"/>
-            <a:ext cx="411480" cy="320040"/>
+            <a:off x="6492240" y="3776472"/>
+            <a:ext cx="457200" cy="347472"/>
           </a:xfrm>
           <a:prstGeom prst="rect">
             <a:avLst/>
@@ -6391,7 +8450,7 @@
               <a:buNone/>
             </a:pPr>
             <a:r>
-              <a:rPr lang="en-US" sz="1000" b="1" dirty="0">
+              <a:rPr lang="en-US" sz="1200" b="1" dirty="0">
                 <a:solidFill>
                   <a:srgbClr val="4F46E5"/>
                 </a:solidFill>
@@ -6401,7 +8460,7 @@
               </a:rPr>
               <a:t>04</a:t>
             </a:r>
-            <a:endParaRPr lang="en-US" sz="1000" dirty="0"/>
+            <a:endParaRPr lang="en-US" sz="1200" dirty="0"/>
           </a:p>
         </p:txBody>
       </p:sp>
@@ -6413,8 +8472,8 @@
         </p:nvSpPr>
         <p:spPr>
           <a:xfrm>
-            <a:off x="7040880" y="3822192"/>
-            <a:ext cx="4297680" cy="274320"/>
+            <a:off x="7068312" y="3813048"/>
+            <a:ext cx="4297680" cy="292608"/>
           </a:xfrm>
           <a:prstGeom prst="rect">
             <a:avLst/>
@@ -6430,7 +8489,7 @@
               <a:buNone/>
             </a:pPr>
             <a:r>
-              <a:rPr lang="en-US" sz="1200" b="1" dirty="0">
+              <a:rPr lang="en-US" sz="1300" b="1" dirty="0">
                 <a:solidFill>
                   <a:srgbClr val="0F172A"/>
                 </a:solidFill>
@@ -6440,7 +8499,7 @@
               </a:rPr>
               <a:t>KOMUNIKASI EFEKTIF</a:t>
             </a:r>
-            <a:endParaRPr lang="en-US" sz="1200" dirty="0"/>
+            <a:endParaRPr lang="en-US" sz="1300" dirty="0"/>
           </a:p>
         </p:txBody>
       </p:sp>
@@ -6469,9 +8528,9 @@
               <a:buNone/>
             </a:pPr>
             <a:r>
-              <a:rPr lang="en-US" sz="1000" dirty="0">
-                <a:solidFill>
-                  <a:srgbClr val="334155"/>
+              <a:rPr lang="en-US" sz="1100" dirty="0">
+                <a:solidFill>
+                  <a:srgbClr val="1E293B"/>
                 </a:solidFill>
                 <a:latin typeface="Calibri" pitchFamily="34" charset="0"/>
                 <a:ea typeface="Calibri" pitchFamily="34" charset="-122"/>
@@ -6479,7 +8538,7 @@
               </a:rPr>
               <a:t>Publikasi berkala update harga komoditas pangan melalui kanal resmi dan radio daerah untuk mencegah kepanikan belanja (panic buying), sidak penimbunan di tingkat grosir, serta imbauan belanja bijak.</a:t>
             </a:r>
-            <a:endParaRPr lang="en-US" sz="1000" dirty="0"/>
+            <a:endParaRPr lang="en-US" sz="1100" dirty="0"/>
           </a:p>
         </p:txBody>
       </p:sp>
@@ -6491,8 +8550,8 @@
         </p:nvSpPr>
         <p:spPr>
           <a:xfrm>
-            <a:off x="6492240" y="4983480"/>
-            <a:ext cx="4892040" cy="274320"/>
+            <a:off x="6492240" y="4965192"/>
+            <a:ext cx="4892040" cy="292608"/>
           </a:xfrm>
           <a:prstGeom prst="rect">
             <a:avLst/>
@@ -6508,7 +8567,7 @@
               <a:buNone/>
             </a:pPr>
             <a:r>
-              <a:rPr lang="en-US" sz="950" i="1" dirty="0">
+              <a:rPr lang="en-US" sz="1050" b="1" i="1" dirty="0">
                 <a:solidFill>
                   <a:srgbClr val="4F46E5"/>
                 </a:solidFill>
@@ -6518,7 +8577,7 @@
               </a:rPr>
               <a:t>Target: Ekspektasi inflasi masyarakat tetap rasional dan tenang.</a:t>
             </a:r>
-            <a:endParaRPr lang="en-US" sz="950" dirty="0"/>
+            <a:endParaRPr lang="en-US" sz="1050" dirty="0"/>
           </a:p>
         </p:txBody>
       </p:sp>
@@ -6541,20 +8600,13 @@
           <a:solidFill>
             <a:srgbClr val="EFF6FF"/>
           </a:solidFill>
-          <a:ln w="12700">
+          <a:ln w="15240">
             <a:solidFill>
-              <a:srgbClr val="BFDBFE"/>
+              <a:srgbClr val="93C5FD"/>
             </a:solidFill>
             <a:prstDash val="solid"/>
           </a:ln>
         </p:spPr>
-        <p:txBody>
-          <a:bodyPr/>
-          <a:lstStyle/>
-          <a:p>
-            <a:endParaRPr lang="en-US"/>
-          </a:p>
-        </p:txBody>
       </p:sp>
       <p:sp>
         <p:nvSpPr>
@@ -6581,7 +8633,7 @@
               <a:buNone/>
             </a:pPr>
             <a:r>
-              <a:rPr lang="en-US" sz="950" b="1" dirty="0">
+              <a:rPr lang="en-US" sz="1100" b="1" dirty="0">
                 <a:solidFill>
                   <a:srgbClr val="1E40AF"/>
                 </a:solidFill>
@@ -6592,18 +8644,19 @@
               <a:t>Fokus Pemantauan Komoditas Prioritas 2026: </a:t>
             </a:r>
             <a:r>
-              <a:rPr lang="en-US" sz="950" dirty="0">
-                <a:solidFill>
-                  <a:srgbClr val="334155"/>
-                </a:solidFill>
-                <a:latin typeface="Calibri" pitchFamily="34" charset="0"/>
-                <a:ea typeface="Calibri" pitchFamily="34" charset="-122"/>
-                <a:cs typeface="Calibri" pitchFamily="34" charset="-120"/>
-              </a:rPr>
-              <a:t>Cabai Rawit (15x volatil), Telur Ayam Ras, Daging Sapi/Ayam saat HBKN, dan Beras di awal musim hujan.\n</a:t>
-            </a:r>
-            <a:r>
-              <a:rPr lang="en-US" sz="950" b="1" dirty="0">
+              <a:rPr lang="en-US" sz="1100" dirty="0">
+                <a:solidFill>
+                  <a:srgbClr val="1E293B"/>
+                </a:solidFill>
+                <a:latin typeface="Calibri" pitchFamily="34" charset="0"/>
+                <a:ea typeface="Calibri" pitchFamily="34" charset="-122"/>
+                <a:cs typeface="Calibri" pitchFamily="34" charset="-120"/>
+              </a:rPr>
+              <a:t>Cabai Rawit (15x volatil), Telur Ayam Ras, Daging Sapi/Ayam saat HBKN, dan Beras di awal musim hujan.
+</a:t>
+            </a:r>
+            <a:r>
+              <a:rPr lang="en-US" sz="1050" b="1" dirty="0">
                 <a:solidFill>
                   <a:srgbClr val="1E40AF"/>
                 </a:solidFill>
@@ -6614,9 +8667,9 @@
               <a:t>*Rujukan Ketahanan Pangan: </a:t>
             </a:r>
             <a:r>
-              <a:rPr lang="en-US" sz="950" dirty="0">
-                <a:solidFill>
-                  <a:srgbClr val="64748B"/>
+              <a:rPr lang="en-US" sz="1050" dirty="0">
+                <a:solidFill>
+                  <a:srgbClr val="475569"/>
                 </a:solidFill>
                 <a:latin typeface="Calibri" pitchFamily="34" charset="0"/>
                 <a:ea typeface="Calibri" pitchFamily="34" charset="-122"/>
@@ -6624,7 +8677,7 @@
               </a:rPr>
               <a:t>Kebijakan harga dan pasokan diarahkan untuk menjamin terpenuhinya standar Angka Kecukupan Gizi (AKG) 2.100 kkal / kapita / hari.</a:t>
             </a:r>
-            <a:endParaRPr lang="en-US" sz="950" dirty="0"/>
+            <a:endParaRPr lang="en-US" sz="1100" dirty="0"/>
           </a:p>
         </p:txBody>
       </p:sp>
@@ -6680,24 +8733,17 @@
           <a:solidFill>
             <a:srgbClr val="1E293B"/>
           </a:solidFill>
-          <a:ln w="19050">
+          <a:ln w="25400">
             <a:solidFill>
-              <a:srgbClr val="334155"/>
+              <a:srgbClr val="475569"/>
             </a:solidFill>
             <a:prstDash val="solid"/>
           </a:ln>
         </p:spPr>
-        <p:txBody>
-          <a:bodyPr/>
-          <a:lstStyle/>
-          <a:p>
-            <a:endParaRPr lang="en-US"/>
-          </a:p>
-        </p:txBody>
       </p:sp>
       <p:pic>
         <p:nvPicPr>
-          <p:cNvPr id="3" name="Image 0" descr="/Volumes/work/_Projects/siph/assets/logos/logo_selayar.png"/>
+          <p:cNvPr id="3" name="Image 0" descr="preencoded.png"/>
           <p:cNvPicPr>
             <a:picLocks noChangeAspect="1"/>
           </p:cNvPicPr>
@@ -6712,7 +8758,7 @@
         <p:spPr>
           <a:xfrm>
             <a:off x="1188720" y="1188720"/>
-            <a:ext cx="914400" cy="914400"/>
+            <a:ext cx="1005840" cy="1005840"/>
           </a:xfrm>
           <a:prstGeom prst="rect">
             <a:avLst/>
@@ -6727,7 +8773,7 @@
         </p:nvSpPr>
         <p:spPr>
           <a:xfrm>
-            <a:off x="1188720" y="2377440"/>
+            <a:off x="1188720" y="2423160"/>
             <a:ext cx="4572000" cy="640080"/>
           </a:xfrm>
           <a:prstGeom prst="rect">
@@ -6744,7 +8790,7 @@
               <a:buNone/>
             </a:pPr>
             <a:r>
-              <a:rPr lang="en-US" sz="3200" b="1" dirty="0">
+              <a:rPr lang="en-US" sz="3600" b="1" dirty="0">
                 <a:solidFill>
                   <a:srgbClr val="FFFFFF"/>
                 </a:solidFill>
@@ -6754,7 +8800,7 @@
               </a:rPr>
               <a:t>Terima Kasih</a:t>
             </a:r>
-            <a:endParaRPr lang="en-US" sz="3200" dirty="0"/>
+            <a:endParaRPr lang="en-US" sz="3600" dirty="0"/>
           </a:p>
         </p:txBody>
       </p:sp>
@@ -6766,7 +8812,7 @@
         </p:nvSpPr>
         <p:spPr>
           <a:xfrm>
-            <a:off x="1188720" y="3063240"/>
+            <a:off x="1188720" y="3154680"/>
             <a:ext cx="4572000" cy="640080"/>
           </a:xfrm>
           <a:prstGeom prst="rect">
@@ -6783,9 +8829,9 @@
               <a:buNone/>
             </a:pPr>
             <a:r>
-              <a:rPr lang="en-US" sz="1400" dirty="0">
-                <a:solidFill>
-                  <a:srgbClr val="94A3B8"/>
+              <a:rPr lang="en-US" sz="1500" dirty="0">
+                <a:solidFill>
+                  <a:srgbClr val="CBD5E1"/>
                 </a:solidFill>
                 <a:latin typeface="Calibri" pitchFamily="34" charset="0"/>
                 <a:ea typeface="Calibri" pitchFamily="34" charset="-122"/>
@@ -6793,7 +8839,7 @@
               </a:rPr>
               <a:t>Sinergi Kuat Menjaga Stabilitas Harga &amp; Kesejahteraan Masyarakat Kepulauan Selayar</a:t>
             </a:r>
-            <a:endParaRPr lang="en-US" sz="1400" dirty="0"/>
+            <a:endParaRPr lang="en-US" sz="1500" dirty="0"/>
           </a:p>
         </p:txBody>
       </p:sp>
@@ -6816,20 +8862,13 @@
           <a:solidFill>
             <a:srgbClr val="0F172A"/>
           </a:solidFill>
-          <a:ln w="12700">
+          <a:ln w="15240">
             <a:solidFill>
-              <a:srgbClr val="334155"/>
+              <a:srgbClr val="475569"/>
             </a:solidFill>
             <a:prstDash val="solid"/>
           </a:ln>
         </p:spPr>
-        <p:txBody>
-          <a:bodyPr/>
-          <a:lstStyle/>
-          <a:p>
-            <a:endParaRPr lang="en-US"/>
-          </a:p>
-        </p:txBody>
       </p:sp>
       <p:sp>
         <p:nvSpPr>
@@ -6856,7 +8895,7 @@
               <a:buNone/>
             </a:pPr>
             <a:r>
-              <a:rPr lang="en-US" sz="1300" b="1" dirty="0">
+              <a:rPr lang="en-US" sz="1400" b="1" dirty="0">
                 <a:solidFill>
                   <a:srgbClr val="38BDF8"/>
                 </a:solidFill>
@@ -6864,33 +8903,64 @@
                 <a:ea typeface="Calibri" pitchFamily="34" charset="-122"/>
                 <a:cs typeface="Calibri" pitchFamily="34" charset="-120"/>
               </a:rPr>
-              <a:t>Tim Pengendalian Inflasi Daerah (TPID)\n</a:t>
-            </a:r>
-            <a:endParaRPr lang="en-US" sz="1300" dirty="0"/>
+              <a:t>Tim Pengendalian Inflasi Daerah (TPID)
+</a:t>
+            </a:r>
+            <a:endParaRPr lang="en-US" sz="1400" dirty="0"/>
           </a:p>
           <a:p>
             <a:pPr marL="0" indent="0">
               <a:buNone/>
             </a:pPr>
             <a:r>
+              <a:rPr lang="en-US" sz="1200" b="1" dirty="0">
+                <a:solidFill>
+                  <a:srgbClr val="F1F5F9"/>
+                </a:solidFill>
+                <a:latin typeface="Calibri" pitchFamily="34" charset="0"/>
+                <a:ea typeface="Calibri" pitchFamily="34" charset="-122"/>
+                <a:cs typeface="Calibri" pitchFamily="34" charset="-120"/>
+              </a:rPr>
+              <a:t>Kabupaten Kepulauan Selayar Tahun 2026
+</a:t>
+            </a:r>
+            <a:endParaRPr lang="en-US" sz="1400" dirty="0"/>
+          </a:p>
+          <a:p>
+            <a:pPr marL="0" indent="0">
+              <a:buNone/>
+            </a:pPr>
+            <a:r>
               <a:rPr lang="en-US" sz="1100" b="1" dirty="0">
                 <a:solidFill>
-                  <a:srgbClr val="F1F5F9"/>
-                </a:solidFill>
-                <a:latin typeface="Calibri" pitchFamily="34" charset="0"/>
-                <a:ea typeface="Calibri" pitchFamily="34" charset="-122"/>
-                <a:cs typeface="Calibri" pitchFamily="34" charset="-120"/>
-              </a:rPr>
-              <a:t>Kabupaten Kepulauan Selayar Tahun 2026\n\n</a:t>
-            </a:r>
-            <a:endParaRPr lang="en-US" sz="1300" dirty="0"/>
+                  <a:srgbClr val="94A3B8"/>
+                </a:solidFill>
+                <a:latin typeface="Calibri" pitchFamily="34" charset="0"/>
+                <a:ea typeface="Calibri" pitchFamily="34" charset="-122"/>
+                <a:cs typeface="Calibri" pitchFamily="34" charset="-120"/>
+              </a:rPr>
+              <a:t>Sekretariat: </a:t>
+            </a:r>
+            <a:r>
+              <a:rPr lang="en-US" sz="1100" dirty="0">
+                <a:solidFill>
+                  <a:srgbClr val="CBD5E1"/>
+                </a:solidFill>
+                <a:latin typeface="Calibri" pitchFamily="34" charset="0"/>
+                <a:ea typeface="Calibri" pitchFamily="34" charset="-122"/>
+                <a:cs typeface="Calibri" pitchFamily="34" charset="-120"/>
+              </a:rPr>
+              <a:t>Bagian Perekonomian Setda Kab. Kepulauan Selayar
+</a:t>
+            </a:r>
+            <a:endParaRPr lang="en-US" sz="1400" dirty="0"/>
           </a:p>
           <a:p>
             <a:pPr marL="0" indent="0">
               <a:buNone/>
             </a:pPr>
             <a:r>
-              <a:rPr lang="en-US" sz="1000" b="1" dirty="0">
+              <a:rPr lang="en-US" sz="1100" b="1" dirty="0">
                 <a:solidFill>
                   <a:srgbClr val="94A3B8"/>
                 </a:solidFill>
@@ -6898,10 +8968,10 @@
                 <a:ea typeface="Calibri" pitchFamily="34" charset="-122"/>
                 <a:cs typeface="Calibri" pitchFamily="34" charset="-120"/>
               </a:rPr>
-              <a:t>Sekretariat: </a:t>
-            </a:r>
-            <a:r>
-              <a:rPr lang="en-US" sz="1000" dirty="0">
+              <a:t>Mitra Data: </a:t>
+            </a:r>
+            <a:r>
+              <a:rPr lang="en-US" sz="1100" dirty="0">
                 <a:solidFill>
                   <a:srgbClr val="CBD5E1"/>
                 </a:solidFill>
@@ -6909,44 +8979,17 @@
                 <a:ea typeface="Calibri" pitchFamily="34" charset="-122"/>
                 <a:cs typeface="Calibri" pitchFamily="34" charset="-120"/>
               </a:rPr>
-              <a:t>Bagian Perekonomian Setda Kab. Kepulauan Selayar\n</a:t>
-            </a:r>
-            <a:endParaRPr lang="en-US" sz="1300" dirty="0"/>
+              <a:t>BPS Kabupaten Kepulauan Selayar
+</a:t>
+            </a:r>
+            <a:endParaRPr lang="en-US" sz="1400" dirty="0"/>
           </a:p>
           <a:p>
             <a:pPr marL="0" indent="0">
               <a:buNone/>
             </a:pPr>
             <a:r>
-              <a:rPr lang="en-US" sz="1000" b="1" dirty="0">
-                <a:solidFill>
-                  <a:srgbClr val="94A3B8"/>
-                </a:solidFill>
-                <a:latin typeface="Calibri" pitchFamily="34" charset="0"/>
-                <a:ea typeface="Calibri" pitchFamily="34" charset="-122"/>
-                <a:cs typeface="Calibri" pitchFamily="34" charset="-120"/>
-              </a:rPr>
-              <a:t>Mitra Data: </a:t>
-            </a:r>
-            <a:r>
-              <a:rPr lang="en-US" sz="1000" dirty="0">
-                <a:solidFill>
-                  <a:srgbClr val="CBD5E1"/>
-                </a:solidFill>
-                <a:latin typeface="Calibri" pitchFamily="34" charset="0"/>
-                <a:ea typeface="Calibri" pitchFamily="34" charset="-122"/>
-                <a:cs typeface="Calibri" pitchFamily="34" charset="-120"/>
-              </a:rPr>
-              <a:t>BPS Kabupaten Kepulauan Selayar\n\n</a:t>
-            </a:r>
-            <a:endParaRPr lang="en-US" sz="1300" dirty="0"/>
-          </a:p>
-          <a:p>
-            <a:pPr marL="0" indent="0">
-              <a:buNone/>
-            </a:pPr>
-            <a:r>
-              <a:rPr lang="en-US" sz="1000" b="1" dirty="0">
+              <a:rPr lang="en-US" sz="1100" b="1" dirty="0">
                 <a:solidFill>
                   <a:srgbClr val="64748B"/>
                 </a:solidFill>
@@ -6957,7 +9000,7 @@
               <a:t>Dashboard IPH: </a:t>
             </a:r>
             <a:r>
-              <a:rPr lang="en-US" sz="1000" b="1" dirty="0">
+              <a:rPr lang="en-US" sz="1100" b="1" dirty="0">
                 <a:solidFill>
                   <a:srgbClr val="38BDF8"/>
                 </a:solidFill>
@@ -6967,7 +9010,7 @@
               </a:rPr>
               <a:t>https://ridsonap.github.io/siph/?kab=7301</a:t>
             </a:r>
-            <a:endParaRPr lang="en-US" sz="1300" dirty="0"/>
+            <a:endParaRPr lang="en-US" sz="1400" dirty="0"/>
           </a:p>
         </p:txBody>
       </p:sp>
@@ -6990,24 +9033,17 @@
           <a:solidFill>
             <a:srgbClr val="1E293B"/>
           </a:solidFill>
-          <a:ln w="19050">
+          <a:ln w="25400">
             <a:solidFill>
               <a:srgbClr val="F59E0B"/>
             </a:solidFill>
             <a:prstDash val="solid"/>
           </a:ln>
         </p:spPr>
-        <p:txBody>
-          <a:bodyPr/>
-          <a:lstStyle/>
-          <a:p>
-            <a:endParaRPr lang="en-US"/>
-          </a:p>
-        </p:txBody>
       </p:sp>
       <p:pic>
         <p:nvPicPr>
-          <p:cNvPr id="9" name="Image 1" descr="/Volumes/work/_Projects/siph/assets/logos/logo_bps.png"/>
+          <p:cNvPr id="9" name="Image 1" descr="preencoded.png"/>
           <p:cNvPicPr>
             <a:picLocks noChangeAspect="1"/>
           </p:cNvPicPr>
@@ -7022,7 +9058,7 @@
         <p:spPr>
           <a:xfrm>
             <a:off x="6949440" y="1188720"/>
-            <a:ext cx="1645920" cy="557784"/>
+            <a:ext cx="1737360" cy="585216"/>
           </a:xfrm>
           <a:prstGeom prst="rect">
             <a:avLst/>
@@ -7031,7 +9067,7 @@
       </p:pic>
       <p:pic>
         <p:nvPicPr>
-          <p:cNvPr id="10" name="Image 2" descr="/Volumes/work/_Projects/siph/assets/logos/logo_se2026.png"/>
+          <p:cNvPr id="10" name="Image 2" descr="preencoded.png"/>
           <p:cNvPicPr>
             <a:picLocks noChangeAspect="1"/>
           </p:cNvPicPr>
@@ -7046,7 +9082,7 @@
         <p:spPr>
           <a:xfrm>
             <a:off x="9966960" y="1051560"/>
-            <a:ext cx="1005840" cy="1005840"/>
+            <a:ext cx="1051560" cy="1051560"/>
           </a:xfrm>
           <a:prstGeom prst="rect">
             <a:avLst/>
@@ -7062,30 +9098,23 @@
         <p:spPr>
           <a:xfrm>
             <a:off x="6949440" y="2103120"/>
-            <a:ext cx="3200400" cy="320040"/>
+            <a:ext cx="3474720" cy="347472"/>
           </a:xfrm>
           <a:prstGeom prst="roundRect">
             <a:avLst>
-              <a:gd name="adj" fmla="val 22857"/>
+              <a:gd name="adj" fmla="val 21053"/>
             </a:avLst>
           </a:prstGeom>
           <a:solidFill>
             <a:srgbClr val="D97706"/>
           </a:solidFill>
-          <a:ln w="12700">
+          <a:ln w="15240">
             <a:solidFill>
               <a:srgbClr val="FBBF24"/>
             </a:solidFill>
             <a:prstDash val="solid"/>
           </a:ln>
         </p:spPr>
-        <p:txBody>
-          <a:bodyPr/>
-          <a:lstStyle/>
-          <a:p>
-            <a:endParaRPr lang="en-US"/>
-          </a:p>
-        </p:txBody>
       </p:sp>
       <p:sp>
         <p:nvSpPr>
@@ -7096,7 +9125,7 @@
         <p:spPr>
           <a:xfrm>
             <a:off x="6949440" y="2103120"/>
-            <a:ext cx="3200400" cy="320040"/>
+            <a:ext cx="3474720" cy="347472"/>
           </a:xfrm>
           <a:prstGeom prst="rect">
             <a:avLst/>
@@ -7112,7 +9141,7 @@
               <a:buNone/>
             </a:pPr>
             <a:r>
-              <a:rPr lang="en-US" sz="1000" b="1" dirty="0">
+              <a:rPr lang="en-US" sz="1100" b="1" dirty="0">
                 <a:solidFill>
                   <a:srgbClr val="FFFFFF"/>
                 </a:solidFill>
@@ -7122,7 +9151,7 @@
               </a:rPr>
               <a:t>#MencatatEkonomiIndonesia</a:t>
             </a:r>
-            <a:endParaRPr lang="en-US" sz="1000" dirty="0"/>
+            <a:endParaRPr lang="en-US" sz="1100" dirty="0"/>
           </a:p>
         </p:txBody>
       </p:sp>
@@ -7134,7 +9163,7 @@
         </p:nvSpPr>
         <p:spPr>
           <a:xfrm>
-            <a:off x="6949440" y="2560320"/>
+            <a:off x="6949440" y="2606040"/>
             <a:ext cx="4114800" cy="822960"/>
           </a:xfrm>
           <a:prstGeom prst="rect">
@@ -7151,7 +9180,7 @@
               <a:buNone/>
             </a:pPr>
             <a:r>
-              <a:rPr lang="en-US" sz="2000" b="1" dirty="0">
+              <a:rPr lang="en-US" sz="2200" b="1" dirty="0">
                 <a:solidFill>
                   <a:srgbClr val="FFFFFF"/>
                 </a:solidFill>
@@ -7159,9 +9188,26 @@
                 <a:ea typeface="Calibri" pitchFamily="34" charset="-122"/>
                 <a:cs typeface="Calibri" pitchFamily="34" charset="-120"/>
               </a:rPr>
-              <a:t>SENSUS EKONOMI 2026\nMILIK INDONESIA</a:t>
-            </a:r>
-            <a:endParaRPr lang="en-US" sz="2000" dirty="0"/>
+              <a:t>SENSUS EKONOMI 2026</a:t>
+            </a:r>
+            <a:endParaRPr lang="en-US" sz="2200" dirty="0"/>
+          </a:p>
+          <a:p>
+            <a:pPr marL="0" indent="0">
+              <a:buNone/>
+            </a:pPr>
+            <a:r>
+              <a:rPr lang="en-US" sz="2200" b="1" dirty="0">
+                <a:solidFill>
+                  <a:srgbClr val="FFFFFF"/>
+                </a:solidFill>
+                <a:latin typeface="Calibri" pitchFamily="34" charset="0"/>
+                <a:ea typeface="Calibri" pitchFamily="34" charset="-122"/>
+                <a:cs typeface="Calibri" pitchFamily="34" charset="-120"/>
+              </a:rPr>
+              <a:t>MILIK INDONESIA</a:t>
+            </a:r>
+            <a:endParaRPr lang="en-US" sz="2200" dirty="0"/>
           </a:p>
         </p:txBody>
       </p:sp>
@@ -7173,8 +9219,8 @@
         </p:nvSpPr>
         <p:spPr>
           <a:xfrm>
-            <a:off x="6949440" y="3474720"/>
-            <a:ext cx="4114800" cy="914400"/>
+            <a:off x="6949440" y="3520440"/>
+            <a:ext cx="4114800" cy="960120"/>
           </a:xfrm>
           <a:prstGeom prst="rect">
             <a:avLst/>
@@ -7190,7 +9236,7 @@
               <a:buNone/>
             </a:pPr>
             <a:r>
-              <a:rPr lang="en-US" sz="1150" dirty="0">
+              <a:rPr lang="en-US" sz="1250" dirty="0">
                 <a:solidFill>
                   <a:srgbClr val="CBD5E1"/>
                 </a:solidFill>
@@ -7200,7 +9246,7 @@
               </a:rPr>
               <a:t>Bersama kita kawal pelaksanaan SENSUS EKONOMI 2026 untuk mewujudkan basis data ekonomi yang akurat, berdaulat, dan mendorong kemandirian perekonomian nasional.</a:t>
             </a:r>
-            <a:endParaRPr lang="en-US" sz="1150" dirty="0"/>
+            <a:endParaRPr lang="en-US" sz="1250" dirty="0"/>
           </a:p>
         </p:txBody>
       </p:sp>
@@ -7212,7 +9258,7 @@
         </p:nvSpPr>
         <p:spPr>
           <a:xfrm>
-            <a:off x="6949440" y="4572000"/>
+            <a:off x="6949440" y="4617720"/>
             <a:ext cx="4114800" cy="1097280"/>
           </a:xfrm>
           <a:prstGeom prst="roundRect">
@@ -7223,20 +9269,13 @@
           <a:solidFill>
             <a:srgbClr val="0F172A"/>
           </a:solidFill>
-          <a:ln w="12700">
+          <a:ln w="15240">
             <a:solidFill>
-              <a:srgbClr val="334155"/>
+              <a:srgbClr val="475569"/>
             </a:solidFill>
             <a:prstDash val="solid"/>
           </a:ln>
         </p:spPr>
-        <p:txBody>
-          <a:bodyPr/>
-          <a:lstStyle/>
-          <a:p>
-            <a:endParaRPr lang="en-US"/>
-          </a:p>
-        </p:txBody>
       </p:sp>
       <p:sp>
         <p:nvSpPr>
@@ -7246,7 +9285,7 @@
         </p:nvSpPr>
         <p:spPr>
           <a:xfrm>
-            <a:off x="7132320" y="4709160"/>
+            <a:off x="7132320" y="4754880"/>
             <a:ext cx="3749040" cy="822960"/>
           </a:xfrm>
           <a:prstGeom prst="rect">
@@ -7263,17 +9302,51 @@
               <a:buNone/>
             </a:pPr>
             <a:r>
-              <a:rPr lang="en-US" sz="1050" dirty="0">
-                <a:solidFill>
-                  <a:srgbClr val="94A3B8"/>
-                </a:solidFill>
-                <a:latin typeface="Calibri" pitchFamily="34" charset="0"/>
-                <a:ea typeface="Calibri" pitchFamily="34" charset="-122"/>
-                <a:cs typeface="Calibri" pitchFamily="34" charset="-120"/>
-              </a:rPr>
-              <a:t>Badan Pusat Statistik (BPS)\nMenyediakan Data Berkualitas untuk Indonesia Maju\nwww.bps.go.id</a:t>
-            </a:r>
-            <a:endParaRPr lang="en-US" sz="1050" dirty="0"/>
+              <a:rPr lang="en-US" sz="1150" dirty="0">
+                <a:solidFill>
+                  <a:srgbClr val="CBD5E1"/>
+                </a:solidFill>
+                <a:latin typeface="Calibri" pitchFamily="34" charset="0"/>
+                <a:ea typeface="Calibri" pitchFamily="34" charset="-122"/>
+                <a:cs typeface="Calibri" pitchFamily="34" charset="-120"/>
+              </a:rPr>
+              <a:t>Badan Pusat Statistik (BPS)</a:t>
+            </a:r>
+            <a:endParaRPr lang="en-US" sz="1150" dirty="0"/>
+          </a:p>
+          <a:p>
+            <a:pPr marL="0" indent="0">
+              <a:buNone/>
+            </a:pPr>
+            <a:r>
+              <a:rPr lang="en-US" sz="1150" dirty="0">
+                <a:solidFill>
+                  <a:srgbClr val="CBD5E1"/>
+                </a:solidFill>
+                <a:latin typeface="Calibri" pitchFamily="34" charset="0"/>
+                <a:ea typeface="Calibri" pitchFamily="34" charset="-122"/>
+                <a:cs typeface="Calibri" pitchFamily="34" charset="-120"/>
+              </a:rPr>
+              <a:t>Menyediakan Data Berkualitas untuk Indonesia Maju</a:t>
+            </a:r>
+            <a:endParaRPr lang="en-US" sz="1150" dirty="0"/>
+          </a:p>
+          <a:p>
+            <a:pPr marL="0" indent="0">
+              <a:buNone/>
+            </a:pPr>
+            <a:r>
+              <a:rPr lang="en-US" sz="1150" dirty="0">
+                <a:solidFill>
+                  <a:srgbClr val="CBD5E1"/>
+                </a:solidFill>
+                <a:latin typeface="Calibri" pitchFamily="34" charset="0"/>
+                <a:ea typeface="Calibri" pitchFamily="34" charset="-122"/>
+                <a:cs typeface="Calibri" pitchFamily="34" charset="-120"/>
+              </a:rPr>
+              <a:t>www.bps.go.id</a:t>
+            </a:r>
+            <a:endParaRPr lang="en-US" sz="1150" dirty="0"/>
           </a:p>
         </p:txBody>
       </p:sp>
